--- a/submission/_drafts/속도는벡터_중간발표.pptx
+++ b/submission/_drafts/속도는벡터_중간발표.pptx
@@ -21,6 +21,7 @@
     <p:sldId id="269" r:id="rId20"/>
     <p:sldId id="270" r:id="rId21"/>
     <p:sldId id="271" r:id="rId22"/>
+    <p:sldId id="272" r:id="rId23"/>
   </p:sldIdLst>
   <p:sldSz cx="12191695" cy="6858000" type="screen4x3"/>
   <p:notesSz cx="6858000" cy="9144000"/>
@@ -3803,7 +3804,7 @@
                 <a:ea typeface="Apple SD Gothic Neo"/>
                 <a:cs typeface="Apple SD Gothic Neo"/>
               </a:rPr>
-              <a:t>10 / 16</a:t>
+              <a:t>10 / 17</a:t>
             </a:r>
           </a:p>
         </p:txBody>
@@ -4595,7 +4596,7 @@
                 <a:ea typeface="Apple SD Gothic Neo"/>
                 <a:cs typeface="Apple SD Gothic Neo"/>
               </a:rPr>
-              <a:t>①  DEEP 1M ↔ 8M : CI 겹침 (CONSISTENT) — 8 배 규모에서 동일 효과 재현</a:t>
+              <a:t>①  DEEP 1M vs 8M : CI 겹침 (CONSISTENT) — 8 배 규모에서 동일 효과 재현</a:t>
             </a:r>
           </a:p>
           <a:p>
@@ -4874,7 +4875,7 @@
                 <a:ea typeface="Apple SD Gothic Neo"/>
                 <a:cs typeface="Apple SD Gothic Neo"/>
               </a:rPr>
-              <a:t>11 / 16</a:t>
+              <a:t>11 / 17</a:t>
             </a:r>
           </a:p>
         </p:txBody>
@@ -6331,7 +6332,7 @@
                 <a:ea typeface="Apple SD Gothic Neo"/>
                 <a:cs typeface="Apple SD Gothic Neo"/>
               </a:rPr>
-              <a:t>12 / 16</a:t>
+              <a:t>12 / 17</a:t>
             </a:r>
           </a:p>
         </p:txBody>
@@ -6677,7 +6678,7 @@
                 <a:ea typeface="Apple SD Gothic Neo"/>
                 <a:cs typeface="Apple SD Gothic Neo"/>
               </a:rPr>
-              <a:t>A. LSH Random Hyperplane</a:t>
+              <a:t>1. LSH Random Hyperplane</a:t>
             </a:r>
           </a:p>
         </p:txBody>
@@ -6762,7 +6763,7 @@
                 <a:ea typeface="Apple SD Gothic Neo"/>
                 <a:cs typeface="Apple SD Gothic Neo"/>
               </a:rPr>
-              <a:t>C. Random Projection (JL)</a:t>
+              <a:t>2. Random Projection (JL)</a:t>
             </a:r>
           </a:p>
         </p:txBody>
@@ -6847,7 +6848,7 @@
                 <a:ea typeface="Apple SD Gothic Neo"/>
                 <a:cs typeface="Apple SD Gothic Neo"/>
               </a:rPr>
-              <a:t>E. Hilbert Curve</a:t>
+              <a:t>3. Hilbert Curve</a:t>
             </a:r>
           </a:p>
         </p:txBody>
@@ -6932,7 +6933,7 @@
                 <a:ea typeface="Apple SD Gothic Neo"/>
                 <a:cs typeface="Apple SD Gothic Neo"/>
               </a:rPr>
-              <a:t>F. Mini-batch K-means</a:t>
+              <a:t>4. Mini-batch K-means</a:t>
             </a:r>
           </a:p>
         </p:txBody>
@@ -7232,7 +7233,7 @@
                 <a:ea typeface="Apple SD Gothic Neo"/>
                 <a:cs typeface="Apple SD Gothic Neo"/>
               </a:rPr>
-              <a:t>G. Distance-Shell</a:t>
+              <a:t>5. Distance-Shell</a:t>
             </a:r>
           </a:p>
         </p:txBody>
@@ -7317,7 +7318,7 @@
                 <a:ea typeface="Apple SD Gothic Neo"/>
                 <a:cs typeface="Apple SD Gothic Neo"/>
               </a:rPr>
-              <a:t>B. KDE-pilot (Neyman)</a:t>
+              <a:t>6. KDE-pilot (Neyman)</a:t>
             </a:r>
           </a:p>
         </p:txBody>
@@ -7617,7 +7618,7 @@
                 <a:ea typeface="Apple SD Gothic Neo"/>
                 <a:cs typeface="Apple SD Gothic Neo"/>
               </a:rPr>
-              <a:t>H. Importance Sampling</a:t>
+              <a:t>7. Importance Sampling</a:t>
             </a:r>
           </a:p>
         </p:txBody>
@@ -8023,7 +8024,7 @@
                 <a:ea typeface="Apple SD Gothic Neo"/>
                 <a:cs typeface="Apple SD Gothic Neo"/>
               </a:rPr>
-              <a:t>13 / 16</a:t>
+              <a:t>13 / 17</a:t>
             </a:r>
           </a:p>
         </p:txBody>
@@ -9740,7 +9741,7 @@
                 <a:ea typeface="Apple SD Gothic Neo"/>
                 <a:cs typeface="Apple SD Gothic Neo"/>
               </a:rPr>
-              <a:t>14 / 16</a:t>
+              <a:t>14 / 17</a:t>
             </a:r>
           </a:p>
         </p:txBody>
@@ -11542,402 +11543,1916 @@
                 <a:ea typeface="Apple SD Gothic Neo"/>
                 <a:cs typeface="Apple SD Gothic Neo"/>
               </a:rPr>
-              <a:t>15 / 16</a:t>
-            </a:r>
-          </a:p>
-        </p:txBody>
-      </p:sp>
-      <p:graphicFrame>
-        <p:nvGraphicFramePr>
-          <p:cNvPr id="6" name="Table 5"/>
-          <p:cNvGraphicFramePr>
-            <a:graphicFrameLocks noGrp="1"/>
-          </p:cNvGraphicFramePr>
-          <p:nvPr/>
-        </p:nvGraphicFramePr>
-        <p:xfrm>
-          <a:off x="548640" y="1508760"/>
-          <a:ext cx="11064240" cy="3200400"/>
-        </p:xfrm>
-        <a:graphic>
-          <a:graphicData uri="http://schemas.openxmlformats.org/drawingml/2006/table">
-            <a:tbl>
-              <a:tblPr firstRow="1" bandRow="1">
-                <a:tableStyleId>{5C22544A-7EE6-4342-B048-85BDC9FD1C3A}</a:tableStyleId>
-              </a:tblPr>
-              <a:tblGrid>
-                <a:gridCol w="1371600"/>
-                <a:gridCol w="1645920"/>
-                <a:gridCol w="8046720"/>
-              </a:tblGrid>
-              <a:tr h="640080">
-                <a:tc>
-                  <a:txBody>
-                    <a:bodyPr/>
-                    <a:lstStyle/>
-                    <a:p>
-                      <a:pPr algn="l"/>
-                      <a:r>
-                        <a:rPr sz="1200" b="1">
-                          <a:solidFill>
-                            <a:srgbClr val="FFFFFF"/>
-                          </a:solidFill>
-                          <a:latin typeface="Apple SD Gothic Neo"/>
-                        </a:rPr>
-                        <a:t>이름</a:t>
-                      </a:r>
-                    </a:p>
-                  </a:txBody>
-                  <a:tcPr>
-                    <a:solidFill>
-                      <a:srgbClr val="2563EB"/>
-                    </a:solidFill>
-                  </a:tcPr>
-                </a:tc>
-                <a:tc>
-                  <a:txBody>
-                    <a:bodyPr/>
-                    <a:lstStyle/>
-                    <a:p>
-                      <a:pPr algn="l"/>
-                      <a:r>
-                        <a:rPr sz="1200" b="1">
-                          <a:solidFill>
-                            <a:srgbClr val="FFFFFF"/>
-                          </a:solidFill>
-                          <a:latin typeface="Apple SD Gothic Neo"/>
-                        </a:rPr>
-                        <a:t>역할</a:t>
-                      </a:r>
-                    </a:p>
-                  </a:txBody>
-                  <a:tcPr>
-                    <a:solidFill>
-                      <a:srgbClr val="2563EB"/>
-                    </a:solidFill>
-                  </a:tcPr>
-                </a:tc>
-                <a:tc>
-                  <a:txBody>
-                    <a:bodyPr/>
-                    <a:lstStyle/>
-                    <a:p>
-                      <a:pPr algn="l"/>
-                      <a:r>
-                        <a:rPr sz="1200" b="1">
-                          <a:solidFill>
-                            <a:srgbClr val="FFFFFF"/>
-                          </a:solidFill>
-                          <a:latin typeface="Apple SD Gothic Neo"/>
-                        </a:rPr>
-                        <a:t>담당</a:t>
-                      </a:r>
-                    </a:p>
-                  </a:txBody>
-                  <a:tcPr>
-                    <a:solidFill>
-                      <a:srgbClr val="2563EB"/>
-                    </a:solidFill>
-                  </a:tcPr>
-                </a:tc>
-              </a:tr>
-              <a:tr h="640080">
-                <a:tc>
-                  <a:txBody>
-                    <a:bodyPr/>
-                    <a:lstStyle/>
-                    <a:p>
-                      <a:pPr algn="l"/>
-                      <a:r>
-                        <a:rPr sz="1100" b="1">
-                          <a:solidFill>
-                            <a:srgbClr val="0F172A"/>
-                          </a:solidFill>
-                          <a:latin typeface="Apple SD Gothic Neo"/>
-                        </a:rPr>
-                        <a:t>박세은</a:t>
-                      </a:r>
-                    </a:p>
-                  </a:txBody>
-                  <a:tcPr>
-                    <a:solidFill>
-                      <a:srgbClr val="F8FAFC"/>
-                    </a:solidFill>
-                  </a:tcPr>
-                </a:tc>
-                <a:tc>
-                  <a:txBody>
-                    <a:bodyPr/>
-                    <a:lstStyle/>
-                    <a:p>
-                      <a:pPr algn="l"/>
-                      <a:r>
-                        <a:rPr sz="1100" b="1">
-                          <a:solidFill>
-                            <a:srgbClr val="0F172A"/>
-                          </a:solidFill>
-                          <a:latin typeface="Apple SD Gothic Neo"/>
-                        </a:rPr>
-                        <a:t>팀장</a:t>
-                      </a:r>
-                    </a:p>
-                  </a:txBody>
-                  <a:tcPr>
-                    <a:solidFill>
-                      <a:srgbClr val="F8FAFC"/>
-                    </a:solidFill>
-                  </a:tcPr>
-                </a:tc>
-                <a:tc>
-                  <a:txBody>
-                    <a:bodyPr/>
-                    <a:lstStyle/>
-                    <a:p>
-                      <a:pPr algn="l"/>
-                      <a:r>
-                        <a:rPr sz="1100" b="0">
-                          <a:solidFill>
-                            <a:srgbClr val="0F172A"/>
-                          </a:solidFill>
-                          <a:latin typeface="Apple SD Gothic Neo"/>
-                        </a:rPr>
-                        <a:t>전체 일정 관리 · 자문 회신 정리 · 발표·보고서 총괄</a:t>
-                      </a:r>
-                    </a:p>
-                  </a:txBody>
-                  <a:tcPr>
-                    <a:solidFill>
-                      <a:srgbClr val="F8FAFC"/>
-                    </a:solidFill>
-                  </a:tcPr>
-                </a:tc>
-              </a:tr>
-              <a:tr h="640080">
-                <a:tc>
-                  <a:txBody>
-                    <a:bodyPr/>
-                    <a:lstStyle/>
-                    <a:p>
-                      <a:pPr algn="l"/>
-                      <a:r>
-                        <a:rPr sz="1100" b="1">
-                          <a:solidFill>
-                            <a:srgbClr val="0F172A"/>
-                          </a:solidFill>
-                          <a:latin typeface="Apple SD Gothic Neo"/>
-                        </a:rPr>
-                        <a:t>강재현</a:t>
-                      </a:r>
-                    </a:p>
-                  </a:txBody>
-                  <a:tcPr>
-                    <a:solidFill>
-                      <a:srgbClr val="FFFFFF"/>
-                    </a:solidFill>
-                  </a:tcPr>
-                </a:tc>
-                <a:tc>
-                  <a:txBody>
-                    <a:bodyPr/>
-                    <a:lstStyle/>
-                    <a:p>
-                      <a:pPr algn="l"/>
-                      <a:r>
-                        <a:rPr sz="1100" b="1">
-                          <a:solidFill>
-                            <a:srgbClr val="0F172A"/>
-                          </a:solidFill>
-                          <a:latin typeface="Apple SD Gothic Neo"/>
-                        </a:rPr>
-                        <a:t>주 발표자</a:t>
-                      </a:r>
-                    </a:p>
-                  </a:txBody>
-                  <a:tcPr>
-                    <a:solidFill>
-                      <a:srgbClr val="FFFFFF"/>
-                    </a:solidFill>
-                  </a:tcPr>
-                </a:tc>
-                <a:tc>
-                  <a:txBody>
-                    <a:bodyPr/>
-                    <a:lstStyle/>
-                    <a:p>
-                      <a:pPr algn="l"/>
-                      <a:r>
-                        <a:rPr sz="1100" b="0">
-                          <a:solidFill>
-                            <a:srgbClr val="0F172A"/>
-                          </a:solidFill>
-                          <a:latin typeface="Apple SD Gothic Neo"/>
-                        </a:rPr>
-                        <a:t>중간발표 주 발표 · 슬라이드 검수 · Q&amp;A 사회</a:t>
-                      </a:r>
-                    </a:p>
-                  </a:txBody>
-                  <a:tcPr>
-                    <a:solidFill>
-                      <a:srgbClr val="FFFFFF"/>
-                    </a:solidFill>
-                  </a:tcPr>
-                </a:tc>
-              </a:tr>
-              <a:tr h="640080">
-                <a:tc>
-                  <a:txBody>
-                    <a:bodyPr/>
-                    <a:lstStyle/>
-                    <a:p>
-                      <a:pPr algn="l"/>
-                      <a:r>
-                        <a:rPr sz="1100" b="1">
-                          <a:solidFill>
-                            <a:srgbClr val="0F172A"/>
-                          </a:solidFill>
-                          <a:latin typeface="Apple SD Gothic Neo"/>
-                        </a:rPr>
-                        <a:t>조현빈</a:t>
-                      </a:r>
-                    </a:p>
-                  </a:txBody>
-                  <a:tcPr>
-                    <a:solidFill>
-                      <a:srgbClr val="F8FAFC"/>
-                    </a:solidFill>
-                  </a:tcPr>
-                </a:tc>
-                <a:tc>
-                  <a:txBody>
-                    <a:bodyPr/>
-                    <a:lstStyle/>
-                    <a:p>
-                      <a:pPr algn="l"/>
-                      <a:r>
-                        <a:rPr sz="1100" b="1">
-                          <a:solidFill>
-                            <a:srgbClr val="0F172A"/>
-                          </a:solidFill>
-                          <a:latin typeface="Apple SD Gothic Neo"/>
-                        </a:rPr>
-                        <a:t>실험·문서화</a:t>
-                      </a:r>
-                    </a:p>
-                  </a:txBody>
-                  <a:tcPr>
-                    <a:solidFill>
-                      <a:srgbClr val="F8FAFC"/>
-                    </a:solidFill>
-                  </a:tcPr>
-                </a:tc>
-                <a:tc>
-                  <a:txBody>
-                    <a:bodyPr/>
-                    <a:lstStyle/>
-                    <a:p>
-                      <a:pPr algn="l"/>
-                      <a:r>
-                        <a:rPr sz="1100" b="0">
-                          <a:solidFill>
-                            <a:srgbClr val="0F172A"/>
-                          </a:solidFill>
-                          <a:latin typeface="Apple SD Gothic Neo"/>
-                        </a:rPr>
-                        <a:t>RQ1/RQ2 실험 · vector.c native 구현 · 보고서 작성</a:t>
-                      </a:r>
-                    </a:p>
-                  </a:txBody>
-                  <a:tcPr>
-                    <a:solidFill>
-                      <a:srgbClr val="F8FAFC"/>
-                    </a:solidFill>
-                  </a:tcPr>
-                </a:tc>
-              </a:tr>
-              <a:tr h="640080">
-                <a:tc>
-                  <a:txBody>
-                    <a:bodyPr/>
-                    <a:lstStyle/>
-                    <a:p>
-                      <a:pPr algn="l"/>
-                      <a:r>
-                        <a:rPr sz="1100" b="1">
-                          <a:solidFill>
-                            <a:srgbClr val="0F172A"/>
-                          </a:solidFill>
-                          <a:latin typeface="Apple SD Gothic Neo"/>
-                        </a:rPr>
-                        <a:t>이동욱</a:t>
-                      </a:r>
-                    </a:p>
-                  </a:txBody>
-                  <a:tcPr>
-                    <a:solidFill>
-                      <a:srgbClr val="FFFFFF"/>
-                    </a:solidFill>
-                  </a:tcPr>
-                </a:tc>
-                <a:tc>
-                  <a:txBody>
-                    <a:bodyPr/>
-                    <a:lstStyle/>
-                    <a:p>
-                      <a:pPr algn="l"/>
-                      <a:r>
-                        <a:rPr sz="1100" b="1">
-                          <a:solidFill>
-                            <a:srgbClr val="0F172A"/>
-                          </a:solidFill>
-                          <a:latin typeface="Apple SD Gothic Neo"/>
-                        </a:rPr>
-                        <a:t>분석·작도</a:t>
-                      </a:r>
-                    </a:p>
-                  </a:txBody>
-                  <a:tcPr>
-                    <a:solidFill>
-                      <a:srgbClr val="FFFFFF"/>
-                    </a:solidFill>
-                  </a:tcPr>
-                </a:tc>
-                <a:tc>
-                  <a:txBody>
-                    <a:bodyPr/>
-                    <a:lstStyle/>
-                    <a:p>
-                      <a:pPr algn="l"/>
-                      <a:r>
-                        <a:rPr sz="1100" b="0">
-                          <a:solidFill>
-                            <a:srgbClr val="0F172A"/>
-                          </a:solidFill>
-                          <a:latin typeface="Apple SD Gothic Neo"/>
-                        </a:rPr>
-                        <a:t>통계 분석 (CI · Two-Level) · 그림 작성 · RQ3 설계</a:t>
-                      </a:r>
-                    </a:p>
-                  </a:txBody>
-                  <a:tcPr>
-                    <a:solidFill>
-                      <a:srgbClr val="FFFFFF"/>
-                    </a:solidFill>
-                  </a:tcPr>
-                </a:tc>
-              </a:tr>
-            </a:tbl>
-          </a:graphicData>
-        </a:graphic>
-      </p:graphicFrame>
-      <p:sp>
-        <p:nvSpPr>
-          <p:cNvPr id="7" name="Rounded Rectangle 6"/>
+              <a:t>15 / 17</a:t>
+            </a:r>
+          </a:p>
+        </p:txBody>
+      </p:sp>
+      <p:sp>
+        <p:nvSpPr>
+          <p:cNvPr id="6" name="Rounded Rectangle 5"/>
           <p:cNvSpPr/>
           <p:nvPr/>
         </p:nvSpPr>
         <p:spPr>
           <a:xfrm>
-            <a:off x="548640" y="5486400"/>
+            <a:off x="548640" y="1463040"/>
+            <a:ext cx="2697480" cy="4023360"/>
+          </a:xfrm>
+          <a:prstGeom prst="roundRect">
+            <a:avLst>
+              <a:gd name="adj" fmla="val 8000"/>
+            </a:avLst>
+          </a:prstGeom>
+          <a:solidFill>
+            <a:srgbClr val="F8FAFC"/>
+          </a:solidFill>
+          <a:ln w="9525">
+            <a:solidFill>
+              <a:srgbClr val="E2E8F0"/>
+            </a:solidFill>
+          </a:ln>
+          <a:effectLst/>
+        </p:spPr>
+        <p:style>
+          <a:lnRef idx="1">
+            <a:schemeClr val="accent1"/>
+          </a:lnRef>
+          <a:fillRef idx="3">
+            <a:schemeClr val="accent1"/>
+          </a:fillRef>
+          <a:effectRef idx="2">
+            <a:schemeClr val="accent1"/>
+          </a:effectRef>
+          <a:fontRef idx="minor">
+            <a:schemeClr val="lt1"/>
+          </a:fontRef>
+        </p:style>
+        <p:txBody>
+          <a:bodyPr rtlCol="0" anchor="ctr"/>
+          <a:lstStyle/>
+          <a:p>
+            <a:pPr algn="ctr"/>
+          </a:p>
+        </p:txBody>
+      </p:sp>
+      <p:sp>
+        <p:nvSpPr>
+          <p:cNvPr id="7" name="Rectangle 6"/>
+          <p:cNvSpPr/>
+          <p:nvPr/>
+        </p:nvSpPr>
+        <p:spPr>
+          <a:xfrm>
+            <a:off x="548640" y="1463040"/>
+            <a:ext cx="2697480" cy="457200"/>
+          </a:xfrm>
+          <a:prstGeom prst="rect">
+            <a:avLst/>
+          </a:prstGeom>
+          <a:solidFill>
+            <a:srgbClr val="2563EB"/>
+          </a:solidFill>
+          <a:ln>
+            <a:noFill/>
+          </a:ln>
+          <a:effectLst/>
+        </p:spPr>
+        <p:style>
+          <a:lnRef idx="1">
+            <a:schemeClr val="accent1"/>
+          </a:lnRef>
+          <a:fillRef idx="3">
+            <a:schemeClr val="accent1"/>
+          </a:fillRef>
+          <a:effectRef idx="2">
+            <a:schemeClr val="accent1"/>
+          </a:effectRef>
+          <a:fontRef idx="minor">
+            <a:schemeClr val="lt1"/>
+          </a:fontRef>
+        </p:style>
+        <p:txBody>
+          <a:bodyPr rtlCol="0" anchor="ctr"/>
+          <a:lstStyle/>
+          <a:p>
+            <a:pPr algn="ctr"/>
+          </a:p>
+        </p:txBody>
+      </p:sp>
+      <p:sp>
+        <p:nvSpPr>
+          <p:cNvPr id="8" name="Oval 7"/>
+          <p:cNvSpPr/>
+          <p:nvPr/>
+        </p:nvSpPr>
+        <p:spPr>
+          <a:xfrm>
+            <a:off x="685800" y="1581912"/>
+            <a:ext cx="246888" cy="246888"/>
+          </a:xfrm>
+          <a:prstGeom prst="ellipse">
+            <a:avLst/>
+          </a:prstGeom>
+          <a:solidFill>
+            <a:srgbClr val="FFFFFF"/>
+          </a:solidFill>
+          <a:ln>
+            <a:noFill/>
+          </a:ln>
+          <a:effectLst/>
+        </p:spPr>
+        <p:style>
+          <a:lnRef idx="1">
+            <a:schemeClr val="accent1"/>
+          </a:lnRef>
+          <a:fillRef idx="3">
+            <a:schemeClr val="accent1"/>
+          </a:fillRef>
+          <a:effectRef idx="2">
+            <a:schemeClr val="accent1"/>
+          </a:effectRef>
+          <a:fontRef idx="minor">
+            <a:schemeClr val="lt1"/>
+          </a:fontRef>
+        </p:style>
+        <p:txBody>
+          <a:bodyPr rtlCol="0" anchor="ctr"/>
+          <a:lstStyle/>
+          <a:p>
+            <a:pPr algn="ctr"/>
+          </a:p>
+        </p:txBody>
+      </p:sp>
+      <p:sp>
+        <p:nvSpPr>
+          <p:cNvPr id="9" name="TextBox 8"/>
+          <p:cNvSpPr txBox="1"/>
+          <p:nvPr/>
+        </p:nvSpPr>
+        <p:spPr>
+          <a:xfrm>
+            <a:off x="685800" y="1581912"/>
+            <a:ext cx="246888" cy="246888"/>
+          </a:xfrm>
+          <a:prstGeom prst="rect">
+            <a:avLst/>
+          </a:prstGeom>
+          <a:noFill/>
+        </p:spPr>
+        <p:txBody>
+          <a:bodyPr wrap="square" lIns="45720" rIns="45720" tIns="18288" bIns="18288" anchor="t">
+            <a:spAutoFit/>
+          </a:bodyPr>
+          <a:lstStyle/>
+          <a:p>
+            <a:pPr algn="ctr">
+              <a:lnSpc>
+                <a:spcPct val="120000"/>
+              </a:lnSpc>
+            </a:pPr>
+            <a:r>
+              <a:rPr sz="1100" b="1">
+                <a:solidFill>
+                  <a:srgbClr val="2563EB"/>
+                </a:solidFill>
+                <a:latin typeface="Apple SD Gothic Neo"/>
+                <a:ea typeface="Apple SD Gothic Neo"/>
+                <a:cs typeface="Apple SD Gothic Neo"/>
+              </a:rPr>
+              <a:t>1</a:t>
+            </a:r>
+          </a:p>
+        </p:txBody>
+      </p:sp>
+      <p:sp>
+        <p:nvSpPr>
+          <p:cNvPr id="10" name="TextBox 9"/>
+          <p:cNvSpPr txBox="1"/>
+          <p:nvPr/>
+        </p:nvSpPr>
+        <p:spPr>
+          <a:xfrm>
+            <a:off x="1051560" y="1554480"/>
+            <a:ext cx="2103120" cy="292608"/>
+          </a:xfrm>
+          <a:prstGeom prst="rect">
+            <a:avLst/>
+          </a:prstGeom>
+          <a:noFill/>
+        </p:spPr>
+        <p:txBody>
+          <a:bodyPr wrap="square" lIns="45720" rIns="45720" tIns="18288" bIns="18288" anchor="t">
+            <a:spAutoFit/>
+          </a:bodyPr>
+          <a:lstStyle/>
+          <a:p>
+            <a:pPr algn="l">
+              <a:lnSpc>
+                <a:spcPct val="120000"/>
+              </a:lnSpc>
+            </a:pPr>
+            <a:r>
+              <a:rPr sz="1200" b="1">
+                <a:solidFill>
+                  <a:srgbClr val="FFFFFF"/>
+                </a:solidFill>
+                <a:latin typeface="Apple SD Gothic Neo"/>
+                <a:ea typeface="Apple SD Gothic Neo"/>
+                <a:cs typeface="Apple SD Gothic Neo"/>
+              </a:rPr>
+              <a:t>팀장</a:t>
+            </a:r>
+          </a:p>
+        </p:txBody>
+      </p:sp>
+      <p:sp>
+        <p:nvSpPr>
+          <p:cNvPr id="11" name="TextBox 10"/>
+          <p:cNvSpPr txBox="1"/>
+          <p:nvPr/>
+        </p:nvSpPr>
+        <p:spPr>
+          <a:xfrm>
+            <a:off x="731520" y="2057400"/>
+            <a:ext cx="2377440" cy="502920"/>
+          </a:xfrm>
+          <a:prstGeom prst="rect">
+            <a:avLst/>
+          </a:prstGeom>
+          <a:noFill/>
+        </p:spPr>
+        <p:txBody>
+          <a:bodyPr wrap="square" lIns="45720" rIns="45720" tIns="18288" bIns="18288" anchor="t">
+            <a:spAutoFit/>
+          </a:bodyPr>
+          <a:lstStyle/>
+          <a:p>
+            <a:pPr algn="l">
+              <a:lnSpc>
+                <a:spcPct val="120000"/>
+              </a:lnSpc>
+            </a:pPr>
+            <a:r>
+              <a:rPr sz="2200" b="1">
+                <a:solidFill>
+                  <a:srgbClr val="2563EB"/>
+                </a:solidFill>
+                <a:latin typeface="Apple SD Gothic Neo"/>
+                <a:ea typeface="Apple SD Gothic Neo"/>
+                <a:cs typeface="Apple SD Gothic Neo"/>
+              </a:rPr>
+              <a:t>박세은</a:t>
+            </a:r>
+          </a:p>
+        </p:txBody>
+      </p:sp>
+      <p:sp>
+        <p:nvSpPr>
+          <p:cNvPr id="12" name="Rectangle 11"/>
+          <p:cNvSpPr/>
+          <p:nvPr/>
+        </p:nvSpPr>
+        <p:spPr>
+          <a:xfrm>
+            <a:off x="731520" y="2651760"/>
+            <a:ext cx="1097280" cy="25400"/>
+          </a:xfrm>
+          <a:prstGeom prst="rect">
+            <a:avLst/>
+          </a:prstGeom>
+          <a:solidFill>
+            <a:srgbClr val="3B82F6"/>
+          </a:solidFill>
+          <a:ln>
+            <a:noFill/>
+          </a:ln>
+          <a:effectLst/>
+        </p:spPr>
+        <p:style>
+          <a:lnRef idx="1">
+            <a:schemeClr val="accent1"/>
+          </a:lnRef>
+          <a:fillRef idx="3">
+            <a:schemeClr val="accent1"/>
+          </a:fillRef>
+          <a:effectRef idx="2">
+            <a:schemeClr val="accent1"/>
+          </a:effectRef>
+          <a:fontRef idx="minor">
+            <a:schemeClr val="lt1"/>
+          </a:fontRef>
+        </p:style>
+        <p:txBody>
+          <a:bodyPr rtlCol="0" anchor="ctr"/>
+          <a:lstStyle/>
+          <a:p>
+            <a:pPr algn="ctr"/>
+          </a:p>
+        </p:txBody>
+      </p:sp>
+      <p:sp>
+        <p:nvSpPr>
+          <p:cNvPr id="13" name="TextBox 12"/>
+          <p:cNvSpPr txBox="1"/>
+          <p:nvPr/>
+        </p:nvSpPr>
+        <p:spPr>
+          <a:xfrm>
+            <a:off x="731520" y="2788920"/>
+            <a:ext cx="2377440" cy="1417320"/>
+          </a:xfrm>
+          <a:prstGeom prst="rect">
+            <a:avLst/>
+          </a:prstGeom>
+          <a:noFill/>
+        </p:spPr>
+        <p:txBody>
+          <a:bodyPr wrap="square" lIns="45720" rIns="45720" tIns="18288" bIns="18288" anchor="t">
+            <a:spAutoFit/>
+          </a:bodyPr>
+          <a:lstStyle/>
+          <a:p>
+            <a:pPr algn="l">
+              <a:lnSpc>
+                <a:spcPct val="140000"/>
+              </a:lnSpc>
+            </a:pPr>
+            <a:r>
+              <a:rPr sz="1000" b="0">
+                <a:solidFill>
+                  <a:srgbClr val="0F172A"/>
+                </a:solidFill>
+                <a:latin typeface="Apple SD Gothic Neo"/>
+                <a:ea typeface="Apple SD Gothic Neo"/>
+                <a:cs typeface="Apple SD Gothic Neo"/>
+              </a:rPr>
+              <a:t>전체 일정 관리 · 자문 회신 정리 · 발표·보고서 총괄</a:t>
+            </a:r>
+          </a:p>
+        </p:txBody>
+      </p:sp>
+      <p:sp>
+        <p:nvSpPr>
+          <p:cNvPr id="14" name="TextBox 13"/>
+          <p:cNvSpPr txBox="1"/>
+          <p:nvPr/>
+        </p:nvSpPr>
+        <p:spPr>
+          <a:xfrm>
+            <a:off x="731520" y="4343400"/>
+            <a:ext cx="2377440" cy="274320"/>
+          </a:xfrm>
+          <a:prstGeom prst="rect">
+            <a:avLst/>
+          </a:prstGeom>
+          <a:noFill/>
+        </p:spPr>
+        <p:txBody>
+          <a:bodyPr wrap="square" lIns="45720" rIns="45720" tIns="18288" bIns="18288" anchor="t">
+            <a:spAutoFit/>
+          </a:bodyPr>
+          <a:lstStyle/>
+          <a:p>
+            <a:pPr algn="l">
+              <a:lnSpc>
+                <a:spcPct val="120000"/>
+              </a:lnSpc>
+            </a:pPr>
+            <a:r>
+              <a:rPr sz="800" b="1">
+                <a:solidFill>
+                  <a:srgbClr val="3B82F6"/>
+                </a:solidFill>
+                <a:latin typeface="Apple SD Gothic Neo"/>
+                <a:ea typeface="Apple SD Gothic Neo"/>
+                <a:cs typeface="Apple SD Gothic Neo"/>
+              </a:rPr>
+              <a:t>HIGHLIGHT</a:t>
+            </a:r>
+          </a:p>
+        </p:txBody>
+      </p:sp>
+      <p:sp>
+        <p:nvSpPr>
+          <p:cNvPr id="15" name="Rounded Rectangle 14"/>
+          <p:cNvSpPr/>
+          <p:nvPr/>
+        </p:nvSpPr>
+        <p:spPr>
+          <a:xfrm>
+            <a:off x="731520" y="4617720"/>
+            <a:ext cx="2331720" cy="777240"/>
+          </a:xfrm>
+          <a:prstGeom prst="roundRect">
+            <a:avLst>
+              <a:gd name="adj" fmla="val 8000"/>
+            </a:avLst>
+          </a:prstGeom>
+          <a:solidFill>
+            <a:srgbClr val="FFFFFF"/>
+          </a:solidFill>
+          <a:ln w="9525">
+            <a:solidFill>
+              <a:srgbClr val="3B82F6"/>
+            </a:solidFill>
+          </a:ln>
+          <a:effectLst/>
+        </p:spPr>
+        <p:style>
+          <a:lnRef idx="1">
+            <a:schemeClr val="accent1"/>
+          </a:lnRef>
+          <a:fillRef idx="3">
+            <a:schemeClr val="accent1"/>
+          </a:fillRef>
+          <a:effectRef idx="2">
+            <a:schemeClr val="accent1"/>
+          </a:effectRef>
+          <a:fontRef idx="minor">
+            <a:schemeClr val="lt1"/>
+          </a:fontRef>
+        </p:style>
+        <p:txBody>
+          <a:bodyPr rtlCol="0" anchor="ctr"/>
+          <a:lstStyle/>
+          <a:p>
+            <a:pPr algn="ctr"/>
+          </a:p>
+        </p:txBody>
+      </p:sp>
+      <p:sp>
+        <p:nvSpPr>
+          <p:cNvPr id="16" name="TextBox 15"/>
+          <p:cNvSpPr txBox="1"/>
+          <p:nvPr/>
+        </p:nvSpPr>
+        <p:spPr>
+          <a:xfrm>
+            <a:off x="822960" y="4663440"/>
+            <a:ext cx="2194560" cy="685800"/>
+          </a:xfrm>
+          <a:prstGeom prst="rect">
+            <a:avLst/>
+          </a:prstGeom>
+          <a:noFill/>
+        </p:spPr>
+        <p:txBody>
+          <a:bodyPr wrap="square" lIns="45720" rIns="45720" tIns="18288" bIns="18288" anchor="t">
+            <a:spAutoFit/>
+          </a:bodyPr>
+          <a:lstStyle/>
+          <a:p>
+            <a:pPr algn="l">
+              <a:lnSpc>
+                <a:spcPct val="135000"/>
+              </a:lnSpc>
+            </a:pPr>
+            <a:r>
+              <a:rPr sz="1000" b="1">
+                <a:solidFill>
+                  <a:srgbClr val="0F172A"/>
+                </a:solidFill>
+                <a:latin typeface="Apple SD Gothic Neo"/>
+                <a:ea typeface="Apple SD Gothic Neo"/>
+                <a:cs typeface="Apple SD Gothic Neo"/>
+              </a:rPr>
+              <a:t>자문 컨택 정리 · 4 인 합의 주재</a:t>
+            </a:r>
+          </a:p>
+        </p:txBody>
+      </p:sp>
+      <p:sp>
+        <p:nvSpPr>
+          <p:cNvPr id="17" name="Rounded Rectangle 16"/>
+          <p:cNvSpPr/>
+          <p:nvPr/>
+        </p:nvSpPr>
+        <p:spPr>
+          <a:xfrm>
+            <a:off x="3337560" y="1463040"/>
+            <a:ext cx="2697480" cy="4023360"/>
+          </a:xfrm>
+          <a:prstGeom prst="roundRect">
+            <a:avLst>
+              <a:gd name="adj" fmla="val 8000"/>
+            </a:avLst>
+          </a:prstGeom>
+          <a:solidFill>
+            <a:srgbClr val="F8FAFC"/>
+          </a:solidFill>
+          <a:ln w="9525">
+            <a:solidFill>
+              <a:srgbClr val="E2E8F0"/>
+            </a:solidFill>
+          </a:ln>
+          <a:effectLst/>
+        </p:spPr>
+        <p:style>
+          <a:lnRef idx="1">
+            <a:schemeClr val="accent1"/>
+          </a:lnRef>
+          <a:fillRef idx="3">
+            <a:schemeClr val="accent1"/>
+          </a:fillRef>
+          <a:effectRef idx="2">
+            <a:schemeClr val="accent1"/>
+          </a:effectRef>
+          <a:fontRef idx="minor">
+            <a:schemeClr val="lt1"/>
+          </a:fontRef>
+        </p:style>
+        <p:txBody>
+          <a:bodyPr rtlCol="0" anchor="ctr"/>
+          <a:lstStyle/>
+          <a:p>
+            <a:pPr algn="ctr"/>
+          </a:p>
+        </p:txBody>
+      </p:sp>
+      <p:sp>
+        <p:nvSpPr>
+          <p:cNvPr id="18" name="Rectangle 17"/>
+          <p:cNvSpPr/>
+          <p:nvPr/>
+        </p:nvSpPr>
+        <p:spPr>
+          <a:xfrm>
+            <a:off x="3337560" y="1463040"/>
+            <a:ext cx="2697480" cy="457200"/>
+          </a:xfrm>
+          <a:prstGeom prst="rect">
+            <a:avLst/>
+          </a:prstGeom>
+          <a:solidFill>
+            <a:srgbClr val="2563EB"/>
+          </a:solidFill>
+          <a:ln>
+            <a:noFill/>
+          </a:ln>
+          <a:effectLst/>
+        </p:spPr>
+        <p:style>
+          <a:lnRef idx="1">
+            <a:schemeClr val="accent1"/>
+          </a:lnRef>
+          <a:fillRef idx="3">
+            <a:schemeClr val="accent1"/>
+          </a:fillRef>
+          <a:effectRef idx="2">
+            <a:schemeClr val="accent1"/>
+          </a:effectRef>
+          <a:fontRef idx="minor">
+            <a:schemeClr val="lt1"/>
+          </a:fontRef>
+        </p:style>
+        <p:txBody>
+          <a:bodyPr rtlCol="0" anchor="ctr"/>
+          <a:lstStyle/>
+          <a:p>
+            <a:pPr algn="ctr"/>
+          </a:p>
+        </p:txBody>
+      </p:sp>
+      <p:sp>
+        <p:nvSpPr>
+          <p:cNvPr id="19" name="Oval 18"/>
+          <p:cNvSpPr/>
+          <p:nvPr/>
+        </p:nvSpPr>
+        <p:spPr>
+          <a:xfrm>
+            <a:off x="3474720" y="1581912"/>
+            <a:ext cx="246888" cy="246888"/>
+          </a:xfrm>
+          <a:prstGeom prst="ellipse">
+            <a:avLst/>
+          </a:prstGeom>
+          <a:solidFill>
+            <a:srgbClr val="FFFFFF"/>
+          </a:solidFill>
+          <a:ln>
+            <a:noFill/>
+          </a:ln>
+          <a:effectLst/>
+        </p:spPr>
+        <p:style>
+          <a:lnRef idx="1">
+            <a:schemeClr val="accent1"/>
+          </a:lnRef>
+          <a:fillRef idx="3">
+            <a:schemeClr val="accent1"/>
+          </a:fillRef>
+          <a:effectRef idx="2">
+            <a:schemeClr val="accent1"/>
+          </a:effectRef>
+          <a:fontRef idx="minor">
+            <a:schemeClr val="lt1"/>
+          </a:fontRef>
+        </p:style>
+        <p:txBody>
+          <a:bodyPr rtlCol="0" anchor="ctr"/>
+          <a:lstStyle/>
+          <a:p>
+            <a:pPr algn="ctr"/>
+          </a:p>
+        </p:txBody>
+      </p:sp>
+      <p:sp>
+        <p:nvSpPr>
+          <p:cNvPr id="20" name="TextBox 19"/>
+          <p:cNvSpPr txBox="1"/>
+          <p:nvPr/>
+        </p:nvSpPr>
+        <p:spPr>
+          <a:xfrm>
+            <a:off x="3474720" y="1581912"/>
+            <a:ext cx="246888" cy="246888"/>
+          </a:xfrm>
+          <a:prstGeom prst="rect">
+            <a:avLst/>
+          </a:prstGeom>
+          <a:noFill/>
+        </p:spPr>
+        <p:txBody>
+          <a:bodyPr wrap="square" lIns="45720" rIns="45720" tIns="18288" bIns="18288" anchor="t">
+            <a:spAutoFit/>
+          </a:bodyPr>
+          <a:lstStyle/>
+          <a:p>
+            <a:pPr algn="ctr">
+              <a:lnSpc>
+                <a:spcPct val="120000"/>
+              </a:lnSpc>
+            </a:pPr>
+            <a:r>
+              <a:rPr sz="1100" b="1">
+                <a:solidFill>
+                  <a:srgbClr val="2563EB"/>
+                </a:solidFill>
+                <a:latin typeface="Apple SD Gothic Neo"/>
+                <a:ea typeface="Apple SD Gothic Neo"/>
+                <a:cs typeface="Apple SD Gothic Neo"/>
+              </a:rPr>
+              <a:t>2</a:t>
+            </a:r>
+          </a:p>
+        </p:txBody>
+      </p:sp>
+      <p:sp>
+        <p:nvSpPr>
+          <p:cNvPr id="21" name="TextBox 20"/>
+          <p:cNvSpPr txBox="1"/>
+          <p:nvPr/>
+        </p:nvSpPr>
+        <p:spPr>
+          <a:xfrm>
+            <a:off x="3840480" y="1554480"/>
+            <a:ext cx="2103120" cy="292608"/>
+          </a:xfrm>
+          <a:prstGeom prst="rect">
+            <a:avLst/>
+          </a:prstGeom>
+          <a:noFill/>
+        </p:spPr>
+        <p:txBody>
+          <a:bodyPr wrap="square" lIns="45720" rIns="45720" tIns="18288" bIns="18288" anchor="t">
+            <a:spAutoFit/>
+          </a:bodyPr>
+          <a:lstStyle/>
+          <a:p>
+            <a:pPr algn="l">
+              <a:lnSpc>
+                <a:spcPct val="120000"/>
+              </a:lnSpc>
+            </a:pPr>
+            <a:r>
+              <a:rPr sz="1200" b="1">
+                <a:solidFill>
+                  <a:srgbClr val="FFFFFF"/>
+                </a:solidFill>
+                <a:latin typeface="Apple SD Gothic Neo"/>
+                <a:ea typeface="Apple SD Gothic Neo"/>
+                <a:cs typeface="Apple SD Gothic Neo"/>
+              </a:rPr>
+              <a:t>주 발표자</a:t>
+            </a:r>
+          </a:p>
+        </p:txBody>
+      </p:sp>
+      <p:sp>
+        <p:nvSpPr>
+          <p:cNvPr id="22" name="TextBox 21"/>
+          <p:cNvSpPr txBox="1"/>
+          <p:nvPr/>
+        </p:nvSpPr>
+        <p:spPr>
+          <a:xfrm>
+            <a:off x="3520440" y="2057400"/>
+            <a:ext cx="2377440" cy="502920"/>
+          </a:xfrm>
+          <a:prstGeom prst="rect">
+            <a:avLst/>
+          </a:prstGeom>
+          <a:noFill/>
+        </p:spPr>
+        <p:txBody>
+          <a:bodyPr wrap="square" lIns="45720" rIns="45720" tIns="18288" bIns="18288" anchor="t">
+            <a:spAutoFit/>
+          </a:bodyPr>
+          <a:lstStyle/>
+          <a:p>
+            <a:pPr algn="l">
+              <a:lnSpc>
+                <a:spcPct val="120000"/>
+              </a:lnSpc>
+            </a:pPr>
+            <a:r>
+              <a:rPr sz="2200" b="1">
+                <a:solidFill>
+                  <a:srgbClr val="2563EB"/>
+                </a:solidFill>
+                <a:latin typeface="Apple SD Gothic Neo"/>
+                <a:ea typeface="Apple SD Gothic Neo"/>
+                <a:cs typeface="Apple SD Gothic Neo"/>
+              </a:rPr>
+              <a:t>강재현</a:t>
+            </a:r>
+          </a:p>
+        </p:txBody>
+      </p:sp>
+      <p:sp>
+        <p:nvSpPr>
+          <p:cNvPr id="23" name="Rectangle 22"/>
+          <p:cNvSpPr/>
+          <p:nvPr/>
+        </p:nvSpPr>
+        <p:spPr>
+          <a:xfrm>
+            <a:off x="3520440" y="2651760"/>
+            <a:ext cx="1097280" cy="25400"/>
+          </a:xfrm>
+          <a:prstGeom prst="rect">
+            <a:avLst/>
+          </a:prstGeom>
+          <a:solidFill>
+            <a:srgbClr val="3B82F6"/>
+          </a:solidFill>
+          <a:ln>
+            <a:noFill/>
+          </a:ln>
+          <a:effectLst/>
+        </p:spPr>
+        <p:style>
+          <a:lnRef idx="1">
+            <a:schemeClr val="accent1"/>
+          </a:lnRef>
+          <a:fillRef idx="3">
+            <a:schemeClr val="accent1"/>
+          </a:fillRef>
+          <a:effectRef idx="2">
+            <a:schemeClr val="accent1"/>
+          </a:effectRef>
+          <a:fontRef idx="minor">
+            <a:schemeClr val="lt1"/>
+          </a:fontRef>
+        </p:style>
+        <p:txBody>
+          <a:bodyPr rtlCol="0" anchor="ctr"/>
+          <a:lstStyle/>
+          <a:p>
+            <a:pPr algn="ctr"/>
+          </a:p>
+        </p:txBody>
+      </p:sp>
+      <p:sp>
+        <p:nvSpPr>
+          <p:cNvPr id="24" name="TextBox 23"/>
+          <p:cNvSpPr txBox="1"/>
+          <p:nvPr/>
+        </p:nvSpPr>
+        <p:spPr>
+          <a:xfrm>
+            <a:off x="3520440" y="2788920"/>
+            <a:ext cx="2377440" cy="1417320"/>
+          </a:xfrm>
+          <a:prstGeom prst="rect">
+            <a:avLst/>
+          </a:prstGeom>
+          <a:noFill/>
+        </p:spPr>
+        <p:txBody>
+          <a:bodyPr wrap="square" lIns="45720" rIns="45720" tIns="18288" bIns="18288" anchor="t">
+            <a:spAutoFit/>
+          </a:bodyPr>
+          <a:lstStyle/>
+          <a:p>
+            <a:pPr algn="l">
+              <a:lnSpc>
+                <a:spcPct val="140000"/>
+              </a:lnSpc>
+            </a:pPr>
+            <a:r>
+              <a:rPr sz="1000" b="0">
+                <a:solidFill>
+                  <a:srgbClr val="0F172A"/>
+                </a:solidFill>
+                <a:latin typeface="Apple SD Gothic Neo"/>
+                <a:ea typeface="Apple SD Gothic Neo"/>
+                <a:cs typeface="Apple SD Gothic Neo"/>
+              </a:rPr>
+              <a:t>중간발표 주 발표 · 슬라이드 검수 · Q&amp;A 사회</a:t>
+            </a:r>
+          </a:p>
+        </p:txBody>
+      </p:sp>
+      <p:sp>
+        <p:nvSpPr>
+          <p:cNvPr id="25" name="TextBox 24"/>
+          <p:cNvSpPr txBox="1"/>
+          <p:nvPr/>
+        </p:nvSpPr>
+        <p:spPr>
+          <a:xfrm>
+            <a:off x="3520440" y="4343400"/>
+            <a:ext cx="2377440" cy="274320"/>
+          </a:xfrm>
+          <a:prstGeom prst="rect">
+            <a:avLst/>
+          </a:prstGeom>
+          <a:noFill/>
+        </p:spPr>
+        <p:txBody>
+          <a:bodyPr wrap="square" lIns="45720" rIns="45720" tIns="18288" bIns="18288" anchor="t">
+            <a:spAutoFit/>
+          </a:bodyPr>
+          <a:lstStyle/>
+          <a:p>
+            <a:pPr algn="l">
+              <a:lnSpc>
+                <a:spcPct val="120000"/>
+              </a:lnSpc>
+            </a:pPr>
+            <a:r>
+              <a:rPr sz="800" b="1">
+                <a:solidFill>
+                  <a:srgbClr val="3B82F6"/>
+                </a:solidFill>
+                <a:latin typeface="Apple SD Gothic Neo"/>
+                <a:ea typeface="Apple SD Gothic Neo"/>
+                <a:cs typeface="Apple SD Gothic Neo"/>
+              </a:rPr>
+              <a:t>HIGHLIGHT</a:t>
+            </a:r>
+          </a:p>
+        </p:txBody>
+      </p:sp>
+      <p:sp>
+        <p:nvSpPr>
+          <p:cNvPr id="26" name="Rounded Rectangle 25"/>
+          <p:cNvSpPr/>
+          <p:nvPr/>
+        </p:nvSpPr>
+        <p:spPr>
+          <a:xfrm>
+            <a:off x="3520440" y="4617720"/>
+            <a:ext cx="2331720" cy="777240"/>
+          </a:xfrm>
+          <a:prstGeom prst="roundRect">
+            <a:avLst>
+              <a:gd name="adj" fmla="val 8000"/>
+            </a:avLst>
+          </a:prstGeom>
+          <a:solidFill>
+            <a:srgbClr val="FFFFFF"/>
+          </a:solidFill>
+          <a:ln w="9525">
+            <a:solidFill>
+              <a:srgbClr val="3B82F6"/>
+            </a:solidFill>
+          </a:ln>
+          <a:effectLst/>
+        </p:spPr>
+        <p:style>
+          <a:lnRef idx="1">
+            <a:schemeClr val="accent1"/>
+          </a:lnRef>
+          <a:fillRef idx="3">
+            <a:schemeClr val="accent1"/>
+          </a:fillRef>
+          <a:effectRef idx="2">
+            <a:schemeClr val="accent1"/>
+          </a:effectRef>
+          <a:fontRef idx="minor">
+            <a:schemeClr val="lt1"/>
+          </a:fontRef>
+        </p:style>
+        <p:txBody>
+          <a:bodyPr rtlCol="0" anchor="ctr"/>
+          <a:lstStyle/>
+          <a:p>
+            <a:pPr algn="ctr"/>
+          </a:p>
+        </p:txBody>
+      </p:sp>
+      <p:sp>
+        <p:nvSpPr>
+          <p:cNvPr id="27" name="TextBox 26"/>
+          <p:cNvSpPr txBox="1"/>
+          <p:nvPr/>
+        </p:nvSpPr>
+        <p:spPr>
+          <a:xfrm>
+            <a:off x="3611880" y="4663440"/>
+            <a:ext cx="2194560" cy="685800"/>
+          </a:xfrm>
+          <a:prstGeom prst="rect">
+            <a:avLst/>
+          </a:prstGeom>
+          <a:noFill/>
+        </p:spPr>
+        <p:txBody>
+          <a:bodyPr wrap="square" lIns="45720" rIns="45720" tIns="18288" bIns="18288" anchor="t">
+            <a:spAutoFit/>
+          </a:bodyPr>
+          <a:lstStyle/>
+          <a:p>
+            <a:pPr algn="l">
+              <a:lnSpc>
+                <a:spcPct val="135000"/>
+              </a:lnSpc>
+            </a:pPr>
+            <a:r>
+              <a:rPr sz="1000" b="1">
+                <a:solidFill>
+                  <a:srgbClr val="0F172A"/>
+                </a:solidFill>
+                <a:latin typeface="Apple SD Gothic Neo"/>
+                <a:ea typeface="Apple SD Gothic Neo"/>
+                <a:cs typeface="Apple SD Gothic Neo"/>
+              </a:rPr>
+              <a:t>16 슬라이드 검수 · 리허설 2회</a:t>
+            </a:r>
+          </a:p>
+        </p:txBody>
+      </p:sp>
+      <p:sp>
+        <p:nvSpPr>
+          <p:cNvPr id="28" name="Rounded Rectangle 27"/>
+          <p:cNvSpPr/>
+          <p:nvPr/>
+        </p:nvSpPr>
+        <p:spPr>
+          <a:xfrm>
+            <a:off x="6126479" y="1463040"/>
+            <a:ext cx="2697480" cy="4023360"/>
+          </a:xfrm>
+          <a:prstGeom prst="roundRect">
+            <a:avLst>
+              <a:gd name="adj" fmla="val 8000"/>
+            </a:avLst>
+          </a:prstGeom>
+          <a:solidFill>
+            <a:srgbClr val="F8FAFC"/>
+          </a:solidFill>
+          <a:ln w="9525">
+            <a:solidFill>
+              <a:srgbClr val="E2E8F0"/>
+            </a:solidFill>
+          </a:ln>
+          <a:effectLst/>
+        </p:spPr>
+        <p:style>
+          <a:lnRef idx="1">
+            <a:schemeClr val="accent1"/>
+          </a:lnRef>
+          <a:fillRef idx="3">
+            <a:schemeClr val="accent1"/>
+          </a:fillRef>
+          <a:effectRef idx="2">
+            <a:schemeClr val="accent1"/>
+          </a:effectRef>
+          <a:fontRef idx="minor">
+            <a:schemeClr val="lt1"/>
+          </a:fontRef>
+        </p:style>
+        <p:txBody>
+          <a:bodyPr rtlCol="0" anchor="ctr"/>
+          <a:lstStyle/>
+          <a:p>
+            <a:pPr algn="ctr"/>
+          </a:p>
+        </p:txBody>
+      </p:sp>
+      <p:sp>
+        <p:nvSpPr>
+          <p:cNvPr id="29" name="Rectangle 28"/>
+          <p:cNvSpPr/>
+          <p:nvPr/>
+        </p:nvSpPr>
+        <p:spPr>
+          <a:xfrm>
+            <a:off x="6126479" y="1463040"/>
+            <a:ext cx="2697480" cy="457200"/>
+          </a:xfrm>
+          <a:prstGeom prst="rect">
+            <a:avLst/>
+          </a:prstGeom>
+          <a:solidFill>
+            <a:srgbClr val="2563EB"/>
+          </a:solidFill>
+          <a:ln>
+            <a:noFill/>
+          </a:ln>
+          <a:effectLst/>
+        </p:spPr>
+        <p:style>
+          <a:lnRef idx="1">
+            <a:schemeClr val="accent1"/>
+          </a:lnRef>
+          <a:fillRef idx="3">
+            <a:schemeClr val="accent1"/>
+          </a:fillRef>
+          <a:effectRef idx="2">
+            <a:schemeClr val="accent1"/>
+          </a:effectRef>
+          <a:fontRef idx="minor">
+            <a:schemeClr val="lt1"/>
+          </a:fontRef>
+        </p:style>
+        <p:txBody>
+          <a:bodyPr rtlCol="0" anchor="ctr"/>
+          <a:lstStyle/>
+          <a:p>
+            <a:pPr algn="ctr"/>
+          </a:p>
+        </p:txBody>
+      </p:sp>
+      <p:sp>
+        <p:nvSpPr>
+          <p:cNvPr id="30" name="Oval 29"/>
+          <p:cNvSpPr/>
+          <p:nvPr/>
+        </p:nvSpPr>
+        <p:spPr>
+          <a:xfrm>
+            <a:off x="6263639" y="1581912"/>
+            <a:ext cx="246888" cy="246888"/>
+          </a:xfrm>
+          <a:prstGeom prst="ellipse">
+            <a:avLst/>
+          </a:prstGeom>
+          <a:solidFill>
+            <a:srgbClr val="FFFFFF"/>
+          </a:solidFill>
+          <a:ln>
+            <a:noFill/>
+          </a:ln>
+          <a:effectLst/>
+        </p:spPr>
+        <p:style>
+          <a:lnRef idx="1">
+            <a:schemeClr val="accent1"/>
+          </a:lnRef>
+          <a:fillRef idx="3">
+            <a:schemeClr val="accent1"/>
+          </a:fillRef>
+          <a:effectRef idx="2">
+            <a:schemeClr val="accent1"/>
+          </a:effectRef>
+          <a:fontRef idx="minor">
+            <a:schemeClr val="lt1"/>
+          </a:fontRef>
+        </p:style>
+        <p:txBody>
+          <a:bodyPr rtlCol="0" anchor="ctr"/>
+          <a:lstStyle/>
+          <a:p>
+            <a:pPr algn="ctr"/>
+          </a:p>
+        </p:txBody>
+      </p:sp>
+      <p:sp>
+        <p:nvSpPr>
+          <p:cNvPr id="31" name="TextBox 30"/>
+          <p:cNvSpPr txBox="1"/>
+          <p:nvPr/>
+        </p:nvSpPr>
+        <p:spPr>
+          <a:xfrm>
+            <a:off x="6263639" y="1581912"/>
+            <a:ext cx="246888" cy="246888"/>
+          </a:xfrm>
+          <a:prstGeom prst="rect">
+            <a:avLst/>
+          </a:prstGeom>
+          <a:noFill/>
+        </p:spPr>
+        <p:txBody>
+          <a:bodyPr wrap="square" lIns="45720" rIns="45720" tIns="18288" bIns="18288" anchor="t">
+            <a:spAutoFit/>
+          </a:bodyPr>
+          <a:lstStyle/>
+          <a:p>
+            <a:pPr algn="ctr">
+              <a:lnSpc>
+                <a:spcPct val="120000"/>
+              </a:lnSpc>
+            </a:pPr>
+            <a:r>
+              <a:rPr sz="1100" b="1">
+                <a:solidFill>
+                  <a:srgbClr val="2563EB"/>
+                </a:solidFill>
+                <a:latin typeface="Apple SD Gothic Neo"/>
+                <a:ea typeface="Apple SD Gothic Neo"/>
+                <a:cs typeface="Apple SD Gothic Neo"/>
+              </a:rPr>
+              <a:t>3</a:t>
+            </a:r>
+          </a:p>
+        </p:txBody>
+      </p:sp>
+      <p:sp>
+        <p:nvSpPr>
+          <p:cNvPr id="32" name="TextBox 31"/>
+          <p:cNvSpPr txBox="1"/>
+          <p:nvPr/>
+        </p:nvSpPr>
+        <p:spPr>
+          <a:xfrm>
+            <a:off x="6629399" y="1554480"/>
+            <a:ext cx="2103120" cy="292608"/>
+          </a:xfrm>
+          <a:prstGeom prst="rect">
+            <a:avLst/>
+          </a:prstGeom>
+          <a:noFill/>
+        </p:spPr>
+        <p:txBody>
+          <a:bodyPr wrap="square" lIns="45720" rIns="45720" tIns="18288" bIns="18288" anchor="t">
+            <a:spAutoFit/>
+          </a:bodyPr>
+          <a:lstStyle/>
+          <a:p>
+            <a:pPr algn="l">
+              <a:lnSpc>
+                <a:spcPct val="120000"/>
+              </a:lnSpc>
+            </a:pPr>
+            <a:r>
+              <a:rPr sz="1200" b="1">
+                <a:solidFill>
+                  <a:srgbClr val="FFFFFF"/>
+                </a:solidFill>
+                <a:latin typeface="Apple SD Gothic Neo"/>
+                <a:ea typeface="Apple SD Gothic Neo"/>
+                <a:cs typeface="Apple SD Gothic Neo"/>
+              </a:rPr>
+              <a:t>실험·문서화</a:t>
+            </a:r>
+          </a:p>
+        </p:txBody>
+      </p:sp>
+      <p:sp>
+        <p:nvSpPr>
+          <p:cNvPr id="33" name="TextBox 32"/>
+          <p:cNvSpPr txBox="1"/>
+          <p:nvPr/>
+        </p:nvSpPr>
+        <p:spPr>
+          <a:xfrm>
+            <a:off x="6309359" y="2057400"/>
+            <a:ext cx="2377440" cy="502920"/>
+          </a:xfrm>
+          <a:prstGeom prst="rect">
+            <a:avLst/>
+          </a:prstGeom>
+          <a:noFill/>
+        </p:spPr>
+        <p:txBody>
+          <a:bodyPr wrap="square" lIns="45720" rIns="45720" tIns="18288" bIns="18288" anchor="t">
+            <a:spAutoFit/>
+          </a:bodyPr>
+          <a:lstStyle/>
+          <a:p>
+            <a:pPr algn="l">
+              <a:lnSpc>
+                <a:spcPct val="120000"/>
+              </a:lnSpc>
+            </a:pPr>
+            <a:r>
+              <a:rPr sz="2200" b="1">
+                <a:solidFill>
+                  <a:srgbClr val="2563EB"/>
+                </a:solidFill>
+                <a:latin typeface="Apple SD Gothic Neo"/>
+                <a:ea typeface="Apple SD Gothic Neo"/>
+                <a:cs typeface="Apple SD Gothic Neo"/>
+              </a:rPr>
+              <a:t>조현빈</a:t>
+            </a:r>
+          </a:p>
+        </p:txBody>
+      </p:sp>
+      <p:sp>
+        <p:nvSpPr>
+          <p:cNvPr id="34" name="Rectangle 33"/>
+          <p:cNvSpPr/>
+          <p:nvPr/>
+        </p:nvSpPr>
+        <p:spPr>
+          <a:xfrm>
+            <a:off x="6309359" y="2651760"/>
+            <a:ext cx="1097280" cy="25400"/>
+          </a:xfrm>
+          <a:prstGeom prst="rect">
+            <a:avLst/>
+          </a:prstGeom>
+          <a:solidFill>
+            <a:srgbClr val="3B82F6"/>
+          </a:solidFill>
+          <a:ln>
+            <a:noFill/>
+          </a:ln>
+          <a:effectLst/>
+        </p:spPr>
+        <p:style>
+          <a:lnRef idx="1">
+            <a:schemeClr val="accent1"/>
+          </a:lnRef>
+          <a:fillRef idx="3">
+            <a:schemeClr val="accent1"/>
+          </a:fillRef>
+          <a:effectRef idx="2">
+            <a:schemeClr val="accent1"/>
+          </a:effectRef>
+          <a:fontRef idx="minor">
+            <a:schemeClr val="lt1"/>
+          </a:fontRef>
+        </p:style>
+        <p:txBody>
+          <a:bodyPr rtlCol="0" anchor="ctr"/>
+          <a:lstStyle/>
+          <a:p>
+            <a:pPr algn="ctr"/>
+          </a:p>
+        </p:txBody>
+      </p:sp>
+      <p:sp>
+        <p:nvSpPr>
+          <p:cNvPr id="35" name="TextBox 34"/>
+          <p:cNvSpPr txBox="1"/>
+          <p:nvPr/>
+        </p:nvSpPr>
+        <p:spPr>
+          <a:xfrm>
+            <a:off x="6309359" y="2788920"/>
+            <a:ext cx="2377440" cy="1417320"/>
+          </a:xfrm>
+          <a:prstGeom prst="rect">
+            <a:avLst/>
+          </a:prstGeom>
+          <a:noFill/>
+        </p:spPr>
+        <p:txBody>
+          <a:bodyPr wrap="square" lIns="45720" rIns="45720" tIns="18288" bIns="18288" anchor="t">
+            <a:spAutoFit/>
+          </a:bodyPr>
+          <a:lstStyle/>
+          <a:p>
+            <a:pPr algn="l">
+              <a:lnSpc>
+                <a:spcPct val="140000"/>
+              </a:lnSpc>
+            </a:pPr>
+            <a:r>
+              <a:rPr sz="1000" b="0">
+                <a:solidFill>
+                  <a:srgbClr val="0F172A"/>
+                </a:solidFill>
+                <a:latin typeface="Apple SD Gothic Neo"/>
+                <a:ea typeface="Apple SD Gothic Neo"/>
+                <a:cs typeface="Apple SD Gothic Neo"/>
+              </a:rPr>
+              <a:t>RQ1/RQ2 실험 · vector.c native 구현 · 보고서 작성</a:t>
+            </a:r>
+          </a:p>
+        </p:txBody>
+      </p:sp>
+      <p:sp>
+        <p:nvSpPr>
+          <p:cNvPr id="36" name="TextBox 35"/>
+          <p:cNvSpPr txBox="1"/>
+          <p:nvPr/>
+        </p:nvSpPr>
+        <p:spPr>
+          <a:xfrm>
+            <a:off x="6309359" y="4343400"/>
+            <a:ext cx="2377440" cy="274320"/>
+          </a:xfrm>
+          <a:prstGeom prst="rect">
+            <a:avLst/>
+          </a:prstGeom>
+          <a:noFill/>
+        </p:spPr>
+        <p:txBody>
+          <a:bodyPr wrap="square" lIns="45720" rIns="45720" tIns="18288" bIns="18288" anchor="t">
+            <a:spAutoFit/>
+          </a:bodyPr>
+          <a:lstStyle/>
+          <a:p>
+            <a:pPr algn="l">
+              <a:lnSpc>
+                <a:spcPct val="120000"/>
+              </a:lnSpc>
+            </a:pPr>
+            <a:r>
+              <a:rPr sz="800" b="1">
+                <a:solidFill>
+                  <a:srgbClr val="3B82F6"/>
+                </a:solidFill>
+                <a:latin typeface="Apple SD Gothic Neo"/>
+                <a:ea typeface="Apple SD Gothic Neo"/>
+                <a:cs typeface="Apple SD Gothic Neo"/>
+              </a:rPr>
+              <a:t>HIGHLIGHT</a:t>
+            </a:r>
+          </a:p>
+        </p:txBody>
+      </p:sp>
+      <p:sp>
+        <p:nvSpPr>
+          <p:cNvPr id="37" name="Rounded Rectangle 36"/>
+          <p:cNvSpPr/>
+          <p:nvPr/>
+        </p:nvSpPr>
+        <p:spPr>
+          <a:xfrm>
+            <a:off x="6309359" y="4617720"/>
+            <a:ext cx="2331720" cy="777240"/>
+          </a:xfrm>
+          <a:prstGeom prst="roundRect">
+            <a:avLst>
+              <a:gd name="adj" fmla="val 8000"/>
+            </a:avLst>
+          </a:prstGeom>
+          <a:solidFill>
+            <a:srgbClr val="FFFFFF"/>
+          </a:solidFill>
+          <a:ln w="9525">
+            <a:solidFill>
+              <a:srgbClr val="3B82F6"/>
+            </a:solidFill>
+          </a:ln>
+          <a:effectLst/>
+        </p:spPr>
+        <p:style>
+          <a:lnRef idx="1">
+            <a:schemeClr val="accent1"/>
+          </a:lnRef>
+          <a:fillRef idx="3">
+            <a:schemeClr val="accent1"/>
+          </a:fillRef>
+          <a:effectRef idx="2">
+            <a:schemeClr val="accent1"/>
+          </a:effectRef>
+          <a:fontRef idx="minor">
+            <a:schemeClr val="lt1"/>
+          </a:fontRef>
+        </p:style>
+        <p:txBody>
+          <a:bodyPr rtlCol="0" anchor="ctr"/>
+          <a:lstStyle/>
+          <a:p>
+            <a:pPr algn="ctr"/>
+          </a:p>
+        </p:txBody>
+      </p:sp>
+      <p:sp>
+        <p:nvSpPr>
+          <p:cNvPr id="38" name="TextBox 37"/>
+          <p:cNvSpPr txBox="1"/>
+          <p:nvPr/>
+        </p:nvSpPr>
+        <p:spPr>
+          <a:xfrm>
+            <a:off x="6400799" y="4663440"/>
+            <a:ext cx="2194560" cy="685800"/>
+          </a:xfrm>
+          <a:prstGeom prst="rect">
+            <a:avLst/>
+          </a:prstGeom>
+          <a:noFill/>
+        </p:spPr>
+        <p:txBody>
+          <a:bodyPr wrap="square" lIns="45720" rIns="45720" tIns="18288" bIns="18288" anchor="t">
+            <a:spAutoFit/>
+          </a:bodyPr>
+          <a:lstStyle/>
+          <a:p>
+            <a:pPr algn="l">
+              <a:lnSpc>
+                <a:spcPct val="135000"/>
+              </a:lnSpc>
+            </a:pPr>
+            <a:r>
+              <a:rPr sz="1000" b="1">
+                <a:solidFill>
+                  <a:srgbClr val="0F172A"/>
+                </a:solidFill>
+                <a:latin typeface="Apple SD Gothic Neo"/>
+                <a:ea typeface="Apple SD Gothic Neo"/>
+                <a:cs typeface="Apple SD Gothic Neo"/>
+              </a:rPr>
+              <a:t>vector.c +228 줄 native 구현</a:t>
+            </a:r>
+          </a:p>
+        </p:txBody>
+      </p:sp>
+      <p:sp>
+        <p:nvSpPr>
+          <p:cNvPr id="39" name="Rounded Rectangle 38"/>
+          <p:cNvSpPr/>
+          <p:nvPr/>
+        </p:nvSpPr>
+        <p:spPr>
+          <a:xfrm>
+            <a:off x="8915399" y="1463040"/>
+            <a:ext cx="2697480" cy="4023360"/>
+          </a:xfrm>
+          <a:prstGeom prst="roundRect">
+            <a:avLst>
+              <a:gd name="adj" fmla="val 8000"/>
+            </a:avLst>
+          </a:prstGeom>
+          <a:solidFill>
+            <a:srgbClr val="F8FAFC"/>
+          </a:solidFill>
+          <a:ln w="9525">
+            <a:solidFill>
+              <a:srgbClr val="E2E8F0"/>
+            </a:solidFill>
+          </a:ln>
+          <a:effectLst/>
+        </p:spPr>
+        <p:style>
+          <a:lnRef idx="1">
+            <a:schemeClr val="accent1"/>
+          </a:lnRef>
+          <a:fillRef idx="3">
+            <a:schemeClr val="accent1"/>
+          </a:fillRef>
+          <a:effectRef idx="2">
+            <a:schemeClr val="accent1"/>
+          </a:effectRef>
+          <a:fontRef idx="minor">
+            <a:schemeClr val="lt1"/>
+          </a:fontRef>
+        </p:style>
+        <p:txBody>
+          <a:bodyPr rtlCol="0" anchor="ctr"/>
+          <a:lstStyle/>
+          <a:p>
+            <a:pPr algn="ctr"/>
+          </a:p>
+        </p:txBody>
+      </p:sp>
+      <p:sp>
+        <p:nvSpPr>
+          <p:cNvPr id="40" name="Rectangle 39"/>
+          <p:cNvSpPr/>
+          <p:nvPr/>
+        </p:nvSpPr>
+        <p:spPr>
+          <a:xfrm>
+            <a:off x="8915399" y="1463040"/>
+            <a:ext cx="2697480" cy="457200"/>
+          </a:xfrm>
+          <a:prstGeom prst="rect">
+            <a:avLst/>
+          </a:prstGeom>
+          <a:solidFill>
+            <a:srgbClr val="2563EB"/>
+          </a:solidFill>
+          <a:ln>
+            <a:noFill/>
+          </a:ln>
+          <a:effectLst/>
+        </p:spPr>
+        <p:style>
+          <a:lnRef idx="1">
+            <a:schemeClr val="accent1"/>
+          </a:lnRef>
+          <a:fillRef idx="3">
+            <a:schemeClr val="accent1"/>
+          </a:fillRef>
+          <a:effectRef idx="2">
+            <a:schemeClr val="accent1"/>
+          </a:effectRef>
+          <a:fontRef idx="minor">
+            <a:schemeClr val="lt1"/>
+          </a:fontRef>
+        </p:style>
+        <p:txBody>
+          <a:bodyPr rtlCol="0" anchor="ctr"/>
+          <a:lstStyle/>
+          <a:p>
+            <a:pPr algn="ctr"/>
+          </a:p>
+        </p:txBody>
+      </p:sp>
+      <p:sp>
+        <p:nvSpPr>
+          <p:cNvPr id="41" name="Oval 40"/>
+          <p:cNvSpPr/>
+          <p:nvPr/>
+        </p:nvSpPr>
+        <p:spPr>
+          <a:xfrm>
+            <a:off x="9052559" y="1581912"/>
+            <a:ext cx="246888" cy="246888"/>
+          </a:xfrm>
+          <a:prstGeom prst="ellipse">
+            <a:avLst/>
+          </a:prstGeom>
+          <a:solidFill>
+            <a:srgbClr val="FFFFFF"/>
+          </a:solidFill>
+          <a:ln>
+            <a:noFill/>
+          </a:ln>
+          <a:effectLst/>
+        </p:spPr>
+        <p:style>
+          <a:lnRef idx="1">
+            <a:schemeClr val="accent1"/>
+          </a:lnRef>
+          <a:fillRef idx="3">
+            <a:schemeClr val="accent1"/>
+          </a:fillRef>
+          <a:effectRef idx="2">
+            <a:schemeClr val="accent1"/>
+          </a:effectRef>
+          <a:fontRef idx="minor">
+            <a:schemeClr val="lt1"/>
+          </a:fontRef>
+        </p:style>
+        <p:txBody>
+          <a:bodyPr rtlCol="0" anchor="ctr"/>
+          <a:lstStyle/>
+          <a:p>
+            <a:pPr algn="ctr"/>
+          </a:p>
+        </p:txBody>
+      </p:sp>
+      <p:sp>
+        <p:nvSpPr>
+          <p:cNvPr id="42" name="TextBox 41"/>
+          <p:cNvSpPr txBox="1"/>
+          <p:nvPr/>
+        </p:nvSpPr>
+        <p:spPr>
+          <a:xfrm>
+            <a:off x="9052559" y="1581912"/>
+            <a:ext cx="246888" cy="246888"/>
+          </a:xfrm>
+          <a:prstGeom prst="rect">
+            <a:avLst/>
+          </a:prstGeom>
+          <a:noFill/>
+        </p:spPr>
+        <p:txBody>
+          <a:bodyPr wrap="square" lIns="45720" rIns="45720" tIns="18288" bIns="18288" anchor="t">
+            <a:spAutoFit/>
+          </a:bodyPr>
+          <a:lstStyle/>
+          <a:p>
+            <a:pPr algn="ctr">
+              <a:lnSpc>
+                <a:spcPct val="120000"/>
+              </a:lnSpc>
+            </a:pPr>
+            <a:r>
+              <a:rPr sz="1100" b="1">
+                <a:solidFill>
+                  <a:srgbClr val="2563EB"/>
+                </a:solidFill>
+                <a:latin typeface="Apple SD Gothic Neo"/>
+                <a:ea typeface="Apple SD Gothic Neo"/>
+                <a:cs typeface="Apple SD Gothic Neo"/>
+              </a:rPr>
+              <a:t>4</a:t>
+            </a:r>
+          </a:p>
+        </p:txBody>
+      </p:sp>
+      <p:sp>
+        <p:nvSpPr>
+          <p:cNvPr id="43" name="TextBox 42"/>
+          <p:cNvSpPr txBox="1"/>
+          <p:nvPr/>
+        </p:nvSpPr>
+        <p:spPr>
+          <a:xfrm>
+            <a:off x="9418319" y="1554480"/>
+            <a:ext cx="2103120" cy="292608"/>
+          </a:xfrm>
+          <a:prstGeom prst="rect">
+            <a:avLst/>
+          </a:prstGeom>
+          <a:noFill/>
+        </p:spPr>
+        <p:txBody>
+          <a:bodyPr wrap="square" lIns="45720" rIns="45720" tIns="18288" bIns="18288" anchor="t">
+            <a:spAutoFit/>
+          </a:bodyPr>
+          <a:lstStyle/>
+          <a:p>
+            <a:pPr algn="l">
+              <a:lnSpc>
+                <a:spcPct val="120000"/>
+              </a:lnSpc>
+            </a:pPr>
+            <a:r>
+              <a:rPr sz="1200" b="1">
+                <a:solidFill>
+                  <a:srgbClr val="FFFFFF"/>
+                </a:solidFill>
+                <a:latin typeface="Apple SD Gothic Neo"/>
+                <a:ea typeface="Apple SD Gothic Neo"/>
+                <a:cs typeface="Apple SD Gothic Neo"/>
+              </a:rPr>
+              <a:t>분석·작도</a:t>
+            </a:r>
+          </a:p>
+        </p:txBody>
+      </p:sp>
+      <p:sp>
+        <p:nvSpPr>
+          <p:cNvPr id="44" name="TextBox 43"/>
+          <p:cNvSpPr txBox="1"/>
+          <p:nvPr/>
+        </p:nvSpPr>
+        <p:spPr>
+          <a:xfrm>
+            <a:off x="9098279" y="2057400"/>
+            <a:ext cx="2377440" cy="502920"/>
+          </a:xfrm>
+          <a:prstGeom prst="rect">
+            <a:avLst/>
+          </a:prstGeom>
+          <a:noFill/>
+        </p:spPr>
+        <p:txBody>
+          <a:bodyPr wrap="square" lIns="45720" rIns="45720" tIns="18288" bIns="18288" anchor="t">
+            <a:spAutoFit/>
+          </a:bodyPr>
+          <a:lstStyle/>
+          <a:p>
+            <a:pPr algn="l">
+              <a:lnSpc>
+                <a:spcPct val="120000"/>
+              </a:lnSpc>
+            </a:pPr>
+            <a:r>
+              <a:rPr sz="2200" b="1">
+                <a:solidFill>
+                  <a:srgbClr val="2563EB"/>
+                </a:solidFill>
+                <a:latin typeface="Apple SD Gothic Neo"/>
+                <a:ea typeface="Apple SD Gothic Neo"/>
+                <a:cs typeface="Apple SD Gothic Neo"/>
+              </a:rPr>
+              <a:t>이동욱</a:t>
+            </a:r>
+          </a:p>
+        </p:txBody>
+      </p:sp>
+      <p:sp>
+        <p:nvSpPr>
+          <p:cNvPr id="45" name="Rectangle 44"/>
+          <p:cNvSpPr/>
+          <p:nvPr/>
+        </p:nvSpPr>
+        <p:spPr>
+          <a:xfrm>
+            <a:off x="9098279" y="2651760"/>
+            <a:ext cx="1097280" cy="25400"/>
+          </a:xfrm>
+          <a:prstGeom prst="rect">
+            <a:avLst/>
+          </a:prstGeom>
+          <a:solidFill>
+            <a:srgbClr val="3B82F6"/>
+          </a:solidFill>
+          <a:ln>
+            <a:noFill/>
+          </a:ln>
+          <a:effectLst/>
+        </p:spPr>
+        <p:style>
+          <a:lnRef idx="1">
+            <a:schemeClr val="accent1"/>
+          </a:lnRef>
+          <a:fillRef idx="3">
+            <a:schemeClr val="accent1"/>
+          </a:fillRef>
+          <a:effectRef idx="2">
+            <a:schemeClr val="accent1"/>
+          </a:effectRef>
+          <a:fontRef idx="minor">
+            <a:schemeClr val="lt1"/>
+          </a:fontRef>
+        </p:style>
+        <p:txBody>
+          <a:bodyPr rtlCol="0" anchor="ctr"/>
+          <a:lstStyle/>
+          <a:p>
+            <a:pPr algn="ctr"/>
+          </a:p>
+        </p:txBody>
+      </p:sp>
+      <p:sp>
+        <p:nvSpPr>
+          <p:cNvPr id="46" name="TextBox 45"/>
+          <p:cNvSpPr txBox="1"/>
+          <p:nvPr/>
+        </p:nvSpPr>
+        <p:spPr>
+          <a:xfrm>
+            <a:off x="9098279" y="2788920"/>
+            <a:ext cx="2377440" cy="1417320"/>
+          </a:xfrm>
+          <a:prstGeom prst="rect">
+            <a:avLst/>
+          </a:prstGeom>
+          <a:noFill/>
+        </p:spPr>
+        <p:txBody>
+          <a:bodyPr wrap="square" lIns="45720" rIns="45720" tIns="18288" bIns="18288" anchor="t">
+            <a:spAutoFit/>
+          </a:bodyPr>
+          <a:lstStyle/>
+          <a:p>
+            <a:pPr algn="l">
+              <a:lnSpc>
+                <a:spcPct val="140000"/>
+              </a:lnSpc>
+            </a:pPr>
+            <a:r>
+              <a:rPr sz="1000" b="0">
+                <a:solidFill>
+                  <a:srgbClr val="0F172A"/>
+                </a:solidFill>
+                <a:latin typeface="Apple SD Gothic Neo"/>
+                <a:ea typeface="Apple SD Gothic Neo"/>
+                <a:cs typeface="Apple SD Gothic Neo"/>
+              </a:rPr>
+              <a:t>통계 분석 (CI·Two-Level) · 그림 작성 · RQ3 설계</a:t>
+            </a:r>
+          </a:p>
+        </p:txBody>
+      </p:sp>
+      <p:sp>
+        <p:nvSpPr>
+          <p:cNvPr id="47" name="TextBox 46"/>
+          <p:cNvSpPr txBox="1"/>
+          <p:nvPr/>
+        </p:nvSpPr>
+        <p:spPr>
+          <a:xfrm>
+            <a:off x="9098279" y="4343400"/>
+            <a:ext cx="2377440" cy="274320"/>
+          </a:xfrm>
+          <a:prstGeom prst="rect">
+            <a:avLst/>
+          </a:prstGeom>
+          <a:noFill/>
+        </p:spPr>
+        <p:txBody>
+          <a:bodyPr wrap="square" lIns="45720" rIns="45720" tIns="18288" bIns="18288" anchor="t">
+            <a:spAutoFit/>
+          </a:bodyPr>
+          <a:lstStyle/>
+          <a:p>
+            <a:pPr algn="l">
+              <a:lnSpc>
+                <a:spcPct val="120000"/>
+              </a:lnSpc>
+            </a:pPr>
+            <a:r>
+              <a:rPr sz="800" b="1">
+                <a:solidFill>
+                  <a:srgbClr val="3B82F6"/>
+                </a:solidFill>
+                <a:latin typeface="Apple SD Gothic Neo"/>
+                <a:ea typeface="Apple SD Gothic Neo"/>
+                <a:cs typeface="Apple SD Gothic Neo"/>
+              </a:rPr>
+              <a:t>HIGHLIGHT</a:t>
+            </a:r>
+          </a:p>
+        </p:txBody>
+      </p:sp>
+      <p:sp>
+        <p:nvSpPr>
+          <p:cNvPr id="48" name="Rounded Rectangle 47"/>
+          <p:cNvSpPr/>
+          <p:nvPr/>
+        </p:nvSpPr>
+        <p:spPr>
+          <a:xfrm>
+            <a:off x="9098279" y="4617720"/>
+            <a:ext cx="2331720" cy="777240"/>
+          </a:xfrm>
+          <a:prstGeom prst="roundRect">
+            <a:avLst>
+              <a:gd name="adj" fmla="val 8000"/>
+            </a:avLst>
+          </a:prstGeom>
+          <a:solidFill>
+            <a:srgbClr val="FFFFFF"/>
+          </a:solidFill>
+          <a:ln w="9525">
+            <a:solidFill>
+              <a:srgbClr val="3B82F6"/>
+            </a:solidFill>
+          </a:ln>
+          <a:effectLst/>
+        </p:spPr>
+        <p:style>
+          <a:lnRef idx="1">
+            <a:schemeClr val="accent1"/>
+          </a:lnRef>
+          <a:fillRef idx="3">
+            <a:schemeClr val="accent1"/>
+          </a:fillRef>
+          <a:effectRef idx="2">
+            <a:schemeClr val="accent1"/>
+          </a:effectRef>
+          <a:fontRef idx="minor">
+            <a:schemeClr val="lt1"/>
+          </a:fontRef>
+        </p:style>
+        <p:txBody>
+          <a:bodyPr rtlCol="0" anchor="ctr"/>
+          <a:lstStyle/>
+          <a:p>
+            <a:pPr algn="ctr"/>
+          </a:p>
+        </p:txBody>
+      </p:sp>
+      <p:sp>
+        <p:nvSpPr>
+          <p:cNvPr id="49" name="TextBox 48"/>
+          <p:cNvSpPr txBox="1"/>
+          <p:nvPr/>
+        </p:nvSpPr>
+        <p:spPr>
+          <a:xfrm>
+            <a:off x="9189719" y="4663440"/>
+            <a:ext cx="2194560" cy="685800"/>
+          </a:xfrm>
+          <a:prstGeom prst="rect">
+            <a:avLst/>
+          </a:prstGeom>
+          <a:noFill/>
+        </p:spPr>
+        <p:txBody>
+          <a:bodyPr wrap="square" lIns="45720" rIns="45720" tIns="18288" bIns="18288" anchor="t">
+            <a:spAutoFit/>
+          </a:bodyPr>
+          <a:lstStyle/>
+          <a:p>
+            <a:pPr algn="l">
+              <a:lnSpc>
+                <a:spcPct val="135000"/>
+              </a:lnSpc>
+            </a:pPr>
+            <a:r>
+              <a:rPr sz="1000" b="1">
+                <a:solidFill>
+                  <a:srgbClr val="0F172A"/>
+                </a:solidFill>
+                <a:latin typeface="Apple SD Gothic Neo"/>
+                <a:ea typeface="Apple SD Gothic Neo"/>
+                <a:cs typeface="Apple SD Gothic Neo"/>
+              </a:rPr>
+              <a:t>Two-Level +19.6%p 분해 · 그림 8 종</a:t>
+            </a:r>
+          </a:p>
+        </p:txBody>
+      </p:sp>
+      <p:sp>
+        <p:nvSpPr>
+          <p:cNvPr id="50" name="Rounded Rectangle 49"/>
+          <p:cNvSpPr/>
+          <p:nvPr/>
+        </p:nvSpPr>
+        <p:spPr>
+          <a:xfrm>
+            <a:off x="548640" y="5623560"/>
             <a:ext cx="11064240" cy="502920"/>
           </a:xfrm>
           <a:prstGeom prst="roundRect">
@@ -11977,13 +13492,13 @@
       </p:sp>
       <p:sp>
         <p:nvSpPr>
-          <p:cNvPr id="8" name="TextBox 7"/>
-          <p:cNvSpPr txBox="1"/>
-          <p:nvPr/>
-        </p:nvSpPr>
-        <p:spPr>
-          <a:xfrm>
-            <a:off x="777240" y="5532120"/>
+          <p:cNvPr id="51" name="TextBox 50"/>
+          <p:cNvSpPr txBox="1"/>
+          <p:nvPr/>
+        </p:nvSpPr>
+        <p:spPr>
+          <a:xfrm>
+            <a:off x="777240" y="5669280"/>
             <a:ext cx="10515600" cy="411480"/>
           </a:xfrm>
           <a:prstGeom prst="rect">
@@ -12003,7 +13518,7 @@
               </a:lnSpc>
             </a:pPr>
             <a:r>
-              <a:rPr sz="1100" b="1">
+              <a:rPr sz="1000" b="1">
                 <a:solidFill>
                   <a:srgbClr val="3B82F6"/>
                 </a:solidFill>
@@ -12025,6 +13540,1710 @@
 </file>
 
 <file path=ppt/slides/slide16.xml><?xml version="1.0" encoding="utf-8"?>
+<p:sld xmlns:a="http://schemas.openxmlformats.org/drawingml/2006/main" xmlns:p="http://schemas.openxmlformats.org/presentationml/2006/main" xmlns:r="http://schemas.openxmlformats.org/officeDocument/2006/relationships">
+  <p:cSld>
+    <p:bg>
+      <p:bgPr>
+        <a:solidFill>
+          <a:srgbClr val="FFFFFF"/>
+        </a:solidFill>
+        <a:effectLst/>
+      </p:bgPr>
+    </p:bg>
+    <p:spTree>
+      <p:nvGrpSpPr>
+        <p:cNvPr id="1" name=""/>
+        <p:cNvGrpSpPr/>
+        <p:nvPr/>
+      </p:nvGrpSpPr>
+      <p:grpSpPr/>
+      <p:sp>
+        <p:nvSpPr>
+          <p:cNvPr id="2" name="Rectangle 1"/>
+          <p:cNvSpPr/>
+          <p:nvPr/>
+        </p:nvSpPr>
+        <p:spPr>
+          <a:xfrm>
+            <a:off x="731520" y="502920"/>
+            <a:ext cx="54864" cy="777240"/>
+          </a:xfrm>
+          <a:prstGeom prst="rect">
+            <a:avLst/>
+          </a:prstGeom>
+          <a:solidFill>
+            <a:srgbClr val="2563EB"/>
+          </a:solidFill>
+          <a:ln>
+            <a:noFill/>
+          </a:ln>
+          <a:effectLst/>
+        </p:spPr>
+        <p:style>
+          <a:lnRef idx="1">
+            <a:schemeClr val="accent1"/>
+          </a:lnRef>
+          <a:fillRef idx="3">
+            <a:schemeClr val="accent1"/>
+          </a:fillRef>
+          <a:effectRef idx="2">
+            <a:schemeClr val="accent1"/>
+          </a:effectRef>
+          <a:fontRef idx="minor">
+            <a:schemeClr val="lt1"/>
+          </a:fontRef>
+        </p:style>
+        <p:txBody>
+          <a:bodyPr rtlCol="0" anchor="ctr"/>
+          <a:lstStyle/>
+          <a:p>
+            <a:pPr algn="ctr"/>
+          </a:p>
+        </p:txBody>
+      </p:sp>
+      <p:sp>
+        <p:nvSpPr>
+          <p:cNvPr id="3" name="TextBox 2"/>
+          <p:cNvSpPr txBox="1"/>
+          <p:nvPr/>
+        </p:nvSpPr>
+        <p:spPr>
+          <a:xfrm>
+            <a:off x="914400" y="411480"/>
+            <a:ext cx="10515600" cy="548640"/>
+          </a:xfrm>
+          <a:prstGeom prst="rect">
+            <a:avLst/>
+          </a:prstGeom>
+          <a:noFill/>
+        </p:spPr>
+        <p:txBody>
+          <a:bodyPr wrap="square" lIns="45720" rIns="45720" tIns="18288" bIns="18288" anchor="t">
+            <a:spAutoFit/>
+          </a:bodyPr>
+          <a:lstStyle/>
+          <a:p>
+            <a:pPr algn="l">
+              <a:lnSpc>
+                <a:spcPct val="120000"/>
+              </a:lnSpc>
+            </a:pPr>
+            <a:r>
+              <a:rPr sz="2400" b="1">
+                <a:solidFill>
+                  <a:srgbClr val="0F172A"/>
+                </a:solidFill>
+                <a:latin typeface="Apple SD Gothic Neo"/>
+                <a:ea typeface="Apple SD Gothic Neo"/>
+                <a:cs typeface="Apple SD Gothic Neo"/>
+              </a:rPr>
+              <a:t>결론 — 본 발표의 4 핵심 발견</a:t>
+            </a:r>
+          </a:p>
+        </p:txBody>
+      </p:sp>
+      <p:sp>
+        <p:nvSpPr>
+          <p:cNvPr id="4" name="TextBox 3"/>
+          <p:cNvSpPr txBox="1"/>
+          <p:nvPr/>
+        </p:nvSpPr>
+        <p:spPr>
+          <a:xfrm>
+            <a:off x="914400" y="960120"/>
+            <a:ext cx="10972800" cy="320040"/>
+          </a:xfrm>
+          <a:prstGeom prst="rect">
+            <a:avLst/>
+          </a:prstGeom>
+          <a:noFill/>
+        </p:spPr>
+        <p:txBody>
+          <a:bodyPr wrap="square" lIns="45720" rIns="45720" tIns="18288" bIns="18288" anchor="t">
+            <a:spAutoFit/>
+          </a:bodyPr>
+          <a:lstStyle/>
+          <a:p>
+            <a:pPr algn="l">
+              <a:lnSpc>
+                <a:spcPct val="120000"/>
+              </a:lnSpc>
+            </a:pPr>
+            <a:r>
+              <a:rPr sz="1100" b="0">
+                <a:solidFill>
+                  <a:srgbClr val="64748B"/>
+                </a:solidFill>
+                <a:latin typeface="Apple SD Gothic Neo"/>
+                <a:ea typeface="Apple SD Gothic Neo"/>
+                <a:cs typeface="Apple SD Gothic Neo"/>
+              </a:rPr>
+              <a:t>RQ1 negative · RQ2 외적 타당성 · Two-Level 분해 · RQ3 설계</a:t>
+            </a:r>
+          </a:p>
+        </p:txBody>
+      </p:sp>
+      <p:sp>
+        <p:nvSpPr>
+          <p:cNvPr id="5" name="Rectangle 4"/>
+          <p:cNvSpPr/>
+          <p:nvPr/>
+        </p:nvSpPr>
+        <p:spPr>
+          <a:xfrm>
+            <a:off x="548640" y="1325880"/>
+            <a:ext cx="11064240" cy="12700"/>
+          </a:xfrm>
+          <a:prstGeom prst="rect">
+            <a:avLst/>
+          </a:prstGeom>
+          <a:solidFill>
+            <a:srgbClr val="E2E8F0"/>
+          </a:solidFill>
+          <a:ln>
+            <a:noFill/>
+          </a:ln>
+          <a:effectLst/>
+        </p:spPr>
+        <p:style>
+          <a:lnRef idx="1">
+            <a:schemeClr val="accent1"/>
+          </a:lnRef>
+          <a:fillRef idx="3">
+            <a:schemeClr val="accent1"/>
+          </a:fillRef>
+          <a:effectRef idx="2">
+            <a:schemeClr val="accent1"/>
+          </a:effectRef>
+          <a:fontRef idx="minor">
+            <a:schemeClr val="lt1"/>
+          </a:fontRef>
+        </p:style>
+        <p:txBody>
+          <a:bodyPr rtlCol="0" anchor="ctr"/>
+          <a:lstStyle/>
+          <a:p>
+            <a:pPr algn="ctr"/>
+          </a:p>
+        </p:txBody>
+      </p:sp>
+      <p:sp>
+        <p:nvSpPr>
+          <p:cNvPr id="6" name="TextBox 5"/>
+          <p:cNvSpPr txBox="1"/>
+          <p:nvPr/>
+        </p:nvSpPr>
+        <p:spPr>
+          <a:xfrm>
+            <a:off x="11247120" y="6446520"/>
+            <a:ext cx="914400" cy="320040"/>
+          </a:xfrm>
+          <a:prstGeom prst="rect">
+            <a:avLst/>
+          </a:prstGeom>
+          <a:noFill/>
+        </p:spPr>
+        <p:txBody>
+          <a:bodyPr wrap="square" lIns="45720" rIns="45720" tIns="18288" bIns="18288" anchor="t">
+            <a:spAutoFit/>
+          </a:bodyPr>
+          <a:lstStyle/>
+          <a:p>
+            <a:pPr algn="r">
+              <a:lnSpc>
+                <a:spcPct val="120000"/>
+              </a:lnSpc>
+            </a:pPr>
+            <a:r>
+              <a:rPr sz="900" b="0">
+                <a:solidFill>
+                  <a:srgbClr val="64748B"/>
+                </a:solidFill>
+                <a:latin typeface="Apple SD Gothic Neo"/>
+                <a:ea typeface="Apple SD Gothic Neo"/>
+                <a:cs typeface="Apple SD Gothic Neo"/>
+              </a:rPr>
+              <a:t>16 / 17</a:t>
+            </a:r>
+          </a:p>
+        </p:txBody>
+      </p:sp>
+      <p:sp>
+        <p:nvSpPr>
+          <p:cNvPr id="7" name="Rounded Rectangle 6"/>
+          <p:cNvSpPr/>
+          <p:nvPr/>
+        </p:nvSpPr>
+        <p:spPr>
+          <a:xfrm>
+            <a:off x="548640" y="1417320"/>
+            <a:ext cx="2697480" cy="4114800"/>
+          </a:xfrm>
+          <a:prstGeom prst="roundRect">
+            <a:avLst>
+              <a:gd name="adj" fmla="val 8000"/>
+            </a:avLst>
+          </a:prstGeom>
+          <a:solidFill>
+            <a:srgbClr val="F8FAFC"/>
+          </a:solidFill>
+          <a:ln w="9525">
+            <a:solidFill>
+              <a:srgbClr val="E2E8F0"/>
+            </a:solidFill>
+          </a:ln>
+          <a:effectLst/>
+        </p:spPr>
+        <p:style>
+          <a:lnRef idx="1">
+            <a:schemeClr val="accent1"/>
+          </a:lnRef>
+          <a:fillRef idx="3">
+            <a:schemeClr val="accent1"/>
+          </a:fillRef>
+          <a:effectRef idx="2">
+            <a:schemeClr val="accent1"/>
+          </a:effectRef>
+          <a:fontRef idx="minor">
+            <a:schemeClr val="lt1"/>
+          </a:fontRef>
+        </p:style>
+        <p:txBody>
+          <a:bodyPr rtlCol="0" anchor="ctr"/>
+          <a:lstStyle/>
+          <a:p>
+            <a:pPr algn="ctr"/>
+          </a:p>
+        </p:txBody>
+      </p:sp>
+      <p:sp>
+        <p:nvSpPr>
+          <p:cNvPr id="8" name="Rectangle 7"/>
+          <p:cNvSpPr/>
+          <p:nvPr/>
+        </p:nvSpPr>
+        <p:spPr>
+          <a:xfrm>
+            <a:off x="548640" y="1417320"/>
+            <a:ext cx="2697480" cy="502920"/>
+          </a:xfrm>
+          <a:prstGeom prst="rect">
+            <a:avLst/>
+          </a:prstGeom>
+          <a:solidFill>
+            <a:srgbClr val="2563EB"/>
+          </a:solidFill>
+          <a:ln>
+            <a:noFill/>
+          </a:ln>
+          <a:effectLst/>
+        </p:spPr>
+        <p:style>
+          <a:lnRef idx="1">
+            <a:schemeClr val="accent1"/>
+          </a:lnRef>
+          <a:fillRef idx="3">
+            <a:schemeClr val="accent1"/>
+          </a:fillRef>
+          <a:effectRef idx="2">
+            <a:schemeClr val="accent1"/>
+          </a:effectRef>
+          <a:fontRef idx="minor">
+            <a:schemeClr val="lt1"/>
+          </a:fontRef>
+        </p:style>
+        <p:txBody>
+          <a:bodyPr rtlCol="0" anchor="ctr"/>
+          <a:lstStyle/>
+          <a:p>
+            <a:pPr algn="ctr"/>
+          </a:p>
+        </p:txBody>
+      </p:sp>
+      <p:sp>
+        <p:nvSpPr>
+          <p:cNvPr id="9" name="TextBox 8"/>
+          <p:cNvSpPr txBox="1"/>
+          <p:nvPr/>
+        </p:nvSpPr>
+        <p:spPr>
+          <a:xfrm>
+            <a:off x="731520" y="1508760"/>
+            <a:ext cx="2377440" cy="365760"/>
+          </a:xfrm>
+          <a:prstGeom prst="rect">
+            <a:avLst/>
+          </a:prstGeom>
+          <a:noFill/>
+        </p:spPr>
+        <p:txBody>
+          <a:bodyPr wrap="square" lIns="45720" rIns="45720" tIns="18288" bIns="18288" anchor="t">
+            <a:spAutoFit/>
+          </a:bodyPr>
+          <a:lstStyle/>
+          <a:p>
+            <a:pPr algn="l">
+              <a:lnSpc>
+                <a:spcPct val="120000"/>
+              </a:lnSpc>
+            </a:pPr>
+            <a:r>
+              <a:rPr sz="1400" b="1">
+                <a:solidFill>
+                  <a:srgbClr val="FFFFFF"/>
+                </a:solidFill>
+                <a:latin typeface="Apple SD Gothic Neo"/>
+                <a:ea typeface="Apple SD Gothic Neo"/>
+                <a:cs typeface="Apple SD Gothic Neo"/>
+              </a:rPr>
+              <a:t>RQ1</a:t>
+            </a:r>
+          </a:p>
+        </p:txBody>
+      </p:sp>
+      <p:sp>
+        <p:nvSpPr>
+          <p:cNvPr id="10" name="TextBox 9"/>
+          <p:cNvSpPr txBox="1"/>
+          <p:nvPr/>
+        </p:nvSpPr>
+        <p:spPr>
+          <a:xfrm>
+            <a:off x="731520" y="2057400"/>
+            <a:ext cx="2377440" cy="777240"/>
+          </a:xfrm>
+          <a:prstGeom prst="rect">
+            <a:avLst/>
+          </a:prstGeom>
+          <a:noFill/>
+        </p:spPr>
+        <p:txBody>
+          <a:bodyPr wrap="square" lIns="45720" rIns="45720" tIns="18288" bIns="18288" anchor="t">
+            <a:spAutoFit/>
+          </a:bodyPr>
+          <a:lstStyle/>
+          <a:p>
+            <a:pPr algn="l">
+              <a:lnSpc>
+                <a:spcPct val="130000"/>
+              </a:lnSpc>
+            </a:pPr>
+            <a:r>
+              <a:rPr sz="1200" b="1">
+                <a:solidFill>
+                  <a:srgbClr val="0F172A"/>
+                </a:solidFill>
+                <a:latin typeface="Apple SD Gothic Neo"/>
+                <a:ea typeface="Apple SD Gothic Neo"/>
+                <a:cs typeface="Apple SD Gothic Neo"/>
+              </a:rPr>
+              <a:t>Skew 지표는 Q-error 를 예측하지 못한다</a:t>
+            </a:r>
+          </a:p>
+        </p:txBody>
+      </p:sp>
+      <p:sp>
+        <p:nvSpPr>
+          <p:cNvPr id="11" name="Rounded Rectangle 10"/>
+          <p:cNvSpPr/>
+          <p:nvPr/>
+        </p:nvSpPr>
+        <p:spPr>
+          <a:xfrm>
+            <a:off x="731520" y="2926080"/>
+            <a:ext cx="2331720" cy="960120"/>
+          </a:xfrm>
+          <a:prstGeom prst="roundRect">
+            <a:avLst>
+              <a:gd name="adj" fmla="val 8000"/>
+            </a:avLst>
+          </a:prstGeom>
+          <a:solidFill>
+            <a:srgbClr val="FFFFFF"/>
+          </a:solidFill>
+          <a:ln w="19050">
+            <a:solidFill>
+              <a:srgbClr val="3B82F6"/>
+            </a:solidFill>
+          </a:ln>
+          <a:effectLst/>
+        </p:spPr>
+        <p:style>
+          <a:lnRef idx="1">
+            <a:schemeClr val="accent1"/>
+          </a:lnRef>
+          <a:fillRef idx="3">
+            <a:schemeClr val="accent1"/>
+          </a:fillRef>
+          <a:effectRef idx="2">
+            <a:schemeClr val="accent1"/>
+          </a:effectRef>
+          <a:fontRef idx="minor">
+            <a:schemeClr val="lt1"/>
+          </a:fontRef>
+        </p:style>
+        <p:txBody>
+          <a:bodyPr rtlCol="0" anchor="ctr"/>
+          <a:lstStyle/>
+          <a:p>
+            <a:pPr algn="ctr"/>
+          </a:p>
+        </p:txBody>
+      </p:sp>
+      <p:sp>
+        <p:nvSpPr>
+          <p:cNvPr id="12" name="TextBox 11"/>
+          <p:cNvSpPr txBox="1"/>
+          <p:nvPr/>
+        </p:nvSpPr>
+        <p:spPr>
+          <a:xfrm>
+            <a:off x="731520" y="2971800"/>
+            <a:ext cx="2331720" cy="502920"/>
+          </a:xfrm>
+          <a:prstGeom prst="rect">
+            <a:avLst/>
+          </a:prstGeom>
+          <a:noFill/>
+        </p:spPr>
+        <p:txBody>
+          <a:bodyPr wrap="square" lIns="45720" rIns="45720" tIns="18288" bIns="18288" anchor="t">
+            <a:spAutoFit/>
+          </a:bodyPr>
+          <a:lstStyle/>
+          <a:p>
+            <a:pPr algn="ctr">
+              <a:lnSpc>
+                <a:spcPct val="120000"/>
+              </a:lnSpc>
+            </a:pPr>
+            <a:r>
+              <a:rPr sz="2200" b="1">
+                <a:solidFill>
+                  <a:srgbClr val="2563EB"/>
+                </a:solidFill>
+                <a:latin typeface="Apple SD Gothic Neo"/>
+                <a:ea typeface="Apple SD Gothic Neo"/>
+                <a:cs typeface="Apple SD Gothic Neo"/>
+              </a:rPr>
+              <a:t>48 / 48</a:t>
+            </a:r>
+          </a:p>
+        </p:txBody>
+      </p:sp>
+      <p:sp>
+        <p:nvSpPr>
+          <p:cNvPr id="13" name="TextBox 12"/>
+          <p:cNvSpPr txBox="1"/>
+          <p:nvPr/>
+        </p:nvSpPr>
+        <p:spPr>
+          <a:xfrm>
+            <a:off x="731520" y="3474720"/>
+            <a:ext cx="2331720" cy="365760"/>
+          </a:xfrm>
+          <a:prstGeom prst="rect">
+            <a:avLst/>
+          </a:prstGeom>
+          <a:noFill/>
+        </p:spPr>
+        <p:txBody>
+          <a:bodyPr wrap="square" lIns="45720" rIns="45720" tIns="18288" bIns="18288" anchor="t">
+            <a:spAutoFit/>
+          </a:bodyPr>
+          <a:lstStyle/>
+          <a:p>
+            <a:pPr algn="ctr">
+              <a:lnSpc>
+                <a:spcPct val="130000"/>
+              </a:lnSpc>
+            </a:pPr>
+            <a:r>
+              <a:rPr sz="800" b="0">
+                <a:solidFill>
+                  <a:srgbClr val="64748B"/>
+                </a:solidFill>
+                <a:latin typeface="Apple SD Gothic Neo"/>
+                <a:ea typeface="Apple SD Gothic Neo"/>
+                <a:cs typeface="Apple SD Gothic Neo"/>
+              </a:rPr>
+              <a:t>조합 모두 |ρ| &lt; 0.2</a:t>
+            </a:r>
+          </a:p>
+        </p:txBody>
+      </p:sp>
+      <p:sp>
+        <p:nvSpPr>
+          <p:cNvPr id="14" name="TextBox 13"/>
+          <p:cNvSpPr txBox="1"/>
+          <p:nvPr/>
+        </p:nvSpPr>
+        <p:spPr>
+          <a:xfrm>
+            <a:off x="731520" y="4023360"/>
+            <a:ext cx="2377440" cy="1417320"/>
+          </a:xfrm>
+          <a:prstGeom prst="rect">
+            <a:avLst/>
+          </a:prstGeom>
+          <a:noFill/>
+        </p:spPr>
+        <p:txBody>
+          <a:bodyPr wrap="square" lIns="45720" rIns="45720" tIns="18288" bIns="18288" anchor="t">
+            <a:spAutoFit/>
+          </a:bodyPr>
+          <a:lstStyle/>
+          <a:p>
+            <a:pPr algn="l">
+              <a:lnSpc>
+                <a:spcPct val="140000"/>
+              </a:lnSpc>
+            </a:pPr>
+            <a:r>
+              <a:rPr sz="900" b="0">
+                <a:solidFill>
+                  <a:srgbClr val="0F172A"/>
+                </a:solidFill>
+                <a:latin typeface="Apple SD Gothic Neo"/>
+                <a:ea typeface="Apple SD Gothic Neo"/>
+                <a:cs typeface="Apple SD Gothic Neo"/>
+              </a:rPr>
+              <a:t>글로벌 4 + 로컬 4 = 48 조합 모두 negative — query-side feature 사전 layer 정의 불가능성을 정량 증명 (Cohen 1988)</a:t>
+            </a:r>
+          </a:p>
+        </p:txBody>
+      </p:sp>
+      <p:sp>
+        <p:nvSpPr>
+          <p:cNvPr id="15" name="Rounded Rectangle 14"/>
+          <p:cNvSpPr/>
+          <p:nvPr/>
+        </p:nvSpPr>
+        <p:spPr>
+          <a:xfrm>
+            <a:off x="3337560" y="1417320"/>
+            <a:ext cx="2697480" cy="4114800"/>
+          </a:xfrm>
+          <a:prstGeom prst="roundRect">
+            <a:avLst>
+              <a:gd name="adj" fmla="val 8000"/>
+            </a:avLst>
+          </a:prstGeom>
+          <a:solidFill>
+            <a:srgbClr val="F8FAFC"/>
+          </a:solidFill>
+          <a:ln w="9525">
+            <a:solidFill>
+              <a:srgbClr val="E2E8F0"/>
+            </a:solidFill>
+          </a:ln>
+          <a:effectLst/>
+        </p:spPr>
+        <p:style>
+          <a:lnRef idx="1">
+            <a:schemeClr val="accent1"/>
+          </a:lnRef>
+          <a:fillRef idx="3">
+            <a:schemeClr val="accent1"/>
+          </a:fillRef>
+          <a:effectRef idx="2">
+            <a:schemeClr val="accent1"/>
+          </a:effectRef>
+          <a:fontRef idx="minor">
+            <a:schemeClr val="lt1"/>
+          </a:fontRef>
+        </p:style>
+        <p:txBody>
+          <a:bodyPr rtlCol="0" anchor="ctr"/>
+          <a:lstStyle/>
+          <a:p>
+            <a:pPr algn="ctr"/>
+          </a:p>
+        </p:txBody>
+      </p:sp>
+      <p:sp>
+        <p:nvSpPr>
+          <p:cNvPr id="16" name="Rectangle 15"/>
+          <p:cNvSpPr/>
+          <p:nvPr/>
+        </p:nvSpPr>
+        <p:spPr>
+          <a:xfrm>
+            <a:off x="3337560" y="1417320"/>
+            <a:ext cx="2697480" cy="502920"/>
+          </a:xfrm>
+          <a:prstGeom prst="rect">
+            <a:avLst/>
+          </a:prstGeom>
+          <a:solidFill>
+            <a:srgbClr val="2563EB"/>
+          </a:solidFill>
+          <a:ln>
+            <a:noFill/>
+          </a:ln>
+          <a:effectLst/>
+        </p:spPr>
+        <p:style>
+          <a:lnRef idx="1">
+            <a:schemeClr val="accent1"/>
+          </a:lnRef>
+          <a:fillRef idx="3">
+            <a:schemeClr val="accent1"/>
+          </a:fillRef>
+          <a:effectRef idx="2">
+            <a:schemeClr val="accent1"/>
+          </a:effectRef>
+          <a:fontRef idx="minor">
+            <a:schemeClr val="lt1"/>
+          </a:fontRef>
+        </p:style>
+        <p:txBody>
+          <a:bodyPr rtlCol="0" anchor="ctr"/>
+          <a:lstStyle/>
+          <a:p>
+            <a:pPr algn="ctr"/>
+          </a:p>
+        </p:txBody>
+      </p:sp>
+      <p:sp>
+        <p:nvSpPr>
+          <p:cNvPr id="17" name="TextBox 16"/>
+          <p:cNvSpPr txBox="1"/>
+          <p:nvPr/>
+        </p:nvSpPr>
+        <p:spPr>
+          <a:xfrm>
+            <a:off x="3520440" y="1508760"/>
+            <a:ext cx="2377440" cy="365760"/>
+          </a:xfrm>
+          <a:prstGeom prst="rect">
+            <a:avLst/>
+          </a:prstGeom>
+          <a:noFill/>
+        </p:spPr>
+        <p:txBody>
+          <a:bodyPr wrap="square" lIns="45720" rIns="45720" tIns="18288" bIns="18288" anchor="t">
+            <a:spAutoFit/>
+          </a:bodyPr>
+          <a:lstStyle/>
+          <a:p>
+            <a:pPr algn="l">
+              <a:lnSpc>
+                <a:spcPct val="120000"/>
+              </a:lnSpc>
+            </a:pPr>
+            <a:r>
+              <a:rPr sz="1400" b="1">
+                <a:solidFill>
+                  <a:srgbClr val="FFFFFF"/>
+                </a:solidFill>
+                <a:latin typeface="Apple SD Gothic Neo"/>
+                <a:ea typeface="Apple SD Gothic Neo"/>
+                <a:cs typeface="Apple SD Gothic Neo"/>
+              </a:rPr>
+              <a:t>RQ2</a:t>
+            </a:r>
+          </a:p>
+        </p:txBody>
+      </p:sp>
+      <p:sp>
+        <p:nvSpPr>
+          <p:cNvPr id="18" name="TextBox 17"/>
+          <p:cNvSpPr txBox="1"/>
+          <p:nvPr/>
+        </p:nvSpPr>
+        <p:spPr>
+          <a:xfrm>
+            <a:off x="3520440" y="2057400"/>
+            <a:ext cx="2377440" cy="777240"/>
+          </a:xfrm>
+          <a:prstGeom prst="rect">
+            <a:avLst/>
+          </a:prstGeom>
+          <a:noFill/>
+        </p:spPr>
+        <p:txBody>
+          <a:bodyPr wrap="square" lIns="45720" rIns="45720" tIns="18288" bIns="18288" anchor="t">
+            <a:spAutoFit/>
+          </a:bodyPr>
+          <a:lstStyle/>
+          <a:p>
+            <a:pPr algn="l">
+              <a:lnSpc>
+                <a:spcPct val="130000"/>
+              </a:lnSpc>
+            </a:pPr>
+            <a:r>
+              <a:rPr sz="1200" b="1">
+                <a:solidFill>
+                  <a:srgbClr val="0F172A"/>
+                </a:solidFill>
+                <a:latin typeface="Apple SD Gothic Neo"/>
+                <a:ea typeface="Apple SD Gothic Neo"/>
+                <a:cs typeface="Apple SD Gothic Neo"/>
+              </a:rPr>
+              <a:t>Skew-Aware Sampling 의 외적 타당성</a:t>
+            </a:r>
+          </a:p>
+        </p:txBody>
+      </p:sp>
+      <p:sp>
+        <p:nvSpPr>
+          <p:cNvPr id="19" name="Rounded Rectangle 18"/>
+          <p:cNvSpPr/>
+          <p:nvPr/>
+        </p:nvSpPr>
+        <p:spPr>
+          <a:xfrm>
+            <a:off x="3520440" y="2926080"/>
+            <a:ext cx="2331720" cy="960120"/>
+          </a:xfrm>
+          <a:prstGeom prst="roundRect">
+            <a:avLst>
+              <a:gd name="adj" fmla="val 8000"/>
+            </a:avLst>
+          </a:prstGeom>
+          <a:solidFill>
+            <a:srgbClr val="FFFFFF"/>
+          </a:solidFill>
+          <a:ln w="19050">
+            <a:solidFill>
+              <a:srgbClr val="3B82F6"/>
+            </a:solidFill>
+          </a:ln>
+          <a:effectLst/>
+        </p:spPr>
+        <p:style>
+          <a:lnRef idx="1">
+            <a:schemeClr val="accent1"/>
+          </a:lnRef>
+          <a:fillRef idx="3">
+            <a:schemeClr val="accent1"/>
+          </a:fillRef>
+          <a:effectRef idx="2">
+            <a:schemeClr val="accent1"/>
+          </a:effectRef>
+          <a:fontRef idx="minor">
+            <a:schemeClr val="lt1"/>
+          </a:fontRef>
+        </p:style>
+        <p:txBody>
+          <a:bodyPr rtlCol="0" anchor="ctr"/>
+          <a:lstStyle/>
+          <a:p>
+            <a:pPr algn="ctr"/>
+          </a:p>
+        </p:txBody>
+      </p:sp>
+      <p:sp>
+        <p:nvSpPr>
+          <p:cNvPr id="20" name="TextBox 19"/>
+          <p:cNvSpPr txBox="1"/>
+          <p:nvPr/>
+        </p:nvSpPr>
+        <p:spPr>
+          <a:xfrm>
+            <a:off x="3520440" y="2971800"/>
+            <a:ext cx="2331720" cy="502920"/>
+          </a:xfrm>
+          <a:prstGeom prst="rect">
+            <a:avLst/>
+          </a:prstGeom>
+          <a:noFill/>
+        </p:spPr>
+        <p:txBody>
+          <a:bodyPr wrap="square" lIns="45720" rIns="45720" tIns="18288" bIns="18288" anchor="t">
+            <a:spAutoFit/>
+          </a:bodyPr>
+          <a:lstStyle/>
+          <a:p>
+            <a:pPr algn="ctr">
+              <a:lnSpc>
+                <a:spcPct val="120000"/>
+              </a:lnSpc>
+            </a:pPr>
+            <a:r>
+              <a:rPr sz="2200" b="1">
+                <a:solidFill>
+                  <a:srgbClr val="2563EB"/>
+                </a:solidFill>
+                <a:latin typeface="Apple SD Gothic Neo"/>
+                <a:ea typeface="Apple SD Gothic Neo"/>
+                <a:cs typeface="Apple SD Gothic Neo"/>
+              </a:rPr>
+              <a:t>+1.64 ~ +3.07%</a:t>
+            </a:r>
+          </a:p>
+        </p:txBody>
+      </p:sp>
+      <p:sp>
+        <p:nvSpPr>
+          <p:cNvPr id="21" name="TextBox 20"/>
+          <p:cNvSpPr txBox="1"/>
+          <p:nvPr/>
+        </p:nvSpPr>
+        <p:spPr>
+          <a:xfrm>
+            <a:off x="3520440" y="3474720"/>
+            <a:ext cx="2331720" cy="365760"/>
+          </a:xfrm>
+          <a:prstGeom prst="rect">
+            <a:avLst/>
+          </a:prstGeom>
+          <a:noFill/>
+        </p:spPr>
+        <p:txBody>
+          <a:bodyPr wrap="square" lIns="45720" rIns="45720" tIns="18288" bIns="18288" anchor="t">
+            <a:spAutoFit/>
+          </a:bodyPr>
+          <a:lstStyle/>
+          <a:p>
+            <a:pPr algn="ctr">
+              <a:lnSpc>
+                <a:spcPct val="130000"/>
+              </a:lnSpc>
+            </a:pPr>
+            <a:r>
+              <a:rPr sz="800" b="0">
+                <a:solidFill>
+                  <a:srgbClr val="64748B"/>
+                </a:solidFill>
+                <a:latin typeface="Apple SD Gothic Neo"/>
+                <a:ea typeface="Apple SD Gothic Neo"/>
+                <a:cs typeface="Apple SD Gothic Neo"/>
+              </a:rPr>
+              <a:t>DEEP 1M / 8M / SIFT 5-seed 95% CI</a:t>
+            </a:r>
+          </a:p>
+        </p:txBody>
+      </p:sp>
+      <p:sp>
+        <p:nvSpPr>
+          <p:cNvPr id="22" name="TextBox 21"/>
+          <p:cNvSpPr txBox="1"/>
+          <p:nvPr/>
+        </p:nvSpPr>
+        <p:spPr>
+          <a:xfrm>
+            <a:off x="3520440" y="4023360"/>
+            <a:ext cx="2377440" cy="1417320"/>
+          </a:xfrm>
+          <a:prstGeom prst="rect">
+            <a:avLst/>
+          </a:prstGeom>
+          <a:noFill/>
+        </p:spPr>
+        <p:txBody>
+          <a:bodyPr wrap="square" lIns="45720" rIns="45720" tIns="18288" bIns="18288" anchor="t">
+            <a:spAutoFit/>
+          </a:bodyPr>
+          <a:lstStyle/>
+          <a:p>
+            <a:pPr algn="l">
+              <a:lnSpc>
+                <a:spcPct val="140000"/>
+              </a:lnSpc>
+            </a:pPr>
+            <a:r>
+              <a:rPr sz="900" b="0">
+                <a:solidFill>
+                  <a:srgbClr val="0F172A"/>
+                </a:solidFill>
+                <a:latin typeface="Apple SD Gothic Neo"/>
+                <a:ea typeface="Apple SD Gothic Neo"/>
+                <a:cs typeface="Apple SD Gothic Neo"/>
+              </a:rPr>
+              <a:t>3 데이터셋 모두 BERN 위에서 추가 개선 — DEEP 1M vs 8M CI 겹침 (CONSISTENT) · SIFT 1.5M 약 2배 효과 (CV 0.394, 통계적 구별)</a:t>
+            </a:r>
+          </a:p>
+        </p:txBody>
+      </p:sp>
+      <p:sp>
+        <p:nvSpPr>
+          <p:cNvPr id="23" name="Rounded Rectangle 22"/>
+          <p:cNvSpPr/>
+          <p:nvPr/>
+        </p:nvSpPr>
+        <p:spPr>
+          <a:xfrm>
+            <a:off x="6126479" y="1417320"/>
+            <a:ext cx="2697480" cy="4114800"/>
+          </a:xfrm>
+          <a:prstGeom prst="roundRect">
+            <a:avLst>
+              <a:gd name="adj" fmla="val 8000"/>
+            </a:avLst>
+          </a:prstGeom>
+          <a:solidFill>
+            <a:srgbClr val="F8FAFC"/>
+          </a:solidFill>
+          <a:ln w="9525">
+            <a:solidFill>
+              <a:srgbClr val="E2E8F0"/>
+            </a:solidFill>
+          </a:ln>
+          <a:effectLst/>
+        </p:spPr>
+        <p:style>
+          <a:lnRef idx="1">
+            <a:schemeClr val="accent1"/>
+          </a:lnRef>
+          <a:fillRef idx="3">
+            <a:schemeClr val="accent1"/>
+          </a:fillRef>
+          <a:effectRef idx="2">
+            <a:schemeClr val="accent1"/>
+          </a:effectRef>
+          <a:fontRef idx="minor">
+            <a:schemeClr val="lt1"/>
+          </a:fontRef>
+        </p:style>
+        <p:txBody>
+          <a:bodyPr rtlCol="0" anchor="ctr"/>
+          <a:lstStyle/>
+          <a:p>
+            <a:pPr algn="ctr"/>
+          </a:p>
+        </p:txBody>
+      </p:sp>
+      <p:sp>
+        <p:nvSpPr>
+          <p:cNvPr id="24" name="Rectangle 23"/>
+          <p:cNvSpPr/>
+          <p:nvPr/>
+        </p:nvSpPr>
+        <p:spPr>
+          <a:xfrm>
+            <a:off x="6126479" y="1417320"/>
+            <a:ext cx="2697480" cy="502920"/>
+          </a:xfrm>
+          <a:prstGeom prst="rect">
+            <a:avLst/>
+          </a:prstGeom>
+          <a:solidFill>
+            <a:srgbClr val="2563EB"/>
+          </a:solidFill>
+          <a:ln>
+            <a:noFill/>
+          </a:ln>
+          <a:effectLst/>
+        </p:spPr>
+        <p:style>
+          <a:lnRef idx="1">
+            <a:schemeClr val="accent1"/>
+          </a:lnRef>
+          <a:fillRef idx="3">
+            <a:schemeClr val="accent1"/>
+          </a:fillRef>
+          <a:effectRef idx="2">
+            <a:schemeClr val="accent1"/>
+          </a:effectRef>
+          <a:fontRef idx="minor">
+            <a:schemeClr val="lt1"/>
+          </a:fontRef>
+        </p:style>
+        <p:txBody>
+          <a:bodyPr rtlCol="0" anchor="ctr"/>
+          <a:lstStyle/>
+          <a:p>
+            <a:pPr algn="ctr"/>
+          </a:p>
+        </p:txBody>
+      </p:sp>
+      <p:sp>
+        <p:nvSpPr>
+          <p:cNvPr id="25" name="TextBox 24"/>
+          <p:cNvSpPr txBox="1"/>
+          <p:nvPr/>
+        </p:nvSpPr>
+        <p:spPr>
+          <a:xfrm>
+            <a:off x="6309359" y="1508760"/>
+            <a:ext cx="2377440" cy="365760"/>
+          </a:xfrm>
+          <a:prstGeom prst="rect">
+            <a:avLst/>
+          </a:prstGeom>
+          <a:noFill/>
+        </p:spPr>
+        <p:txBody>
+          <a:bodyPr wrap="square" lIns="45720" rIns="45720" tIns="18288" bIns="18288" anchor="t">
+            <a:spAutoFit/>
+          </a:bodyPr>
+          <a:lstStyle/>
+          <a:p>
+            <a:pPr algn="l">
+              <a:lnSpc>
+                <a:spcPct val="120000"/>
+              </a:lnSpc>
+            </a:pPr>
+            <a:r>
+              <a:rPr sz="1400" b="1">
+                <a:solidFill>
+                  <a:srgbClr val="FFFFFF"/>
+                </a:solidFill>
+                <a:latin typeface="Apple SD Gothic Neo"/>
+                <a:ea typeface="Apple SD Gothic Neo"/>
+                <a:cs typeface="Apple SD Gothic Neo"/>
+              </a:rPr>
+              <a:t>Two-Level</a:t>
+            </a:r>
+          </a:p>
+        </p:txBody>
+      </p:sp>
+      <p:sp>
+        <p:nvSpPr>
+          <p:cNvPr id="26" name="TextBox 25"/>
+          <p:cNvSpPr txBox="1"/>
+          <p:nvPr/>
+        </p:nvSpPr>
+        <p:spPr>
+          <a:xfrm>
+            <a:off x="6309359" y="2057400"/>
+            <a:ext cx="2377440" cy="777240"/>
+          </a:xfrm>
+          <a:prstGeom prst="rect">
+            <a:avLst/>
+          </a:prstGeom>
+          <a:noFill/>
+        </p:spPr>
+        <p:txBody>
+          <a:bodyPr wrap="square" lIns="45720" rIns="45720" tIns="18288" bIns="18288" anchor="t">
+            <a:spAutoFit/>
+          </a:bodyPr>
+          <a:lstStyle/>
+          <a:p>
+            <a:pPr algn="l">
+              <a:lnSpc>
+                <a:spcPct val="130000"/>
+              </a:lnSpc>
+            </a:pPr>
+            <a:r>
+              <a:rPr sz="1200" b="1">
+                <a:solidFill>
+                  <a:srgbClr val="0F172A"/>
+                </a:solidFill>
+                <a:latin typeface="Apple SD Gothic Neo"/>
+                <a:ea typeface="Apple SD Gothic Neo"/>
+                <a:cs typeface="Apple SD Gothic Neo"/>
+              </a:rPr>
+              <a:t>공간 인식 단독 효과 정량화</a:t>
+            </a:r>
+          </a:p>
+        </p:txBody>
+      </p:sp>
+      <p:sp>
+        <p:nvSpPr>
+          <p:cNvPr id="27" name="Rounded Rectangle 26"/>
+          <p:cNvSpPr/>
+          <p:nvPr/>
+        </p:nvSpPr>
+        <p:spPr>
+          <a:xfrm>
+            <a:off x="6309359" y="2926080"/>
+            <a:ext cx="2331720" cy="960120"/>
+          </a:xfrm>
+          <a:prstGeom prst="roundRect">
+            <a:avLst>
+              <a:gd name="adj" fmla="val 8000"/>
+            </a:avLst>
+          </a:prstGeom>
+          <a:solidFill>
+            <a:srgbClr val="FFFFFF"/>
+          </a:solidFill>
+          <a:ln w="19050">
+            <a:solidFill>
+              <a:srgbClr val="3B82F6"/>
+            </a:solidFill>
+          </a:ln>
+          <a:effectLst/>
+        </p:spPr>
+        <p:style>
+          <a:lnRef idx="1">
+            <a:schemeClr val="accent1"/>
+          </a:lnRef>
+          <a:fillRef idx="3">
+            <a:schemeClr val="accent1"/>
+          </a:fillRef>
+          <a:effectRef idx="2">
+            <a:schemeClr val="accent1"/>
+          </a:effectRef>
+          <a:fontRef idx="minor">
+            <a:schemeClr val="lt1"/>
+          </a:fontRef>
+        </p:style>
+        <p:txBody>
+          <a:bodyPr rtlCol="0" anchor="ctr"/>
+          <a:lstStyle/>
+          <a:p>
+            <a:pPr algn="ctr"/>
+          </a:p>
+        </p:txBody>
+      </p:sp>
+      <p:sp>
+        <p:nvSpPr>
+          <p:cNvPr id="28" name="TextBox 27"/>
+          <p:cNvSpPr txBox="1"/>
+          <p:nvPr/>
+        </p:nvSpPr>
+        <p:spPr>
+          <a:xfrm>
+            <a:off x="6309359" y="2971800"/>
+            <a:ext cx="2331720" cy="502920"/>
+          </a:xfrm>
+          <a:prstGeom prst="rect">
+            <a:avLst/>
+          </a:prstGeom>
+          <a:noFill/>
+        </p:spPr>
+        <p:txBody>
+          <a:bodyPr wrap="square" lIns="45720" rIns="45720" tIns="18288" bIns="18288" anchor="t">
+            <a:spAutoFit/>
+          </a:bodyPr>
+          <a:lstStyle/>
+          <a:p>
+            <a:pPr algn="ctr">
+              <a:lnSpc>
+                <a:spcPct val="120000"/>
+              </a:lnSpc>
+            </a:pPr>
+            <a:r>
+              <a:rPr sz="2200" b="1">
+                <a:solidFill>
+                  <a:srgbClr val="2563EB"/>
+                </a:solidFill>
+                <a:latin typeface="Apple SD Gothic Neo"/>
+                <a:ea typeface="Apple SD Gothic Neo"/>
+                <a:cs typeface="Apple SD Gothic Neo"/>
+              </a:rPr>
+              <a:t>+19.6 %p</a:t>
+            </a:r>
+          </a:p>
+        </p:txBody>
+      </p:sp>
+      <p:sp>
+        <p:nvSpPr>
+          <p:cNvPr id="29" name="TextBox 28"/>
+          <p:cNvSpPr txBox="1"/>
+          <p:nvPr/>
+        </p:nvSpPr>
+        <p:spPr>
+          <a:xfrm>
+            <a:off x="6309359" y="3474720"/>
+            <a:ext cx="2331720" cy="365760"/>
+          </a:xfrm>
+          <a:prstGeom prst="rect">
+            <a:avLst/>
+          </a:prstGeom>
+          <a:noFill/>
+        </p:spPr>
+        <p:txBody>
+          <a:bodyPr wrap="square" lIns="45720" rIns="45720" tIns="18288" bIns="18288" anchor="t">
+            <a:spAutoFit/>
+          </a:bodyPr>
+          <a:lstStyle/>
+          <a:p>
+            <a:pPr algn="ctr">
+              <a:lnSpc>
+                <a:spcPct val="130000"/>
+              </a:lnSpc>
+            </a:pPr>
+            <a:r>
+              <a:rPr sz="800" b="0">
+                <a:solidFill>
+                  <a:srgbClr val="64748B"/>
+                </a:solidFill>
+                <a:latin typeface="Apple SD Gothic Neo"/>
+                <a:ea typeface="Apple SD Gothic Neo"/>
+                <a:cs typeface="Apple SD Gothic Neo"/>
+              </a:rPr>
+              <a:t>Level 2 단독 (DEEP 1M, s=0.010)</a:t>
+            </a:r>
+          </a:p>
+        </p:txBody>
+      </p:sp>
+      <p:sp>
+        <p:nvSpPr>
+          <p:cNvPr id="30" name="TextBox 29"/>
+          <p:cNvSpPr txBox="1"/>
+          <p:nvPr/>
+        </p:nvSpPr>
+        <p:spPr>
+          <a:xfrm>
+            <a:off x="6309359" y="4023360"/>
+            <a:ext cx="2377440" cy="1417320"/>
+          </a:xfrm>
+          <a:prstGeom prst="rect">
+            <a:avLst/>
+          </a:prstGeom>
+          <a:noFill/>
+        </p:spPr>
+        <p:txBody>
+          <a:bodyPr wrap="square" lIns="45720" rIns="45720" tIns="18288" bIns="18288" anchor="t">
+            <a:spAutoFit/>
+          </a:bodyPr>
+          <a:lstStyle/>
+          <a:p>
+            <a:pPr algn="l">
+              <a:lnSpc>
+                <a:spcPct val="140000"/>
+              </a:lnSpc>
+            </a:pPr>
+            <a:r>
+              <a:rPr sz="900" b="0">
+                <a:solidFill>
+                  <a:srgbClr val="0F172A"/>
+                </a:solidFill>
+                <a:latin typeface="Apple SD Gothic Neo"/>
+                <a:ea typeface="Apple SD Gothic Neo"/>
+                <a:cs typeface="Apple SD Gothic Neo"/>
+              </a:rPr>
+              <a:t>KM20 +8.93%, RANDOM20 −10.67% — 비례 배분 (Level 1) 과 공간 인식 (Level 2) 분해, 가설 단조 관계 재확인 (Horvitz-Thompson 1952)</a:t>
+            </a:r>
+          </a:p>
+        </p:txBody>
+      </p:sp>
+      <p:sp>
+        <p:nvSpPr>
+          <p:cNvPr id="31" name="Rounded Rectangle 30"/>
+          <p:cNvSpPr/>
+          <p:nvPr/>
+        </p:nvSpPr>
+        <p:spPr>
+          <a:xfrm>
+            <a:off x="8915399" y="1417320"/>
+            <a:ext cx="2697480" cy="4114800"/>
+          </a:xfrm>
+          <a:prstGeom prst="roundRect">
+            <a:avLst>
+              <a:gd name="adj" fmla="val 8000"/>
+            </a:avLst>
+          </a:prstGeom>
+          <a:solidFill>
+            <a:srgbClr val="F8FAFC"/>
+          </a:solidFill>
+          <a:ln w="9525">
+            <a:solidFill>
+              <a:srgbClr val="E2E8F0"/>
+            </a:solidFill>
+          </a:ln>
+          <a:effectLst/>
+        </p:spPr>
+        <p:style>
+          <a:lnRef idx="1">
+            <a:schemeClr val="accent1"/>
+          </a:lnRef>
+          <a:fillRef idx="3">
+            <a:schemeClr val="accent1"/>
+          </a:fillRef>
+          <a:effectRef idx="2">
+            <a:schemeClr val="accent1"/>
+          </a:effectRef>
+          <a:fontRef idx="minor">
+            <a:schemeClr val="lt1"/>
+          </a:fontRef>
+        </p:style>
+        <p:txBody>
+          <a:bodyPr rtlCol="0" anchor="ctr"/>
+          <a:lstStyle/>
+          <a:p>
+            <a:pPr algn="ctr"/>
+          </a:p>
+        </p:txBody>
+      </p:sp>
+      <p:sp>
+        <p:nvSpPr>
+          <p:cNvPr id="32" name="Rectangle 31"/>
+          <p:cNvSpPr/>
+          <p:nvPr/>
+        </p:nvSpPr>
+        <p:spPr>
+          <a:xfrm>
+            <a:off x="8915399" y="1417320"/>
+            <a:ext cx="2697480" cy="502920"/>
+          </a:xfrm>
+          <a:prstGeom prst="rect">
+            <a:avLst/>
+          </a:prstGeom>
+          <a:solidFill>
+            <a:srgbClr val="2563EB"/>
+          </a:solidFill>
+          <a:ln>
+            <a:noFill/>
+          </a:ln>
+          <a:effectLst/>
+        </p:spPr>
+        <p:style>
+          <a:lnRef idx="1">
+            <a:schemeClr val="accent1"/>
+          </a:lnRef>
+          <a:fillRef idx="3">
+            <a:schemeClr val="accent1"/>
+          </a:fillRef>
+          <a:effectRef idx="2">
+            <a:schemeClr val="accent1"/>
+          </a:effectRef>
+          <a:fontRef idx="minor">
+            <a:schemeClr val="lt1"/>
+          </a:fontRef>
+        </p:style>
+        <p:txBody>
+          <a:bodyPr rtlCol="0" anchor="ctr"/>
+          <a:lstStyle/>
+          <a:p>
+            <a:pPr algn="ctr"/>
+          </a:p>
+        </p:txBody>
+      </p:sp>
+      <p:sp>
+        <p:nvSpPr>
+          <p:cNvPr id="33" name="TextBox 32"/>
+          <p:cNvSpPr txBox="1"/>
+          <p:nvPr/>
+        </p:nvSpPr>
+        <p:spPr>
+          <a:xfrm>
+            <a:off x="9098279" y="1508760"/>
+            <a:ext cx="2377440" cy="365760"/>
+          </a:xfrm>
+          <a:prstGeom prst="rect">
+            <a:avLst/>
+          </a:prstGeom>
+          <a:noFill/>
+        </p:spPr>
+        <p:txBody>
+          <a:bodyPr wrap="square" lIns="45720" rIns="45720" tIns="18288" bIns="18288" anchor="t">
+            <a:spAutoFit/>
+          </a:bodyPr>
+          <a:lstStyle/>
+          <a:p>
+            <a:pPr algn="l">
+              <a:lnSpc>
+                <a:spcPct val="120000"/>
+              </a:lnSpc>
+            </a:pPr>
+            <a:r>
+              <a:rPr sz="1400" b="1">
+                <a:solidFill>
+                  <a:srgbClr val="FFFFFF"/>
+                </a:solidFill>
+                <a:latin typeface="Apple SD Gothic Neo"/>
+                <a:ea typeface="Apple SD Gothic Neo"/>
+                <a:cs typeface="Apple SD Gothic Neo"/>
+              </a:rPr>
+              <a:t>RQ3</a:t>
+            </a:r>
+          </a:p>
+        </p:txBody>
+      </p:sp>
+      <p:sp>
+        <p:nvSpPr>
+          <p:cNvPr id="34" name="TextBox 33"/>
+          <p:cNvSpPr txBox="1"/>
+          <p:nvPr/>
+        </p:nvSpPr>
+        <p:spPr>
+          <a:xfrm>
+            <a:off x="9098279" y="2057400"/>
+            <a:ext cx="2377440" cy="777240"/>
+          </a:xfrm>
+          <a:prstGeom prst="rect">
+            <a:avLst/>
+          </a:prstGeom>
+          <a:noFill/>
+        </p:spPr>
+        <p:txBody>
+          <a:bodyPr wrap="square" lIns="45720" rIns="45720" tIns="18288" bIns="18288" anchor="t">
+            <a:spAutoFit/>
+          </a:bodyPr>
+          <a:lstStyle/>
+          <a:p>
+            <a:pPr algn="l">
+              <a:lnSpc>
+                <a:spcPct val="130000"/>
+              </a:lnSpc>
+            </a:pPr>
+            <a:r>
+              <a:rPr sz="1200" b="1">
+                <a:solidFill>
+                  <a:srgbClr val="0F172A"/>
+                </a:solidFill>
+                <a:latin typeface="Apple SD Gothic Neo"/>
+                <a:ea typeface="Apple SD Gothic Neo"/>
+                <a:cs typeface="Apple SD Gothic Neo"/>
+              </a:rPr>
+              <a:t>Recovery Rate 프레임워크 설계 완료</a:t>
+            </a:r>
+          </a:p>
+        </p:txBody>
+      </p:sp>
+      <p:sp>
+        <p:nvSpPr>
+          <p:cNvPr id="35" name="Rounded Rectangle 34"/>
+          <p:cNvSpPr/>
+          <p:nvPr/>
+        </p:nvSpPr>
+        <p:spPr>
+          <a:xfrm>
+            <a:off x="9098279" y="2926080"/>
+            <a:ext cx="2331720" cy="960120"/>
+          </a:xfrm>
+          <a:prstGeom prst="roundRect">
+            <a:avLst>
+              <a:gd name="adj" fmla="val 8000"/>
+            </a:avLst>
+          </a:prstGeom>
+          <a:solidFill>
+            <a:srgbClr val="FFFFFF"/>
+          </a:solidFill>
+          <a:ln w="19050">
+            <a:solidFill>
+              <a:srgbClr val="3B82F6"/>
+            </a:solidFill>
+          </a:ln>
+          <a:effectLst/>
+        </p:spPr>
+        <p:style>
+          <a:lnRef idx="1">
+            <a:schemeClr val="accent1"/>
+          </a:lnRef>
+          <a:fillRef idx="3">
+            <a:schemeClr val="accent1"/>
+          </a:fillRef>
+          <a:effectRef idx="2">
+            <a:schemeClr val="accent1"/>
+          </a:effectRef>
+          <a:fontRef idx="minor">
+            <a:schemeClr val="lt1"/>
+          </a:fontRef>
+        </p:style>
+        <p:txBody>
+          <a:bodyPr rtlCol="0" anchor="ctr"/>
+          <a:lstStyle/>
+          <a:p>
+            <a:pPr algn="ctr"/>
+          </a:p>
+        </p:txBody>
+      </p:sp>
+      <p:sp>
+        <p:nvSpPr>
+          <p:cNvPr id="36" name="TextBox 35"/>
+          <p:cNvSpPr txBox="1"/>
+          <p:nvPr/>
+        </p:nvSpPr>
+        <p:spPr>
+          <a:xfrm>
+            <a:off x="9098279" y="2971800"/>
+            <a:ext cx="2331720" cy="502920"/>
+          </a:xfrm>
+          <a:prstGeom prst="rect">
+            <a:avLst/>
+          </a:prstGeom>
+          <a:noFill/>
+        </p:spPr>
+        <p:txBody>
+          <a:bodyPr wrap="square" lIns="45720" rIns="45720" tIns="18288" bIns="18288" anchor="t">
+            <a:spAutoFit/>
+          </a:bodyPr>
+          <a:lstStyle/>
+          <a:p>
+            <a:pPr algn="ctr">
+              <a:lnSpc>
+                <a:spcPct val="120000"/>
+              </a:lnSpc>
+            </a:pPr>
+            <a:r>
+              <a:rPr sz="2200" b="1">
+                <a:solidFill>
+                  <a:srgbClr val="2563EB"/>
+                </a:solidFill>
+                <a:latin typeface="Apple SD Gothic Neo"/>
+                <a:ea typeface="Apple SD Gothic Neo"/>
+                <a:cs typeface="Apple SD Gothic Neo"/>
+              </a:rPr>
+              <a:t>3 × 7</a:t>
+            </a:r>
+          </a:p>
+        </p:txBody>
+      </p:sp>
+      <p:sp>
+        <p:nvSpPr>
+          <p:cNvPr id="37" name="TextBox 36"/>
+          <p:cNvSpPr txBox="1"/>
+          <p:nvPr/>
+        </p:nvSpPr>
+        <p:spPr>
+          <a:xfrm>
+            <a:off x="9098279" y="3474720"/>
+            <a:ext cx="2331720" cy="365760"/>
+          </a:xfrm>
+          <a:prstGeom prst="rect">
+            <a:avLst/>
+          </a:prstGeom>
+          <a:noFill/>
+        </p:spPr>
+        <p:txBody>
+          <a:bodyPr wrap="square" lIns="45720" rIns="45720" tIns="18288" bIns="18288" anchor="t">
+            <a:spAutoFit/>
+          </a:bodyPr>
+          <a:lstStyle/>
+          <a:p>
+            <a:pPr algn="ctr">
+              <a:lnSpc>
+                <a:spcPct val="130000"/>
+              </a:lnSpc>
+            </a:pPr>
+            <a:r>
+              <a:rPr sz="800" b="0">
+                <a:solidFill>
+                  <a:srgbClr val="64748B"/>
+                </a:solidFill>
+                <a:latin typeface="Apple SD Gothic Neo"/>
+                <a:ea typeface="Apple SD Gothic Neo"/>
+                <a:cs typeface="Apple SD Gothic Neo"/>
+              </a:rPr>
+              <a:t>패러다임 × 방법 (W5~W7 실험)</a:t>
+            </a:r>
+          </a:p>
+        </p:txBody>
+      </p:sp>
+      <p:sp>
+        <p:nvSpPr>
+          <p:cNvPr id="38" name="TextBox 37"/>
+          <p:cNvSpPr txBox="1"/>
+          <p:nvPr/>
+        </p:nvSpPr>
+        <p:spPr>
+          <a:xfrm>
+            <a:off x="9098279" y="4023360"/>
+            <a:ext cx="2377440" cy="1417320"/>
+          </a:xfrm>
+          <a:prstGeom prst="rect">
+            <a:avLst/>
+          </a:prstGeom>
+          <a:noFill/>
+        </p:spPr>
+        <p:txBody>
+          <a:bodyPr wrap="square" lIns="45720" rIns="45720" tIns="18288" bIns="18288" anchor="t">
+            <a:spAutoFit/>
+          </a:bodyPr>
+          <a:lstStyle/>
+          <a:p>
+            <a:pPr algn="l">
+              <a:lnSpc>
+                <a:spcPct val="140000"/>
+              </a:lnSpc>
+            </a:pPr>
+            <a:r>
+              <a:rPr sz="900" b="0">
+                <a:solidFill>
+                  <a:srgbClr val="0F172A"/>
+                </a:solidFill>
+                <a:latin typeface="Apple SD Gothic Neo"/>
+                <a:ea typeface="Apple SD Gothic Neo"/>
+                <a:cs typeface="Apple SD Gothic Neo"/>
+              </a:rPr>
+              <a:t>Offline (LSH/RP/Hilbert/MiniBatch) + Online (Shell/KDE-pilot) + Weight (IS) — 분포 미지 시 KM20 의 절반 효과 회수 목표 (Neyman 1934)</a:t>
+            </a:r>
+          </a:p>
+        </p:txBody>
+      </p:sp>
+      <p:sp>
+        <p:nvSpPr>
+          <p:cNvPr id="39" name="Rounded Rectangle 38"/>
+          <p:cNvSpPr/>
+          <p:nvPr/>
+        </p:nvSpPr>
+        <p:spPr>
+          <a:xfrm>
+            <a:off x="548640" y="5669280"/>
+            <a:ext cx="11064240" cy="502920"/>
+          </a:xfrm>
+          <a:prstGeom prst="roundRect">
+            <a:avLst>
+              <a:gd name="adj" fmla="val 8000"/>
+            </a:avLst>
+          </a:prstGeom>
+          <a:solidFill>
+            <a:srgbClr val="0F172A"/>
+          </a:solidFill>
+          <a:ln>
+            <a:noFill/>
+          </a:ln>
+          <a:effectLst/>
+        </p:spPr>
+        <p:style>
+          <a:lnRef idx="1">
+            <a:schemeClr val="accent1"/>
+          </a:lnRef>
+          <a:fillRef idx="3">
+            <a:schemeClr val="accent1"/>
+          </a:fillRef>
+          <a:effectRef idx="2">
+            <a:schemeClr val="accent1"/>
+          </a:effectRef>
+          <a:fontRef idx="minor">
+            <a:schemeClr val="lt1"/>
+          </a:fontRef>
+        </p:style>
+        <p:txBody>
+          <a:bodyPr rtlCol="0" anchor="ctr"/>
+          <a:lstStyle/>
+          <a:p>
+            <a:pPr algn="ctr"/>
+          </a:p>
+        </p:txBody>
+      </p:sp>
+      <p:sp>
+        <p:nvSpPr>
+          <p:cNvPr id="40" name="TextBox 39"/>
+          <p:cNvSpPr txBox="1"/>
+          <p:nvPr/>
+        </p:nvSpPr>
+        <p:spPr>
+          <a:xfrm>
+            <a:off x="777240" y="5715000"/>
+            <a:ext cx="10515600" cy="411480"/>
+          </a:xfrm>
+          <a:prstGeom prst="rect">
+            <a:avLst/>
+          </a:prstGeom>
+          <a:noFill/>
+        </p:spPr>
+        <p:txBody>
+          <a:bodyPr wrap="square" lIns="45720" rIns="45720" tIns="18288" bIns="18288" anchor="ctr">
+            <a:spAutoFit/>
+          </a:bodyPr>
+          <a:lstStyle/>
+          <a:p>
+            <a:pPr algn="l">
+              <a:lnSpc>
+                <a:spcPct val="120000"/>
+              </a:lnSpc>
+            </a:pPr>
+            <a:r>
+              <a:rPr sz="1100" b="1">
+                <a:solidFill>
+                  <a:srgbClr val="3B82F6"/>
+                </a:solidFill>
+                <a:latin typeface="Apple SD Gothic Neo"/>
+                <a:ea typeface="Apple SD Gothic Neo"/>
+                <a:cs typeface="Apple SD Gothic Neo"/>
+              </a:rPr>
+              <a:t>★  skewed 거리 분포에서 카디널리티 추정 정확도 — 본 연구의 단계적 sanitize 가 측정 가능한 개선을 정량 확보</a:t>
+            </a:r>
+          </a:p>
+        </p:txBody>
+      </p:sp>
+    </p:spTree>
+  </p:cSld>
+  <p:clrMapOvr>
+    <a:masterClrMapping/>
+  </p:clrMapOvr>
+</p:sld>
+</file>
+
+<file path=ppt/slides/slide17.xml><?xml version="1.0" encoding="utf-8"?>
 <p:sld xmlns:a="http://schemas.openxmlformats.org/drawingml/2006/main" xmlns:p="http://schemas.openxmlformats.org/presentationml/2006/main" xmlns:r="http://schemas.openxmlformats.org/officeDocument/2006/relationships">
   <p:cSld>
     <p:bg>
@@ -12441,7 +15660,7 @@
                 <a:ea typeface="Apple SD Gothic Neo"/>
                 <a:cs typeface="Apple SD Gothic Neo"/>
               </a:rPr>
-              <a:t>2 / 16</a:t>
+              <a:t>2 / 17</a:t>
             </a:r>
           </a:p>
         </p:txBody>
@@ -13482,7 +16701,7 @@
                 <a:ea typeface="Apple SD Gothic Neo"/>
                 <a:cs typeface="Apple SD Gothic Neo"/>
               </a:rPr>
-              <a:t>3 / 16</a:t>
+              <a:t>3 / 17</a:t>
             </a:r>
           </a:p>
         </p:txBody>
@@ -14228,7 +17447,7 @@
                 <a:ea typeface="Apple SD Gothic Neo"/>
                 <a:cs typeface="Apple SD Gothic Neo"/>
               </a:rPr>
-              <a:t>■ 옵티마이저가 잘못된 실행 계획 선택 → nested loop ↔ hash join, index 사용 여부</a:t>
+              <a:t>■ 옵티마이저가 잘못된 실행 계획 선택 → nested loop vs hash join, index 사용 여부</a:t>
             </a:r>
           </a:p>
           <a:p>
@@ -14573,7 +17792,7 @@
                 <a:ea typeface="Apple SD Gothic Neo"/>
                 <a:cs typeface="Apple SD Gothic Neo"/>
               </a:rPr>
-              <a:t>4 / 16</a:t>
+              <a:t>4 / 17</a:t>
             </a:r>
           </a:p>
         </p:txBody>
@@ -15587,7 +18806,7 @@
                 <a:ea typeface="Apple SD Gothic Neo"/>
                 <a:cs typeface="Apple SD Gothic Neo"/>
               </a:rPr>
-              <a:t>5 / 16</a:t>
+              <a:t>5 / 17</a:t>
             </a:r>
           </a:p>
         </p:txBody>
@@ -16785,7 +20004,7 @@
                 <a:ea typeface="Apple SD Gothic Neo"/>
                 <a:cs typeface="Apple SD Gothic Neo"/>
               </a:rPr>
-              <a:t>6 / 16</a:t>
+              <a:t>6 / 17</a:t>
             </a:r>
           </a:p>
         </p:txBody>
@@ -18146,7 +21365,7 @@
                 <a:ea typeface="Apple SD Gothic Neo"/>
                 <a:cs typeface="Apple SD Gothic Neo"/>
               </a:rPr>
-              <a:t>7 / 16</a:t>
+              <a:t>7 / 17</a:t>
             </a:r>
           </a:p>
         </p:txBody>
@@ -19117,7 +22336,7 @@
                 <a:ea typeface="Apple SD Gothic Neo"/>
                 <a:cs typeface="Apple SD Gothic Neo"/>
               </a:rPr>
-              <a:t>8 / 16</a:t>
+              <a:t>8 / 17</a:t>
             </a:r>
           </a:p>
         </p:txBody>
@@ -19132,7 +22351,7 @@
         </p:nvGraphicFramePr>
         <p:xfrm>
           <a:off x="548640" y="1417320"/>
-          <a:ext cx="7315200" cy="2231136"/>
+          <a:ext cx="6217920" cy="2487168"/>
         </p:xfrm>
         <a:graphic>
           <a:graphicData uri="http://schemas.openxmlformats.org/drawingml/2006/table">
@@ -19141,14 +22360,14 @@
                 <a:tableStyleId>{5C22544A-7EE6-4342-B048-85BDC9FD1C3A}</a:tableStyleId>
               </a:tblPr>
               <a:tblGrid>
-                <a:gridCol w="914400"/>
-                <a:gridCol w="1280160"/>
-                <a:gridCol w="1280160"/>
-                <a:gridCol w="914400"/>
-                <a:gridCol w="1463040"/>
-                <a:gridCol w="1463040"/>
+                <a:gridCol w="777240"/>
+                <a:gridCol w="1097280"/>
+                <a:gridCol w="1097280"/>
+                <a:gridCol w="777240"/>
+                <a:gridCol w="1234440"/>
+                <a:gridCol w="1234440"/>
               </a:tblGrid>
-              <a:tr h="318733">
+              <a:tr h="355309">
                 <a:tc>
                   <a:txBody>
                     <a:bodyPr/>
@@ -19288,7 +22507,7 @@
                   </a:tcPr>
                 </a:tc>
               </a:tr>
-              <a:tr h="318733">
+              <a:tr h="355309">
                 <a:tc>
                   <a:txBody>
                     <a:bodyPr/>
@@ -19428,7 +22647,7 @@
                   </a:tcPr>
                 </a:tc>
               </a:tr>
-              <a:tr h="318733">
+              <a:tr h="355309">
                 <a:tc>
                   <a:txBody>
                     <a:bodyPr/>
@@ -19568,7 +22787,7 @@
                   </a:tcPr>
                 </a:tc>
               </a:tr>
-              <a:tr h="318733">
+              <a:tr h="355309">
                 <a:tc>
                   <a:txBody>
                     <a:bodyPr/>
@@ -19708,7 +22927,7 @@
                   </a:tcPr>
                 </a:tc>
               </a:tr>
-              <a:tr h="318733">
+              <a:tr h="355309">
                 <a:tc>
                   <a:txBody>
                     <a:bodyPr/>
@@ -19848,7 +23067,7 @@
                   </a:tcPr>
                 </a:tc>
               </a:tr>
-              <a:tr h="318733">
+              <a:tr h="355309">
                 <a:tc>
                   <a:txBody>
                     <a:bodyPr/>
@@ -19988,7 +23207,7 @@
                   </a:tcPr>
                 </a:tc>
               </a:tr>
-              <a:tr h="318738">
+              <a:tr h="355314">
                 <a:tc>
                   <a:txBody>
                     <a:bodyPr/>
@@ -20132,16 +23351,81 @@
           </a:graphicData>
         </a:graphic>
       </p:graphicFrame>
-      <p:sp>
-        <p:nvSpPr>
-          <p:cNvPr id="8" name="TextBox 7"/>
-          <p:cNvSpPr txBox="1"/>
-          <p:nvPr/>
-        </p:nvSpPr>
-        <p:spPr>
-          <a:xfrm>
-            <a:off x="8092440" y="1417320"/>
-            <a:ext cx="3657600" cy="320040"/>
+      <p:pic>
+        <p:nvPicPr>
+          <p:cNvPr id="8" name="Picture 7" descr="figure_1_phase4_scatter.png"/>
+          <p:cNvPicPr>
+            <a:picLocks noChangeAspect="1"/>
+          </p:cNvPicPr>
+          <p:nvPr/>
+        </p:nvPicPr>
+        <p:blipFill>
+          <a:blip r:embed="rId2"/>
+          <a:stretch>
+            <a:fillRect/>
+          </a:stretch>
+        </p:blipFill>
+        <p:spPr>
+          <a:xfrm>
+            <a:off x="6858000" y="2680924"/>
+            <a:ext cx="4846320" cy="1313271"/>
+          </a:xfrm>
+          <a:prstGeom prst="rect">
+            <a:avLst/>
+          </a:prstGeom>
+        </p:spPr>
+      </p:pic>
+      <p:sp>
+        <p:nvSpPr>
+          <p:cNvPr id="9" name="TextBox 8"/>
+          <p:cNvSpPr txBox="1"/>
+          <p:nvPr/>
+        </p:nvSpPr>
+        <p:spPr>
+          <a:xfrm>
+            <a:off x="6858000" y="5303520"/>
+            <a:ext cx="4846320" cy="228600"/>
+          </a:xfrm>
+          <a:prstGeom prst="rect">
+            <a:avLst/>
+          </a:prstGeom>
+          <a:noFill/>
+        </p:spPr>
+        <p:txBody>
+          <a:bodyPr wrap="square" lIns="45720" rIns="45720" tIns="18288" bIns="18288" anchor="t">
+            <a:spAutoFit/>
+          </a:bodyPr>
+          <a:lstStyle/>
+          <a:p>
+            <a:pPr algn="ctr">
+              <a:lnSpc>
+                <a:spcPct val="120000"/>
+              </a:lnSpc>
+            </a:pPr>
+            <a:r>
+              <a:rPr sz="900" b="0">
+                <a:solidFill>
+                  <a:srgbClr val="64748B"/>
+                </a:solidFill>
+                <a:latin typeface="Apple SD Gothic Neo"/>
+                <a:ea typeface="Apple SD Gothic Neo"/>
+                <a:cs typeface="Apple SD Gothic Neo"/>
+              </a:rPr>
+              <a:t>Phase 4 — SYS vs BERN paired Q-error 4 panel (s=0.05/0.10/0.30/0.50)</a:t>
+            </a:r>
+          </a:p>
+        </p:txBody>
+      </p:sp>
+      <p:sp>
+        <p:nvSpPr>
+          <p:cNvPr id="10" name="TextBox 9"/>
+          <p:cNvSpPr txBox="1"/>
+          <p:nvPr/>
+        </p:nvSpPr>
+        <p:spPr>
+          <a:xfrm>
+            <a:off x="548640" y="4114800"/>
+            <a:ext cx="6309360" cy="292608"/>
           </a:xfrm>
           <a:prstGeom prst="rect">
             <a:avLst/>
@@ -20175,14 +23459,14 @@
       </p:sp>
       <p:sp>
         <p:nvSpPr>
-          <p:cNvPr id="9" name="Rounded Rectangle 8"/>
+          <p:cNvPr id="11" name="Rounded Rectangle 10"/>
           <p:cNvSpPr/>
           <p:nvPr/>
         </p:nvSpPr>
         <p:spPr>
           <a:xfrm>
-            <a:off x="8092440" y="1737360"/>
-            <a:ext cx="3611880" cy="1828800"/>
+            <a:off x="548640" y="4434840"/>
+            <a:ext cx="6263640" cy="1691640"/>
           </a:xfrm>
           <a:prstGeom prst="roundRect">
             <a:avLst>
@@ -20223,14 +23507,14 @@
       </p:sp>
       <p:sp>
         <p:nvSpPr>
-          <p:cNvPr id="10" name="TextBox 9"/>
-          <p:cNvSpPr txBox="1"/>
-          <p:nvPr/>
-        </p:nvSpPr>
-        <p:spPr>
-          <a:xfrm>
-            <a:off x="8229600" y="1828800"/>
-            <a:ext cx="3383280" cy="365760"/>
+          <p:cNvPr id="12" name="TextBox 11"/>
+          <p:cNvSpPr txBox="1"/>
+          <p:nvPr/>
+        </p:nvSpPr>
+        <p:spPr>
+          <a:xfrm>
+            <a:off x="713232" y="4526280"/>
+            <a:ext cx="6080760" cy="365760"/>
           </a:xfrm>
           <a:prstGeom prst="rect">
             <a:avLst/>
@@ -20249,7 +23533,7 @@
               </a:lnSpc>
             </a:pPr>
             <a:r>
-              <a:rPr sz="900" b="0">
+              <a:rPr sz="1000" b="0">
                 <a:solidFill>
                   <a:srgbClr val="0F172A"/>
                 </a:solidFill>
@@ -20266,11 +23550,11 @@
                 <a:spcPts val="0"/>
               </a:spcBef>
               <a:spcAft>
-                <a:spcPts val="500"/>
+                <a:spcPts val="600"/>
               </a:spcAft>
             </a:pPr>
             <a:r>
-              <a:rPr sz="900" b="0">
+              <a:rPr sz="1000" b="0">
                 <a:solidFill>
                   <a:srgbClr val="0F172A"/>
                 </a:solidFill>
@@ -20287,11 +23571,11 @@
                 <a:spcPts val="0"/>
               </a:spcBef>
               <a:spcAft>
-                <a:spcPts val="500"/>
+                <a:spcPts val="600"/>
               </a:spcAft>
             </a:pPr>
             <a:r>
-              <a:rPr sz="900" b="0">
+              <a:rPr sz="1000" b="0">
                 <a:solidFill>
                   <a:srgbClr val="0F172A"/>
                 </a:solidFill>
@@ -20300,71 +23584,6 @@
                 <a:cs typeface="Apple SD Gothic Neo"/>
               </a:rPr>
               <a:t>③  단, 이는 Pivot C 의 fair baseline 도구이지 단독 기여가 아님</a:t>
-            </a:r>
-          </a:p>
-        </p:txBody>
-      </p:sp>
-      <p:pic>
-        <p:nvPicPr>
-          <p:cNvPr id="11" name="Picture 10" descr="figure_1_phase4_scatter.png"/>
-          <p:cNvPicPr>
-            <a:picLocks noChangeAspect="1"/>
-          </p:cNvPicPr>
-          <p:nvPr/>
-        </p:nvPicPr>
-        <p:blipFill>
-          <a:blip r:embed="rId2"/>
-          <a:stretch>
-            <a:fillRect/>
-          </a:stretch>
-        </p:blipFill>
-        <p:spPr>
-          <a:xfrm>
-            <a:off x="2706381" y="4114800"/>
-            <a:ext cx="6748757" cy="1828800"/>
-          </a:xfrm>
-          <a:prstGeom prst="rect">
-            <a:avLst/>
-          </a:prstGeom>
-        </p:spPr>
-      </p:pic>
-      <p:sp>
-        <p:nvSpPr>
-          <p:cNvPr id="12" name="TextBox 11"/>
-          <p:cNvSpPr txBox="1"/>
-          <p:nvPr/>
-        </p:nvSpPr>
-        <p:spPr>
-          <a:xfrm>
-            <a:off x="548640" y="5989320"/>
-            <a:ext cx="11064240" cy="228600"/>
-          </a:xfrm>
-          <a:prstGeom prst="rect">
-            <a:avLst/>
-          </a:prstGeom>
-          <a:noFill/>
-        </p:spPr>
-        <p:txBody>
-          <a:bodyPr wrap="square" lIns="45720" rIns="45720" tIns="18288" bIns="18288" anchor="t">
-            <a:spAutoFit/>
-          </a:bodyPr>
-          <a:lstStyle/>
-          <a:p>
-            <a:pPr algn="ctr">
-              <a:lnSpc>
-                <a:spcPct val="120000"/>
-              </a:lnSpc>
-            </a:pPr>
-            <a:r>
-              <a:rPr sz="900" b="0">
-                <a:solidFill>
-                  <a:srgbClr val="64748B"/>
-                </a:solidFill>
-                <a:latin typeface="Apple SD Gothic Neo"/>
-                <a:ea typeface="Apple SD Gothic Neo"/>
-                <a:cs typeface="Apple SD Gothic Neo"/>
-              </a:rPr>
-              <a:t>Phase 4 — SYS vs BERN paired Q-error 4 panel (s=0.05/0.10/0.30/0.50)</a:t>
             </a:r>
           </a:p>
         </p:txBody>
@@ -20601,7 +23820,7 @@
                 <a:ea typeface="Apple SD Gothic Neo"/>
                 <a:cs typeface="Apple SD Gothic Neo"/>
               </a:rPr>
-              <a:t>9 / 16</a:t>
+              <a:t>9 / 17</a:t>
             </a:r>
           </a:p>
         </p:txBody>

--- a/submission/_drafts/속도는벡터_중간발표.pptx
+++ b/submission/_drafts/속도는벡터_중간발표.pptx
@@ -5709,8 +5709,8 @@
         </p:blipFill>
         <p:spPr>
           <a:xfrm>
-            <a:off x="6951865" y="1737360"/>
-            <a:ext cx="4247108" cy="2468880"/>
+            <a:off x="6400800" y="1879979"/>
+            <a:ext cx="5349240" cy="2183640"/>
           </a:xfrm>
           <a:prstGeom prst="rect">
             <a:avLst/>
@@ -14040,7 +14040,7 @@
         <p:spPr>
           <a:xfrm>
             <a:off x="731520" y="3474720"/>
-            <a:ext cx="2331720" cy="365760"/>
+            <a:ext cx="2331720" cy="411480"/>
           </a:xfrm>
           <a:prstGeom prst="rect">
             <a:avLst/>
@@ -14059,7 +14059,7 @@
               </a:lnSpc>
             </a:pPr>
             <a:r>
-              <a:rPr sz="800" b="0">
+              <a:rPr sz="900" b="0">
                 <a:solidFill>
                   <a:srgbClr val="64748B"/>
                 </a:solidFill>
@@ -14385,7 +14385,7 @@
         <p:spPr>
           <a:xfrm>
             <a:off x="3520440" y="3474720"/>
-            <a:ext cx="2331720" cy="365760"/>
+            <a:ext cx="2331720" cy="411480"/>
           </a:xfrm>
           <a:prstGeom prst="rect">
             <a:avLst/>
@@ -14404,7 +14404,7 @@
               </a:lnSpc>
             </a:pPr>
             <a:r>
-              <a:rPr sz="800" b="0">
+              <a:rPr sz="900" b="0">
                 <a:solidFill>
                   <a:srgbClr val="64748B"/>
                 </a:solidFill>
@@ -14730,7 +14730,7 @@
         <p:spPr>
           <a:xfrm>
             <a:off x="6309359" y="3474720"/>
-            <a:ext cx="2331720" cy="365760"/>
+            <a:ext cx="2331720" cy="411480"/>
           </a:xfrm>
           <a:prstGeom prst="rect">
             <a:avLst/>
@@ -14749,7 +14749,7 @@
               </a:lnSpc>
             </a:pPr>
             <a:r>
-              <a:rPr sz="800" b="0">
+              <a:rPr sz="900" b="0">
                 <a:solidFill>
                   <a:srgbClr val="64748B"/>
                 </a:solidFill>
@@ -15075,7 +15075,7 @@
         <p:spPr>
           <a:xfrm>
             <a:off x="9098279" y="3474720"/>
-            <a:ext cx="2331720" cy="365760"/>
+            <a:ext cx="2331720" cy="411480"/>
           </a:xfrm>
           <a:prstGeom prst="rect">
             <a:avLst/>
@@ -15094,7 +15094,7 @@
               </a:lnSpc>
             </a:pPr>
             <a:r>
-              <a:rPr sz="800" b="0">
+              <a:rPr sz="900" b="0">
                 <a:solidFill>
                   <a:srgbClr val="64748B"/>
                 </a:solidFill>
@@ -21084,8 +21084,8 @@
         </p:blipFill>
         <p:spPr>
           <a:xfrm>
-            <a:off x="6346697" y="4206240"/>
-            <a:ext cx="3857245" cy="2194560"/>
+            <a:off x="5822419" y="4206240"/>
+            <a:ext cx="4905800" cy="2194560"/>
           </a:xfrm>
           <a:prstGeom prst="rect">
             <a:avLst/>
@@ -21968,8 +21968,8 @@
         </p:blipFill>
         <p:spPr>
           <a:xfrm>
-            <a:off x="5852160" y="1727881"/>
-            <a:ext cx="5806440" cy="2350677"/>
+            <a:off x="5852160" y="1761077"/>
+            <a:ext cx="5806440" cy="2284284"/>
           </a:xfrm>
           <a:prstGeom prst="rect">
             <a:avLst/>

--- a/submission/_drafts/속도는벡터_중간발표.pptx
+++ b/submission/_drafts/속도는벡터_중간발표.pptx
@@ -3825,8 +3825,8 @@
         </p:blipFill>
         <p:spPr>
           <a:xfrm>
-            <a:off x="703138" y="1417320"/>
-            <a:ext cx="4720203" cy="3749040"/>
+            <a:off x="556911" y="1417320"/>
+            <a:ext cx="5012656" cy="3749040"/>
           </a:xfrm>
           <a:prstGeom prst="rect">
             <a:avLst/>
@@ -5709,8 +5709,8 @@
         </p:blipFill>
         <p:spPr>
           <a:xfrm>
-            <a:off x="6400800" y="1879979"/>
-            <a:ext cx="5349240" cy="2183640"/>
+            <a:off x="6400800" y="1901680"/>
+            <a:ext cx="5349240" cy="2140238"/>
           </a:xfrm>
           <a:prstGeom prst="rect">
             <a:avLst/>
@@ -6206,7 +6206,7 @@
                 <a:ea typeface="Apple SD Gothic Neo"/>
                 <a:cs typeface="Apple SD Gothic Neo"/>
               </a:rPr>
-              <a:t>4-Ⅴ. RQ3 (설계) — 분포를 모를 때의 Recovery Rate 프레임워크</a:t>
+              <a:t>4-Ⅵ. RQ3 (설계) — 분포를 모를 때의 Recovery Rate 프레임워크</a:t>
             </a:r>
           </a:p>
         </p:txBody>
@@ -6678,7 +6678,7 @@
                 <a:ea typeface="Apple SD Gothic Neo"/>
                 <a:cs typeface="Apple SD Gothic Neo"/>
               </a:rPr>
-              <a:t>1. LSH Random Hyperplane</a:t>
+              <a:t>LSH Random Hyperplane</a:t>
             </a:r>
           </a:p>
         </p:txBody>
@@ -6763,7 +6763,7 @@
                 <a:ea typeface="Apple SD Gothic Neo"/>
                 <a:cs typeface="Apple SD Gothic Neo"/>
               </a:rPr>
-              <a:t>2. Random Projection (JL)</a:t>
+              <a:t>Random Projection (JL)</a:t>
             </a:r>
           </a:p>
         </p:txBody>
@@ -6848,7 +6848,7 @@
                 <a:ea typeface="Apple SD Gothic Neo"/>
                 <a:cs typeface="Apple SD Gothic Neo"/>
               </a:rPr>
-              <a:t>3. Hilbert Curve</a:t>
+              <a:t>Hilbert Curve</a:t>
             </a:r>
           </a:p>
         </p:txBody>
@@ -6933,7 +6933,7 @@
                 <a:ea typeface="Apple SD Gothic Neo"/>
                 <a:cs typeface="Apple SD Gothic Neo"/>
               </a:rPr>
-              <a:t>4. Mini-batch K-means</a:t>
+              <a:t>Mini-batch K-means</a:t>
             </a:r>
           </a:p>
         </p:txBody>
@@ -7233,7 +7233,7 @@
                 <a:ea typeface="Apple SD Gothic Neo"/>
                 <a:cs typeface="Apple SD Gothic Neo"/>
               </a:rPr>
-              <a:t>5. Distance-Shell</a:t>
+              <a:t>Distance-Shell</a:t>
             </a:r>
           </a:p>
         </p:txBody>
@@ -7318,7 +7318,7 @@
                 <a:ea typeface="Apple SD Gothic Neo"/>
                 <a:cs typeface="Apple SD Gothic Neo"/>
               </a:rPr>
-              <a:t>6. KDE-pilot (Neyman)</a:t>
+              <a:t>KDE-pilot (Neyman)</a:t>
             </a:r>
           </a:p>
         </p:txBody>
@@ -7618,7 +7618,7 @@
                 <a:ea typeface="Apple SD Gothic Neo"/>
                 <a:cs typeface="Apple SD Gothic Neo"/>
               </a:rPr>
-              <a:t>7. Importance Sampling</a:t>
+              <a:t>Importance Sampling</a:t>
             </a:r>
           </a:p>
         </p:txBody>
@@ -7939,7 +7939,7 @@
                 <a:ea typeface="Apple SD Gothic Neo"/>
                 <a:cs typeface="Apple SD Gothic Neo"/>
               </a:rPr>
-              <a:t>5-Ⅰ. 현재 진행 상황 (W1~W4)</a:t>
+              <a:t>5-Ⅰ. 현재 진행 상황 (W1~W9, 보고서 표 4 와 일치)</a:t>
             </a:r>
           </a:p>
         </p:txBody>
@@ -8157,7 +8157,7 @@
                 <a:ea typeface="Apple SD Gothic Neo"/>
                 <a:cs typeface="Apple SD Gothic Neo"/>
               </a:rPr>
-              <a:t>W1  ✓</a:t>
+              <a:t>W1~W6  ✓</a:t>
             </a:r>
           </a:p>
         </p:txBody>
@@ -8198,7 +8198,7 @@
                 <a:ea typeface="Apple SD Gothic Neo"/>
                 <a:cs typeface="Apple SD Gothic Neo"/>
               </a:rPr>
-              <a:t>3/2~4/4</a:t>
+              <a:t>3/2~4/12</a:t>
             </a:r>
           </a:p>
         </p:txBody>
@@ -8362,7 +8362,7 @@
                 <a:ea typeface="Apple SD Gothic Neo"/>
                 <a:cs typeface="Apple SD Gothic Neo"/>
               </a:rPr>
-              <a:t>·  서버 수령 + Docker (4/14)</a:t>
+              <a:t>·  코드·데이터 수령 (4/7~)</a:t>
             </a:r>
           </a:p>
         </p:txBody>
@@ -8403,7 +8403,7 @@
                 <a:ea typeface="Apple SD Gothic Neo"/>
                 <a:cs typeface="Apple SD Gothic Neo"/>
               </a:rPr>
-              <a:t>·  코드·데이터 수령 (4/7~)</a:t>
+              <a:t>·  서버 권한 + Docker (4/14)</a:t>
             </a:r>
           </a:p>
         </p:txBody>
@@ -8536,7 +8536,7 @@
                 <a:ea typeface="Apple SD Gothic Neo"/>
                 <a:cs typeface="Apple SD Gothic Neo"/>
               </a:rPr>
-              <a:t>W2  ✓</a:t>
+              <a:t>W7  ✓</a:t>
             </a:r>
           </a:p>
         </p:txBody>
@@ -8577,7 +8577,7 @@
                 <a:ea typeface="Apple SD Gothic Neo"/>
                 <a:cs typeface="Apple SD Gothic Neo"/>
               </a:rPr>
-              <a:t>4/11~4/15</a:t>
+              <a:t>4/13~4/19</a:t>
             </a:r>
           </a:p>
         </p:txBody>
@@ -8874,7 +8874,7 @@
                 <a:ea typeface="Apple SD Gothic Neo"/>
                 <a:cs typeface="Apple SD Gothic Neo"/>
               </a:rPr>
-              <a:t>W3  ✓</a:t>
+              <a:t>W8  ✓</a:t>
             </a:r>
           </a:p>
         </p:txBody>
@@ -8915,7 +8915,7 @@
                 <a:ea typeface="Apple SD Gothic Neo"/>
                 <a:cs typeface="Apple SD Gothic Neo"/>
               </a:rPr>
-              <a:t>4/15~4/16</a:t>
+              <a:t>4/20~4/26</a:t>
             </a:r>
           </a:p>
         </p:txBody>
@@ -9212,7 +9212,7 @@
                 <a:ea typeface="Apple SD Gothic Neo"/>
                 <a:cs typeface="Apple SD Gothic Neo"/>
               </a:rPr>
-              <a:t>W4  ▶</a:t>
+              <a:t>W9  ▶</a:t>
             </a:r>
           </a:p>
         </p:txBody>
@@ -9253,7 +9253,7 @@
                 <a:ea typeface="Apple SD Gothic Neo"/>
                 <a:cs typeface="Apple SD Gothic Neo"/>
               </a:rPr>
-              <a:t>4/17~4/28</a:t>
+              <a:t>4/27~5/3</a:t>
             </a:r>
           </a:p>
         </p:txBody>
@@ -19636,8 +19636,8 @@
         </p:blipFill>
         <p:spPr>
           <a:xfrm>
-            <a:off x="5852160" y="1828848"/>
-            <a:ext cx="5806440" cy="2285903"/>
+            <a:off x="6686128" y="1737360"/>
+            <a:ext cx="4138502" cy="2468880"/>
           </a:xfrm>
           <a:prstGeom prst="rect">
             <a:avLst/>
@@ -20694,7 +20694,7 @@
         <p:spPr>
           <a:xfrm>
             <a:off x="548640" y="3749039"/>
-            <a:ext cx="11064240" cy="548640"/>
+            <a:ext cx="11064240" cy="502920"/>
           </a:xfrm>
           <a:prstGeom prst="roundRect">
             <a:avLst>
@@ -20739,7 +20739,7 @@
         </p:nvSpPr>
         <p:spPr>
           <a:xfrm>
-            <a:off x="777240" y="3803904"/>
+            <a:off x="777240" y="3776472"/>
             <a:ext cx="10515600" cy="457200"/>
           </a:xfrm>
           <a:prstGeom prst="rect">
@@ -20780,7 +20780,7 @@
         </p:nvSpPr>
         <p:spPr>
           <a:xfrm>
-            <a:off x="548640" y="4434840"/>
+            <a:off x="548640" y="4526280"/>
             <a:ext cx="4206240" cy="320040"/>
           </a:xfrm>
           <a:prstGeom prst="rect">
@@ -20821,7 +20821,7 @@
         </p:nvSpPr>
         <p:spPr>
           <a:xfrm>
-            <a:off x="640080" y="4882896"/>
+            <a:off x="640080" y="4974336"/>
             <a:ext cx="118872" cy="118872"/>
           </a:xfrm>
           <a:prstGeom prst="ellipse">
@@ -20865,7 +20865,7 @@
         </p:nvSpPr>
         <p:spPr>
           <a:xfrm>
-            <a:off x="868680" y="4800600"/>
+            <a:off x="868680" y="4892040"/>
             <a:ext cx="4023360" cy="411480"/>
           </a:xfrm>
           <a:prstGeom prst="rect">
@@ -20906,7 +20906,7 @@
         </p:nvSpPr>
         <p:spPr>
           <a:xfrm>
-            <a:off x="640080" y="5340096"/>
+            <a:off x="640080" y="5431536"/>
             <a:ext cx="118872" cy="118872"/>
           </a:xfrm>
           <a:prstGeom prst="ellipse">
@@ -20950,7 +20950,7 @@
         </p:nvSpPr>
         <p:spPr>
           <a:xfrm>
-            <a:off x="868680" y="5257800"/>
+            <a:off x="868680" y="5349240"/>
             <a:ext cx="4023360" cy="411480"/>
           </a:xfrm>
           <a:prstGeom prst="rect">
@@ -20991,7 +20991,7 @@
         </p:nvSpPr>
         <p:spPr>
           <a:xfrm>
-            <a:off x="640080" y="5797296"/>
+            <a:off x="640080" y="5888736"/>
             <a:ext cx="118872" cy="118872"/>
           </a:xfrm>
           <a:prstGeom prst="ellipse">
@@ -21035,7 +21035,7 @@
         </p:nvSpPr>
         <p:spPr>
           <a:xfrm>
-            <a:off x="868680" y="5715000"/>
+            <a:off x="868680" y="5806440"/>
             <a:ext cx="4023360" cy="411480"/>
           </a:xfrm>
           <a:prstGeom prst="rect">
@@ -21084,8 +21084,8 @@
         </p:blipFill>
         <p:spPr>
           <a:xfrm>
-            <a:off x="5822419" y="4206240"/>
-            <a:ext cx="4905800" cy="2194560"/>
+            <a:off x="6029760" y="4526280"/>
+            <a:ext cx="4491119" cy="1920240"/>
           </a:xfrm>
           <a:prstGeom prst="rect">
             <a:avLst/>
@@ -21100,7 +21100,7 @@
         </p:nvSpPr>
         <p:spPr>
           <a:xfrm>
-            <a:off x="4937760" y="6446520"/>
+            <a:off x="4937760" y="6492240"/>
             <a:ext cx="6675120" cy="228600"/>
           </a:xfrm>
           <a:prstGeom prst="rect">
@@ -21968,8 +21968,8 @@
         </p:blipFill>
         <p:spPr>
           <a:xfrm>
-            <a:off x="5852160" y="1761077"/>
-            <a:ext cx="5806440" cy="2284284"/>
+            <a:off x="5852160" y="1847344"/>
+            <a:ext cx="5806440" cy="2111751"/>
           </a:xfrm>
           <a:prstGeom prst="rect">
             <a:avLst/>
@@ -23367,8 +23367,8 @@
         </p:blipFill>
         <p:spPr>
           <a:xfrm>
-            <a:off x="6858000" y="2680924"/>
-            <a:ext cx="4846320" cy="1313271"/>
+            <a:off x="7039760" y="1417320"/>
+            <a:ext cx="4482799" cy="3840480"/>
           </a:xfrm>
           <a:prstGeom prst="rect">
             <a:avLst/>
@@ -24474,8 +24474,8 @@
         </p:blipFill>
         <p:spPr>
           <a:xfrm>
-            <a:off x="7726489" y="1783080"/>
-            <a:ext cx="3840861" cy="2331720"/>
+            <a:off x="7613523" y="1783080"/>
+            <a:ext cx="4066794" cy="2331720"/>
           </a:xfrm>
           <a:prstGeom prst="rect">
             <a:avLst/>

--- a/submission/_drafts/속도는벡터_중간발표.pptx
+++ b/submission/_drafts/속도는벡터_중간발표.pptx
@@ -3173,7 +3173,7 @@
           <a:noFill/>
         </p:spPr>
         <p:txBody>
-          <a:bodyPr wrap="square" lIns="45720" rIns="45720" tIns="18288" bIns="18288" anchor="t">
+          <a:bodyPr wrap="square" lIns="45720" rIns="45720" tIns="18288" bIns="18288" anchor="ctr">
             <a:spAutoFit/>
           </a:bodyPr>
           <a:lstStyle/>
@@ -3214,7 +3214,7 @@
           <a:noFill/>
         </p:spPr>
         <p:txBody>
-          <a:bodyPr wrap="square" lIns="45720" rIns="45720" tIns="18288" bIns="18288" anchor="t">
+          <a:bodyPr wrap="square" lIns="45720" rIns="45720" tIns="18288" bIns="18288" anchor="ctr">
             <a:spAutoFit/>
           </a:bodyPr>
           <a:lstStyle/>
@@ -3255,7 +3255,7 @@
           <a:noFill/>
         </p:spPr>
         <p:txBody>
-          <a:bodyPr wrap="square" lIns="45720" rIns="45720" tIns="18288" bIns="18288" anchor="t">
+          <a:bodyPr wrap="square" lIns="45720" rIns="45720" tIns="18288" bIns="18288" anchor="ctr">
             <a:spAutoFit/>
           </a:bodyPr>
           <a:lstStyle/>
@@ -3340,7 +3340,7 @@
           <a:noFill/>
         </p:spPr>
         <p:txBody>
-          <a:bodyPr wrap="square" lIns="45720" rIns="45720" tIns="18288" bIns="18288" anchor="t">
+          <a:bodyPr wrap="square" lIns="45720" rIns="45720" tIns="18288" bIns="18288" anchor="ctr">
             <a:spAutoFit/>
           </a:bodyPr>
           <a:lstStyle/>
@@ -3425,7 +3425,7 @@
           <a:noFill/>
         </p:spPr>
         <p:txBody>
-          <a:bodyPr wrap="square" lIns="45720" rIns="45720" tIns="18288" bIns="18288" anchor="t">
+          <a:bodyPr wrap="square" lIns="45720" rIns="45720" tIns="18288" bIns="18288" anchor="ctr">
             <a:spAutoFit/>
           </a:bodyPr>
           <a:lstStyle/>
@@ -3466,7 +3466,7 @@
           <a:noFill/>
         </p:spPr>
         <p:txBody>
-          <a:bodyPr wrap="square" lIns="45720" rIns="45720" tIns="18288" bIns="18288" anchor="t">
+          <a:bodyPr wrap="square" lIns="45720" rIns="45720" tIns="18288" bIns="18288" anchor="ctr">
             <a:spAutoFit/>
           </a:bodyPr>
           <a:lstStyle/>
@@ -3507,7 +3507,7 @@
           <a:noFill/>
         </p:spPr>
         <p:txBody>
-          <a:bodyPr wrap="square" lIns="45720" rIns="45720" tIns="18288" bIns="18288" anchor="t">
+          <a:bodyPr wrap="square" lIns="45720" rIns="45720" tIns="18288" bIns="18288" anchor="ctr">
             <a:spAutoFit/>
           </a:bodyPr>
           <a:lstStyle/>
@@ -3548,7 +3548,7 @@
           <a:noFill/>
         </p:spPr>
         <p:txBody>
-          <a:bodyPr wrap="square" lIns="45720" rIns="45720" tIns="18288" bIns="18288" anchor="t">
+          <a:bodyPr wrap="square" lIns="45720" rIns="45720" tIns="18288" bIns="18288" anchor="ctr">
             <a:spAutoFit/>
           </a:bodyPr>
           <a:lstStyle/>
@@ -3659,7 +3659,7 @@
           <a:noFill/>
         </p:spPr>
         <p:txBody>
-          <a:bodyPr wrap="square" lIns="45720" rIns="45720" tIns="18288" bIns="18288" anchor="t">
+          <a:bodyPr wrap="square" lIns="45720" rIns="45720" tIns="18288" bIns="18288" anchor="ctr">
             <a:spAutoFit/>
           </a:bodyPr>
           <a:lstStyle/>
@@ -3700,7 +3700,7 @@
           <a:noFill/>
         </p:spPr>
         <p:txBody>
-          <a:bodyPr wrap="square" lIns="45720" rIns="45720" tIns="18288" bIns="18288" anchor="t">
+          <a:bodyPr wrap="square" lIns="45720" rIns="45720" tIns="18288" bIns="18288" anchor="ctr">
             <a:spAutoFit/>
           </a:bodyPr>
           <a:lstStyle/>
@@ -3785,7 +3785,7 @@
           <a:noFill/>
         </p:spPr>
         <p:txBody>
-          <a:bodyPr wrap="square" lIns="45720" rIns="45720" tIns="18288" bIns="18288" anchor="t">
+          <a:bodyPr wrap="square" lIns="45720" rIns="45720" tIns="18288" bIns="18288" anchor="ctr">
             <a:spAutoFit/>
           </a:bodyPr>
           <a:lstStyle/>
@@ -3850,7 +3850,7 @@
           <a:noFill/>
         </p:spPr>
         <p:txBody>
-          <a:bodyPr wrap="square" lIns="45720" rIns="45720" tIns="18288" bIns="18288" anchor="t">
+          <a:bodyPr wrap="square" lIns="45720" rIns="45720" tIns="18288" bIns="18288" anchor="ctr">
             <a:spAutoFit/>
           </a:bodyPr>
           <a:lstStyle/>
@@ -3983,7 +3983,7 @@
           <a:noFill/>
         </p:spPr>
         <p:txBody>
-          <a:bodyPr wrap="square" lIns="45720" rIns="45720" tIns="18288" bIns="18288" anchor="t">
+          <a:bodyPr wrap="square" lIns="45720" rIns="45720" tIns="18288" bIns="18288" anchor="ctr">
             <a:spAutoFit/>
           </a:bodyPr>
           <a:lstStyle/>
@@ -4024,7 +4024,7 @@
           <a:noFill/>
         </p:spPr>
         <p:txBody>
-          <a:bodyPr wrap="square" lIns="45720" rIns="45720" tIns="18288" bIns="18288" anchor="t">
+          <a:bodyPr wrap="square" lIns="45720" rIns="45720" tIns="18288" bIns="18288" anchor="ctr">
             <a:spAutoFit/>
           </a:bodyPr>
           <a:lstStyle/>
@@ -4065,7 +4065,7 @@
           <a:noFill/>
         </p:spPr>
         <p:txBody>
-          <a:bodyPr wrap="square" lIns="45720" rIns="45720" tIns="18288" bIns="18288" anchor="t">
+          <a:bodyPr wrap="square" lIns="45720" rIns="45720" tIns="18288" bIns="18288" anchor="ctr">
             <a:spAutoFit/>
           </a:bodyPr>
           <a:lstStyle/>
@@ -4198,7 +4198,7 @@
           <a:noFill/>
         </p:spPr>
         <p:txBody>
-          <a:bodyPr wrap="square" lIns="45720" rIns="45720" tIns="18288" bIns="18288" anchor="t">
+          <a:bodyPr wrap="square" lIns="45720" rIns="45720" tIns="18288" bIns="18288" anchor="ctr">
             <a:spAutoFit/>
           </a:bodyPr>
           <a:lstStyle/>
@@ -4239,7 +4239,7 @@
           <a:noFill/>
         </p:spPr>
         <p:txBody>
-          <a:bodyPr wrap="square" lIns="45720" rIns="45720" tIns="18288" bIns="18288" anchor="t">
+          <a:bodyPr wrap="square" lIns="45720" rIns="45720" tIns="18288" bIns="18288" anchor="ctr">
             <a:spAutoFit/>
           </a:bodyPr>
           <a:lstStyle/>
@@ -4280,7 +4280,7 @@
           <a:noFill/>
         </p:spPr>
         <p:txBody>
-          <a:bodyPr wrap="square" lIns="45720" rIns="45720" tIns="18288" bIns="18288" anchor="t">
+          <a:bodyPr wrap="square" lIns="45720" rIns="45720" tIns="18288" bIns="18288" anchor="ctr">
             <a:spAutoFit/>
           </a:bodyPr>
           <a:lstStyle/>
@@ -4413,7 +4413,7 @@
           <a:noFill/>
         </p:spPr>
         <p:txBody>
-          <a:bodyPr wrap="square" lIns="45720" rIns="45720" tIns="18288" bIns="18288" anchor="t">
+          <a:bodyPr wrap="square" lIns="45720" rIns="45720" tIns="18288" bIns="18288" anchor="ctr">
             <a:spAutoFit/>
           </a:bodyPr>
           <a:lstStyle/>
@@ -4454,7 +4454,7 @@
           <a:noFill/>
         </p:spPr>
         <p:txBody>
-          <a:bodyPr wrap="square" lIns="45720" rIns="45720" tIns="18288" bIns="18288" anchor="t">
+          <a:bodyPr wrap="square" lIns="45720" rIns="45720" tIns="18288" bIns="18288" anchor="ctr">
             <a:spAutoFit/>
           </a:bodyPr>
           <a:lstStyle/>
@@ -4495,7 +4495,7 @@
           <a:noFill/>
         </p:spPr>
         <p:txBody>
-          <a:bodyPr wrap="square" lIns="45720" rIns="45720" tIns="18288" bIns="18288" anchor="t">
+          <a:bodyPr wrap="square" lIns="45720" rIns="45720" tIns="18288" bIns="18288" anchor="ctr">
             <a:spAutoFit/>
           </a:bodyPr>
           <a:lstStyle/>
@@ -4536,7 +4536,7 @@
           <a:noFill/>
         </p:spPr>
         <p:txBody>
-          <a:bodyPr wrap="square" lIns="45720" rIns="45720" tIns="18288" bIns="18288" anchor="t">
+          <a:bodyPr wrap="square" lIns="45720" rIns="45720" tIns="18288" bIns="18288" anchor="ctr">
             <a:spAutoFit/>
           </a:bodyPr>
           <a:lstStyle/>
@@ -4577,7 +4577,7 @@
           <a:noFill/>
         </p:spPr>
         <p:txBody>
-          <a:bodyPr wrap="square" lIns="45720" rIns="45720" tIns="18288" bIns="18288" anchor="t">
+          <a:bodyPr wrap="square" lIns="45720" rIns="45720" tIns="18288" bIns="18288" anchor="ctr">
             <a:spAutoFit/>
           </a:bodyPr>
           <a:lstStyle/>
@@ -4730,7 +4730,7 @@
           <a:noFill/>
         </p:spPr>
         <p:txBody>
-          <a:bodyPr wrap="square" lIns="45720" rIns="45720" tIns="18288" bIns="18288" anchor="t">
+          <a:bodyPr wrap="square" lIns="45720" rIns="45720" tIns="18288" bIns="18288" anchor="ctr">
             <a:spAutoFit/>
           </a:bodyPr>
           <a:lstStyle/>
@@ -4771,7 +4771,7 @@
           <a:noFill/>
         </p:spPr>
         <p:txBody>
-          <a:bodyPr wrap="square" lIns="45720" rIns="45720" tIns="18288" bIns="18288" anchor="t">
+          <a:bodyPr wrap="square" lIns="45720" rIns="45720" tIns="18288" bIns="18288" anchor="ctr">
             <a:spAutoFit/>
           </a:bodyPr>
           <a:lstStyle/>
@@ -4856,7 +4856,7 @@
           <a:noFill/>
         </p:spPr>
         <p:txBody>
-          <a:bodyPr wrap="square" lIns="45720" rIns="45720" tIns="18288" bIns="18288" anchor="t">
+          <a:bodyPr wrap="square" lIns="45720" rIns="45720" tIns="18288" bIns="18288" anchor="ctr">
             <a:spAutoFit/>
           </a:bodyPr>
           <a:lstStyle/>
@@ -4897,7 +4897,7 @@
           <a:noFill/>
         </p:spPr>
         <p:txBody>
-          <a:bodyPr wrap="square" lIns="45720" rIns="45720" tIns="18288" bIns="18288" anchor="t">
+          <a:bodyPr wrap="square" lIns="45720" rIns="45720" tIns="18288" bIns="18288" anchor="ctr">
             <a:spAutoFit/>
           </a:bodyPr>
           <a:lstStyle/>
@@ -5669,7 +5669,7 @@
           <a:noFill/>
         </p:spPr>
         <p:txBody>
-          <a:bodyPr wrap="square" lIns="45720" rIns="45720" tIns="18288" bIns="18288" anchor="t">
+          <a:bodyPr wrap="square" lIns="45720" rIns="45720" tIns="18288" bIns="18288" anchor="ctr">
             <a:spAutoFit/>
           </a:bodyPr>
           <a:lstStyle/>
@@ -5734,7 +5734,7 @@
           <a:noFill/>
         </p:spPr>
         <p:txBody>
-          <a:bodyPr wrap="square" lIns="45720" rIns="45720" tIns="18288" bIns="18288" anchor="t">
+          <a:bodyPr wrap="square" lIns="45720" rIns="45720" tIns="18288" bIns="18288" anchor="ctr">
             <a:spAutoFit/>
           </a:bodyPr>
           <a:lstStyle/>
@@ -5819,7 +5819,7 @@
           <a:noFill/>
         </p:spPr>
         <p:txBody>
-          <a:bodyPr wrap="square" lIns="45720" rIns="45720" tIns="18288" bIns="18288" anchor="t">
+          <a:bodyPr wrap="square" lIns="45720" rIns="45720" tIns="18288" bIns="18288" anchor="ctr">
             <a:spAutoFit/>
           </a:bodyPr>
           <a:lstStyle/>
@@ -5904,7 +5904,7 @@
           <a:noFill/>
         </p:spPr>
         <p:txBody>
-          <a:bodyPr wrap="square" lIns="45720" rIns="45720" tIns="18288" bIns="18288" anchor="t">
+          <a:bodyPr wrap="square" lIns="45720" rIns="45720" tIns="18288" bIns="18288" anchor="ctr">
             <a:spAutoFit/>
           </a:bodyPr>
           <a:lstStyle/>
@@ -5989,7 +5989,7 @@
           <a:noFill/>
         </p:spPr>
         <p:txBody>
-          <a:bodyPr wrap="square" lIns="45720" rIns="45720" tIns="18288" bIns="18288" anchor="t">
+          <a:bodyPr wrap="square" lIns="45720" rIns="45720" tIns="18288" bIns="18288" anchor="ctr">
             <a:spAutoFit/>
           </a:bodyPr>
           <a:lstStyle/>
@@ -6187,7 +6187,7 @@
           <a:noFill/>
         </p:spPr>
         <p:txBody>
-          <a:bodyPr wrap="square" lIns="45720" rIns="45720" tIns="18288" bIns="18288" anchor="t">
+          <a:bodyPr wrap="square" lIns="45720" rIns="45720" tIns="18288" bIns="18288" anchor="ctr">
             <a:spAutoFit/>
           </a:bodyPr>
           <a:lstStyle/>
@@ -6228,7 +6228,7 @@
           <a:noFill/>
         </p:spPr>
         <p:txBody>
-          <a:bodyPr wrap="square" lIns="45720" rIns="45720" tIns="18288" bIns="18288" anchor="t">
+          <a:bodyPr wrap="square" lIns="45720" rIns="45720" tIns="18288" bIns="18288" anchor="ctr">
             <a:spAutoFit/>
           </a:bodyPr>
           <a:lstStyle/>
@@ -6313,7 +6313,7 @@
           <a:noFill/>
         </p:spPr>
         <p:txBody>
-          <a:bodyPr wrap="square" lIns="45720" rIns="45720" tIns="18288" bIns="18288" anchor="t">
+          <a:bodyPr wrap="square" lIns="45720" rIns="45720" tIns="18288" bIns="18288" anchor="ctr">
             <a:spAutoFit/>
           </a:bodyPr>
           <a:lstStyle/>
@@ -6489,7 +6489,7 @@
           <a:noFill/>
         </p:spPr>
         <p:txBody>
-          <a:bodyPr wrap="square" lIns="45720" rIns="45720" tIns="18288" bIns="18288" anchor="t">
+          <a:bodyPr wrap="square" lIns="45720" rIns="45720" tIns="18288" bIns="18288" anchor="ctr">
             <a:spAutoFit/>
           </a:bodyPr>
           <a:lstStyle/>
@@ -6530,7 +6530,7 @@
           <a:noFill/>
         </p:spPr>
         <p:txBody>
-          <a:bodyPr wrap="square" lIns="45720" rIns="45720" tIns="18288" bIns="18288" anchor="t">
+          <a:bodyPr wrap="square" lIns="45720" rIns="45720" tIns="18288" bIns="18288" anchor="ctr">
             <a:spAutoFit/>
           </a:bodyPr>
           <a:lstStyle/>
@@ -6659,7 +6659,7 @@
           <a:noFill/>
         </p:spPr>
         <p:txBody>
-          <a:bodyPr wrap="square" lIns="45720" rIns="45720" tIns="18288" bIns="18288" anchor="t">
+          <a:bodyPr wrap="square" lIns="45720" rIns="45720" tIns="18288" bIns="18288" anchor="ctr">
             <a:spAutoFit/>
           </a:bodyPr>
           <a:lstStyle/>
@@ -6744,7 +6744,7 @@
           <a:noFill/>
         </p:spPr>
         <p:txBody>
-          <a:bodyPr wrap="square" lIns="45720" rIns="45720" tIns="18288" bIns="18288" anchor="t">
+          <a:bodyPr wrap="square" lIns="45720" rIns="45720" tIns="18288" bIns="18288" anchor="ctr">
             <a:spAutoFit/>
           </a:bodyPr>
           <a:lstStyle/>
@@ -6829,7 +6829,7 @@
           <a:noFill/>
         </p:spPr>
         <p:txBody>
-          <a:bodyPr wrap="square" lIns="45720" rIns="45720" tIns="18288" bIns="18288" anchor="t">
+          <a:bodyPr wrap="square" lIns="45720" rIns="45720" tIns="18288" bIns="18288" anchor="ctr">
             <a:spAutoFit/>
           </a:bodyPr>
           <a:lstStyle/>
@@ -6914,7 +6914,7 @@
           <a:noFill/>
         </p:spPr>
         <p:txBody>
-          <a:bodyPr wrap="square" lIns="45720" rIns="45720" tIns="18288" bIns="18288" anchor="t">
+          <a:bodyPr wrap="square" lIns="45720" rIns="45720" tIns="18288" bIns="18288" anchor="ctr">
             <a:spAutoFit/>
           </a:bodyPr>
           <a:lstStyle/>
@@ -6955,7 +6955,7 @@
           <a:noFill/>
         </p:spPr>
         <p:txBody>
-          <a:bodyPr wrap="square" lIns="45720" rIns="45720" tIns="18288" bIns="18288" anchor="t">
+          <a:bodyPr wrap="square" lIns="45720" rIns="45720" tIns="18288" bIns="18288" anchor="ctr">
             <a:spAutoFit/>
           </a:bodyPr>
           <a:lstStyle/>
@@ -7044,7 +7044,7 @@
           <a:noFill/>
         </p:spPr>
         <p:txBody>
-          <a:bodyPr wrap="square" lIns="45720" rIns="45720" tIns="18288" bIns="18288" anchor="t">
+          <a:bodyPr wrap="square" lIns="45720" rIns="45720" tIns="18288" bIns="18288" anchor="ctr">
             <a:spAutoFit/>
           </a:bodyPr>
           <a:lstStyle/>
@@ -7085,7 +7085,7 @@
           <a:noFill/>
         </p:spPr>
         <p:txBody>
-          <a:bodyPr wrap="square" lIns="45720" rIns="45720" tIns="18288" bIns="18288" anchor="t">
+          <a:bodyPr wrap="square" lIns="45720" rIns="45720" tIns="18288" bIns="18288" anchor="ctr">
             <a:spAutoFit/>
           </a:bodyPr>
           <a:lstStyle/>
@@ -7214,7 +7214,7 @@
           <a:noFill/>
         </p:spPr>
         <p:txBody>
-          <a:bodyPr wrap="square" lIns="45720" rIns="45720" tIns="18288" bIns="18288" anchor="t">
+          <a:bodyPr wrap="square" lIns="45720" rIns="45720" tIns="18288" bIns="18288" anchor="ctr">
             <a:spAutoFit/>
           </a:bodyPr>
           <a:lstStyle/>
@@ -7299,7 +7299,7 @@
           <a:noFill/>
         </p:spPr>
         <p:txBody>
-          <a:bodyPr wrap="square" lIns="45720" rIns="45720" tIns="18288" bIns="18288" anchor="t">
+          <a:bodyPr wrap="square" lIns="45720" rIns="45720" tIns="18288" bIns="18288" anchor="ctr">
             <a:spAutoFit/>
           </a:bodyPr>
           <a:lstStyle/>
@@ -7340,7 +7340,7 @@
           <a:noFill/>
         </p:spPr>
         <p:txBody>
-          <a:bodyPr wrap="square" lIns="45720" rIns="45720" tIns="18288" bIns="18288" anchor="t">
+          <a:bodyPr wrap="square" lIns="45720" rIns="45720" tIns="18288" bIns="18288" anchor="ctr">
             <a:spAutoFit/>
           </a:bodyPr>
           <a:lstStyle/>
@@ -7429,7 +7429,7 @@
           <a:noFill/>
         </p:spPr>
         <p:txBody>
-          <a:bodyPr wrap="square" lIns="45720" rIns="45720" tIns="18288" bIns="18288" anchor="t">
+          <a:bodyPr wrap="square" lIns="45720" rIns="45720" tIns="18288" bIns="18288" anchor="ctr">
             <a:spAutoFit/>
           </a:bodyPr>
           <a:lstStyle/>
@@ -7470,7 +7470,7 @@
           <a:noFill/>
         </p:spPr>
         <p:txBody>
-          <a:bodyPr wrap="square" lIns="45720" rIns="45720" tIns="18288" bIns="18288" anchor="t">
+          <a:bodyPr wrap="square" lIns="45720" rIns="45720" tIns="18288" bIns="18288" anchor="ctr">
             <a:spAutoFit/>
           </a:bodyPr>
           <a:lstStyle/>
@@ -7599,7 +7599,7 @@
           <a:noFill/>
         </p:spPr>
         <p:txBody>
-          <a:bodyPr wrap="square" lIns="45720" rIns="45720" tIns="18288" bIns="18288" anchor="t">
+          <a:bodyPr wrap="square" lIns="45720" rIns="45720" tIns="18288" bIns="18288" anchor="ctr">
             <a:spAutoFit/>
           </a:bodyPr>
           <a:lstStyle/>
@@ -7640,7 +7640,7 @@
           <a:noFill/>
         </p:spPr>
         <p:txBody>
-          <a:bodyPr wrap="square" lIns="45720" rIns="45720" tIns="18288" bIns="18288" anchor="t">
+          <a:bodyPr wrap="square" lIns="45720" rIns="45720" tIns="18288" bIns="18288" anchor="ctr">
             <a:spAutoFit/>
           </a:bodyPr>
           <a:lstStyle/>
@@ -7681,7 +7681,7 @@
           <a:noFill/>
         </p:spPr>
         <p:txBody>
-          <a:bodyPr wrap="square" lIns="45720" rIns="45720" tIns="18288" bIns="18288" anchor="t">
+          <a:bodyPr wrap="square" lIns="45720" rIns="45720" tIns="18288" bIns="18288" anchor="ctr">
             <a:spAutoFit/>
           </a:bodyPr>
           <a:lstStyle/>
@@ -7722,7 +7722,7 @@
           <a:noFill/>
         </p:spPr>
         <p:txBody>
-          <a:bodyPr wrap="square" lIns="45720" rIns="45720" tIns="18288" bIns="18288" anchor="t">
+          <a:bodyPr wrap="square" lIns="45720" rIns="45720" tIns="18288" bIns="18288" anchor="ctr">
             <a:spAutoFit/>
           </a:bodyPr>
           <a:lstStyle/>
@@ -7920,7 +7920,7 @@
           <a:noFill/>
         </p:spPr>
         <p:txBody>
-          <a:bodyPr wrap="square" lIns="45720" rIns="45720" tIns="18288" bIns="18288" anchor="t">
+          <a:bodyPr wrap="square" lIns="45720" rIns="45720" tIns="18288" bIns="18288" anchor="ctr">
             <a:spAutoFit/>
           </a:bodyPr>
           <a:lstStyle/>
@@ -8005,7 +8005,7 @@
           <a:noFill/>
         </p:spPr>
         <p:txBody>
-          <a:bodyPr wrap="square" lIns="45720" rIns="45720" tIns="18288" bIns="18288" anchor="t">
+          <a:bodyPr wrap="square" lIns="45720" rIns="45720" tIns="18288" bIns="18288" anchor="ctr">
             <a:spAutoFit/>
           </a:bodyPr>
           <a:lstStyle/>
@@ -8138,7 +8138,7 @@
           <a:noFill/>
         </p:spPr>
         <p:txBody>
-          <a:bodyPr wrap="square" lIns="45720" rIns="45720" tIns="18288" bIns="18288" anchor="t">
+          <a:bodyPr wrap="square" lIns="45720" rIns="45720" tIns="18288" bIns="18288" anchor="ctr">
             <a:spAutoFit/>
           </a:bodyPr>
           <a:lstStyle/>
@@ -8179,7 +8179,7 @@
           <a:noFill/>
         </p:spPr>
         <p:txBody>
-          <a:bodyPr wrap="square" lIns="45720" rIns="45720" tIns="18288" bIns="18288" anchor="t">
+          <a:bodyPr wrap="square" lIns="45720" rIns="45720" tIns="18288" bIns="18288" anchor="ctr">
             <a:spAutoFit/>
           </a:bodyPr>
           <a:lstStyle/>
@@ -8220,7 +8220,7 @@
           <a:noFill/>
         </p:spPr>
         <p:txBody>
-          <a:bodyPr wrap="square" lIns="45720" rIns="45720" tIns="18288" bIns="18288" anchor="t">
+          <a:bodyPr wrap="square" lIns="45720" rIns="45720" tIns="18288" bIns="18288" anchor="ctr">
             <a:spAutoFit/>
           </a:bodyPr>
           <a:lstStyle/>
@@ -8261,7 +8261,7 @@
           <a:noFill/>
         </p:spPr>
         <p:txBody>
-          <a:bodyPr wrap="square" lIns="45720" rIns="45720" tIns="18288" bIns="18288" anchor="t">
+          <a:bodyPr wrap="square" lIns="45720" rIns="45720" tIns="18288" bIns="18288" anchor="ctr">
             <a:spAutoFit/>
           </a:bodyPr>
           <a:lstStyle/>
@@ -8302,7 +8302,7 @@
           <a:noFill/>
         </p:spPr>
         <p:txBody>
-          <a:bodyPr wrap="square" lIns="45720" rIns="45720" tIns="18288" bIns="18288" anchor="t">
+          <a:bodyPr wrap="square" lIns="45720" rIns="45720" tIns="18288" bIns="18288" anchor="ctr">
             <a:spAutoFit/>
           </a:bodyPr>
           <a:lstStyle/>
@@ -8343,7 +8343,7 @@
           <a:noFill/>
         </p:spPr>
         <p:txBody>
-          <a:bodyPr wrap="square" lIns="45720" rIns="45720" tIns="18288" bIns="18288" anchor="t">
+          <a:bodyPr wrap="square" lIns="45720" rIns="45720" tIns="18288" bIns="18288" anchor="ctr">
             <a:spAutoFit/>
           </a:bodyPr>
           <a:lstStyle/>
@@ -8384,7 +8384,7 @@
           <a:noFill/>
         </p:spPr>
         <p:txBody>
-          <a:bodyPr wrap="square" lIns="45720" rIns="45720" tIns="18288" bIns="18288" anchor="t">
+          <a:bodyPr wrap="square" lIns="45720" rIns="45720" tIns="18288" bIns="18288" anchor="ctr">
             <a:spAutoFit/>
           </a:bodyPr>
           <a:lstStyle/>
@@ -8517,7 +8517,7 @@
           <a:noFill/>
         </p:spPr>
         <p:txBody>
-          <a:bodyPr wrap="square" lIns="45720" rIns="45720" tIns="18288" bIns="18288" anchor="t">
+          <a:bodyPr wrap="square" lIns="45720" rIns="45720" tIns="18288" bIns="18288" anchor="ctr">
             <a:spAutoFit/>
           </a:bodyPr>
           <a:lstStyle/>
@@ -8558,7 +8558,7 @@
           <a:noFill/>
         </p:spPr>
         <p:txBody>
-          <a:bodyPr wrap="square" lIns="45720" rIns="45720" tIns="18288" bIns="18288" anchor="t">
+          <a:bodyPr wrap="square" lIns="45720" rIns="45720" tIns="18288" bIns="18288" anchor="ctr">
             <a:spAutoFit/>
           </a:bodyPr>
           <a:lstStyle/>
@@ -8599,7 +8599,7 @@
           <a:noFill/>
         </p:spPr>
         <p:txBody>
-          <a:bodyPr wrap="square" lIns="45720" rIns="45720" tIns="18288" bIns="18288" anchor="t">
+          <a:bodyPr wrap="square" lIns="45720" rIns="45720" tIns="18288" bIns="18288" anchor="ctr">
             <a:spAutoFit/>
           </a:bodyPr>
           <a:lstStyle/>
@@ -8640,7 +8640,7 @@
           <a:noFill/>
         </p:spPr>
         <p:txBody>
-          <a:bodyPr wrap="square" lIns="45720" rIns="45720" tIns="18288" bIns="18288" anchor="t">
+          <a:bodyPr wrap="square" lIns="45720" rIns="45720" tIns="18288" bIns="18288" anchor="ctr">
             <a:spAutoFit/>
           </a:bodyPr>
           <a:lstStyle/>
@@ -8681,7 +8681,7 @@
           <a:noFill/>
         </p:spPr>
         <p:txBody>
-          <a:bodyPr wrap="square" lIns="45720" rIns="45720" tIns="18288" bIns="18288" anchor="t">
+          <a:bodyPr wrap="square" lIns="45720" rIns="45720" tIns="18288" bIns="18288" anchor="ctr">
             <a:spAutoFit/>
           </a:bodyPr>
           <a:lstStyle/>
@@ -8722,7 +8722,7 @@
           <a:noFill/>
         </p:spPr>
         <p:txBody>
-          <a:bodyPr wrap="square" lIns="45720" rIns="45720" tIns="18288" bIns="18288" anchor="t">
+          <a:bodyPr wrap="square" lIns="45720" rIns="45720" tIns="18288" bIns="18288" anchor="ctr">
             <a:spAutoFit/>
           </a:bodyPr>
           <a:lstStyle/>
@@ -8855,7 +8855,7 @@
           <a:noFill/>
         </p:spPr>
         <p:txBody>
-          <a:bodyPr wrap="square" lIns="45720" rIns="45720" tIns="18288" bIns="18288" anchor="t">
+          <a:bodyPr wrap="square" lIns="45720" rIns="45720" tIns="18288" bIns="18288" anchor="ctr">
             <a:spAutoFit/>
           </a:bodyPr>
           <a:lstStyle/>
@@ -8896,7 +8896,7 @@
           <a:noFill/>
         </p:spPr>
         <p:txBody>
-          <a:bodyPr wrap="square" lIns="45720" rIns="45720" tIns="18288" bIns="18288" anchor="t">
+          <a:bodyPr wrap="square" lIns="45720" rIns="45720" tIns="18288" bIns="18288" anchor="ctr">
             <a:spAutoFit/>
           </a:bodyPr>
           <a:lstStyle/>
@@ -8937,7 +8937,7 @@
           <a:noFill/>
         </p:spPr>
         <p:txBody>
-          <a:bodyPr wrap="square" lIns="45720" rIns="45720" tIns="18288" bIns="18288" anchor="t">
+          <a:bodyPr wrap="square" lIns="45720" rIns="45720" tIns="18288" bIns="18288" anchor="ctr">
             <a:spAutoFit/>
           </a:bodyPr>
           <a:lstStyle/>
@@ -8978,7 +8978,7 @@
           <a:noFill/>
         </p:spPr>
         <p:txBody>
-          <a:bodyPr wrap="square" lIns="45720" rIns="45720" tIns="18288" bIns="18288" anchor="t">
+          <a:bodyPr wrap="square" lIns="45720" rIns="45720" tIns="18288" bIns="18288" anchor="ctr">
             <a:spAutoFit/>
           </a:bodyPr>
           <a:lstStyle/>
@@ -9019,7 +9019,7 @@
           <a:noFill/>
         </p:spPr>
         <p:txBody>
-          <a:bodyPr wrap="square" lIns="45720" rIns="45720" tIns="18288" bIns="18288" anchor="t">
+          <a:bodyPr wrap="square" lIns="45720" rIns="45720" tIns="18288" bIns="18288" anchor="ctr">
             <a:spAutoFit/>
           </a:bodyPr>
           <a:lstStyle/>
@@ -9060,7 +9060,7 @@
           <a:noFill/>
         </p:spPr>
         <p:txBody>
-          <a:bodyPr wrap="square" lIns="45720" rIns="45720" tIns="18288" bIns="18288" anchor="t">
+          <a:bodyPr wrap="square" lIns="45720" rIns="45720" tIns="18288" bIns="18288" anchor="ctr">
             <a:spAutoFit/>
           </a:bodyPr>
           <a:lstStyle/>
@@ -9193,7 +9193,7 @@
           <a:noFill/>
         </p:spPr>
         <p:txBody>
-          <a:bodyPr wrap="square" lIns="45720" rIns="45720" tIns="18288" bIns="18288" anchor="t">
+          <a:bodyPr wrap="square" lIns="45720" rIns="45720" tIns="18288" bIns="18288" anchor="ctr">
             <a:spAutoFit/>
           </a:bodyPr>
           <a:lstStyle/>
@@ -9234,7 +9234,7 @@
           <a:noFill/>
         </p:spPr>
         <p:txBody>
-          <a:bodyPr wrap="square" lIns="45720" rIns="45720" tIns="18288" bIns="18288" anchor="t">
+          <a:bodyPr wrap="square" lIns="45720" rIns="45720" tIns="18288" bIns="18288" anchor="ctr">
             <a:spAutoFit/>
           </a:bodyPr>
           <a:lstStyle/>
@@ -9275,7 +9275,7 @@
           <a:noFill/>
         </p:spPr>
         <p:txBody>
-          <a:bodyPr wrap="square" lIns="45720" rIns="45720" tIns="18288" bIns="18288" anchor="t">
+          <a:bodyPr wrap="square" lIns="45720" rIns="45720" tIns="18288" bIns="18288" anchor="ctr">
             <a:spAutoFit/>
           </a:bodyPr>
           <a:lstStyle/>
@@ -9316,7 +9316,7 @@
           <a:noFill/>
         </p:spPr>
         <p:txBody>
-          <a:bodyPr wrap="square" lIns="45720" rIns="45720" tIns="18288" bIns="18288" anchor="t">
+          <a:bodyPr wrap="square" lIns="45720" rIns="45720" tIns="18288" bIns="18288" anchor="ctr">
             <a:spAutoFit/>
           </a:bodyPr>
           <a:lstStyle/>
@@ -9357,7 +9357,7 @@
           <a:noFill/>
         </p:spPr>
         <p:txBody>
-          <a:bodyPr wrap="square" lIns="45720" rIns="45720" tIns="18288" bIns="18288" anchor="t">
+          <a:bodyPr wrap="square" lIns="45720" rIns="45720" tIns="18288" bIns="18288" anchor="ctr">
             <a:spAutoFit/>
           </a:bodyPr>
           <a:lstStyle/>
@@ -9398,7 +9398,7 @@
           <a:noFill/>
         </p:spPr>
         <p:txBody>
-          <a:bodyPr wrap="square" lIns="45720" rIns="45720" tIns="18288" bIns="18288" anchor="t">
+          <a:bodyPr wrap="square" lIns="45720" rIns="45720" tIns="18288" bIns="18288" anchor="ctr">
             <a:spAutoFit/>
           </a:bodyPr>
           <a:lstStyle/>
@@ -9439,7 +9439,7 @@
           <a:noFill/>
         </p:spPr>
         <p:txBody>
-          <a:bodyPr wrap="square" lIns="45720" rIns="45720" tIns="18288" bIns="18288" anchor="t">
+          <a:bodyPr wrap="square" lIns="45720" rIns="45720" tIns="18288" bIns="18288" anchor="ctr">
             <a:spAutoFit/>
           </a:bodyPr>
           <a:lstStyle/>
@@ -9637,7 +9637,7 @@
           <a:noFill/>
         </p:spPr>
         <p:txBody>
-          <a:bodyPr wrap="square" lIns="45720" rIns="45720" tIns="18288" bIns="18288" anchor="t">
+          <a:bodyPr wrap="square" lIns="45720" rIns="45720" tIns="18288" bIns="18288" anchor="ctr">
             <a:spAutoFit/>
           </a:bodyPr>
           <a:lstStyle/>
@@ -9722,7 +9722,7 @@
           <a:noFill/>
         </p:spPr>
         <p:txBody>
-          <a:bodyPr wrap="square" lIns="45720" rIns="45720" tIns="18288" bIns="18288" anchor="t">
+          <a:bodyPr wrap="square" lIns="45720" rIns="45720" tIns="18288" bIns="18288" anchor="ctr">
             <a:spAutoFit/>
           </a:bodyPr>
           <a:lstStyle/>
@@ -9853,7 +9853,7 @@
           <a:noFill/>
         </p:spPr>
         <p:txBody>
-          <a:bodyPr wrap="square" lIns="45720" rIns="45720" tIns="18288" bIns="18288" anchor="t">
+          <a:bodyPr wrap="square" lIns="45720" rIns="45720" tIns="18288" bIns="18288" anchor="ctr">
             <a:spAutoFit/>
           </a:bodyPr>
           <a:lstStyle/>
@@ -9894,7 +9894,7 @@
           <a:noFill/>
         </p:spPr>
         <p:txBody>
-          <a:bodyPr wrap="square" lIns="45720" rIns="45720" tIns="18288" bIns="18288" anchor="t">
+          <a:bodyPr wrap="square" lIns="45720" rIns="45720" tIns="18288" bIns="18288" anchor="ctr">
             <a:spAutoFit/>
           </a:bodyPr>
           <a:lstStyle/>
@@ -9935,7 +9935,7 @@
           <a:noFill/>
         </p:spPr>
         <p:txBody>
-          <a:bodyPr wrap="square" lIns="45720" rIns="45720" tIns="18288" bIns="18288" anchor="t">
+          <a:bodyPr wrap="square" lIns="45720" rIns="45720" tIns="18288" bIns="18288" anchor="ctr">
             <a:spAutoFit/>
           </a:bodyPr>
           <a:lstStyle/>
@@ -9976,7 +9976,7 @@
           <a:noFill/>
         </p:spPr>
         <p:txBody>
-          <a:bodyPr wrap="square" lIns="45720" rIns="45720" tIns="18288" bIns="18288" anchor="t">
+          <a:bodyPr wrap="square" lIns="45720" rIns="45720" tIns="18288" bIns="18288" anchor="ctr">
             <a:spAutoFit/>
           </a:bodyPr>
           <a:lstStyle/>
@@ -10107,7 +10107,7 @@
           <a:noFill/>
         </p:spPr>
         <p:txBody>
-          <a:bodyPr wrap="square" lIns="45720" rIns="45720" tIns="18288" bIns="18288" anchor="t">
+          <a:bodyPr wrap="square" lIns="45720" rIns="45720" tIns="18288" bIns="18288" anchor="ctr">
             <a:spAutoFit/>
           </a:bodyPr>
           <a:lstStyle/>
@@ -10148,7 +10148,7 @@
           <a:noFill/>
         </p:spPr>
         <p:txBody>
-          <a:bodyPr wrap="square" lIns="45720" rIns="45720" tIns="18288" bIns="18288" anchor="t">
+          <a:bodyPr wrap="square" lIns="45720" rIns="45720" tIns="18288" bIns="18288" anchor="ctr">
             <a:spAutoFit/>
           </a:bodyPr>
           <a:lstStyle/>
@@ -10189,7 +10189,7 @@
           <a:noFill/>
         </p:spPr>
         <p:txBody>
-          <a:bodyPr wrap="square" lIns="45720" rIns="45720" tIns="18288" bIns="18288" anchor="t">
+          <a:bodyPr wrap="square" lIns="45720" rIns="45720" tIns="18288" bIns="18288" anchor="ctr">
             <a:spAutoFit/>
           </a:bodyPr>
           <a:lstStyle/>
@@ -10230,7 +10230,7 @@
           <a:noFill/>
         </p:spPr>
         <p:txBody>
-          <a:bodyPr wrap="square" lIns="45720" rIns="45720" tIns="18288" bIns="18288" anchor="t">
+          <a:bodyPr wrap="square" lIns="45720" rIns="45720" tIns="18288" bIns="18288" anchor="ctr">
             <a:spAutoFit/>
           </a:bodyPr>
           <a:lstStyle/>
@@ -10361,7 +10361,7 @@
           <a:noFill/>
         </p:spPr>
         <p:txBody>
-          <a:bodyPr wrap="square" lIns="45720" rIns="45720" tIns="18288" bIns="18288" anchor="t">
+          <a:bodyPr wrap="square" lIns="45720" rIns="45720" tIns="18288" bIns="18288" anchor="ctr">
             <a:spAutoFit/>
           </a:bodyPr>
           <a:lstStyle/>
@@ -10402,7 +10402,7 @@
           <a:noFill/>
         </p:spPr>
         <p:txBody>
-          <a:bodyPr wrap="square" lIns="45720" rIns="45720" tIns="18288" bIns="18288" anchor="t">
+          <a:bodyPr wrap="square" lIns="45720" rIns="45720" tIns="18288" bIns="18288" anchor="ctr">
             <a:spAutoFit/>
           </a:bodyPr>
           <a:lstStyle/>
@@ -10443,7 +10443,7 @@
           <a:noFill/>
         </p:spPr>
         <p:txBody>
-          <a:bodyPr wrap="square" lIns="45720" rIns="45720" tIns="18288" bIns="18288" anchor="t">
+          <a:bodyPr wrap="square" lIns="45720" rIns="45720" tIns="18288" bIns="18288" anchor="ctr">
             <a:spAutoFit/>
           </a:bodyPr>
           <a:lstStyle/>
@@ -10484,7 +10484,7 @@
           <a:noFill/>
         </p:spPr>
         <p:txBody>
-          <a:bodyPr wrap="square" lIns="45720" rIns="45720" tIns="18288" bIns="18288" anchor="t">
+          <a:bodyPr wrap="square" lIns="45720" rIns="45720" tIns="18288" bIns="18288" anchor="ctr">
             <a:spAutoFit/>
           </a:bodyPr>
           <a:lstStyle/>
@@ -10615,7 +10615,7 @@
           <a:noFill/>
         </p:spPr>
         <p:txBody>
-          <a:bodyPr wrap="square" lIns="45720" rIns="45720" tIns="18288" bIns="18288" anchor="t">
+          <a:bodyPr wrap="square" lIns="45720" rIns="45720" tIns="18288" bIns="18288" anchor="ctr">
             <a:spAutoFit/>
           </a:bodyPr>
           <a:lstStyle/>
@@ -10656,7 +10656,7 @@
           <a:noFill/>
         </p:spPr>
         <p:txBody>
-          <a:bodyPr wrap="square" lIns="45720" rIns="45720" tIns="18288" bIns="18288" anchor="t">
+          <a:bodyPr wrap="square" lIns="45720" rIns="45720" tIns="18288" bIns="18288" anchor="ctr">
             <a:spAutoFit/>
           </a:bodyPr>
           <a:lstStyle/>
@@ -10697,7 +10697,7 @@
           <a:noFill/>
         </p:spPr>
         <p:txBody>
-          <a:bodyPr wrap="square" lIns="45720" rIns="45720" tIns="18288" bIns="18288" anchor="t">
+          <a:bodyPr wrap="square" lIns="45720" rIns="45720" tIns="18288" bIns="18288" anchor="ctr">
             <a:spAutoFit/>
           </a:bodyPr>
           <a:lstStyle/>
@@ -10738,7 +10738,7 @@
           <a:noFill/>
         </p:spPr>
         <p:txBody>
-          <a:bodyPr wrap="square" lIns="45720" rIns="45720" tIns="18288" bIns="18288" anchor="t">
+          <a:bodyPr wrap="square" lIns="45720" rIns="45720" tIns="18288" bIns="18288" anchor="ctr">
             <a:spAutoFit/>
           </a:bodyPr>
           <a:lstStyle/>
@@ -10869,7 +10869,7 @@
           <a:noFill/>
         </p:spPr>
         <p:txBody>
-          <a:bodyPr wrap="square" lIns="45720" rIns="45720" tIns="18288" bIns="18288" anchor="t">
+          <a:bodyPr wrap="square" lIns="45720" rIns="45720" tIns="18288" bIns="18288" anchor="ctr">
             <a:spAutoFit/>
           </a:bodyPr>
           <a:lstStyle/>
@@ -10910,7 +10910,7 @@
           <a:noFill/>
         </p:spPr>
         <p:txBody>
-          <a:bodyPr wrap="square" lIns="45720" rIns="45720" tIns="18288" bIns="18288" anchor="t">
+          <a:bodyPr wrap="square" lIns="45720" rIns="45720" tIns="18288" bIns="18288" anchor="ctr">
             <a:spAutoFit/>
           </a:bodyPr>
           <a:lstStyle/>
@@ -10951,7 +10951,7 @@
           <a:noFill/>
         </p:spPr>
         <p:txBody>
-          <a:bodyPr wrap="square" lIns="45720" rIns="45720" tIns="18288" bIns="18288" anchor="t">
+          <a:bodyPr wrap="square" lIns="45720" rIns="45720" tIns="18288" bIns="18288" anchor="ctr">
             <a:spAutoFit/>
           </a:bodyPr>
           <a:lstStyle/>
@@ -10992,7 +10992,7 @@
           <a:noFill/>
         </p:spPr>
         <p:txBody>
-          <a:bodyPr wrap="square" lIns="45720" rIns="45720" tIns="18288" bIns="18288" anchor="t">
+          <a:bodyPr wrap="square" lIns="45720" rIns="45720" tIns="18288" bIns="18288" anchor="ctr">
             <a:spAutoFit/>
           </a:bodyPr>
           <a:lstStyle/>
@@ -11123,7 +11123,7 @@
           <a:noFill/>
         </p:spPr>
         <p:txBody>
-          <a:bodyPr wrap="square" lIns="45720" rIns="45720" tIns="18288" bIns="18288" anchor="t">
+          <a:bodyPr wrap="square" lIns="45720" rIns="45720" tIns="18288" bIns="18288" anchor="ctr">
             <a:spAutoFit/>
           </a:bodyPr>
           <a:lstStyle/>
@@ -11164,7 +11164,7 @@
           <a:noFill/>
         </p:spPr>
         <p:txBody>
-          <a:bodyPr wrap="square" lIns="45720" rIns="45720" tIns="18288" bIns="18288" anchor="t">
+          <a:bodyPr wrap="square" lIns="45720" rIns="45720" tIns="18288" bIns="18288" anchor="ctr">
             <a:spAutoFit/>
           </a:bodyPr>
           <a:lstStyle/>
@@ -11205,7 +11205,7 @@
           <a:noFill/>
         </p:spPr>
         <p:txBody>
-          <a:bodyPr wrap="square" lIns="45720" rIns="45720" tIns="18288" bIns="18288" anchor="t">
+          <a:bodyPr wrap="square" lIns="45720" rIns="45720" tIns="18288" bIns="18288" anchor="ctr">
             <a:spAutoFit/>
           </a:bodyPr>
           <a:lstStyle/>
@@ -11246,7 +11246,7 @@
           <a:noFill/>
         </p:spPr>
         <p:txBody>
-          <a:bodyPr wrap="square" lIns="45720" rIns="45720" tIns="18288" bIns="18288" anchor="t">
+          <a:bodyPr wrap="square" lIns="45720" rIns="45720" tIns="18288" bIns="18288" anchor="ctr">
             <a:spAutoFit/>
           </a:bodyPr>
           <a:lstStyle/>
@@ -11287,7 +11287,7 @@
           <a:noFill/>
         </p:spPr>
         <p:txBody>
-          <a:bodyPr wrap="square" lIns="45720" rIns="45720" tIns="18288" bIns="18288" anchor="t">
+          <a:bodyPr wrap="square" lIns="45720" rIns="45720" tIns="18288" bIns="18288" anchor="ctr">
             <a:spAutoFit/>
           </a:bodyPr>
           <a:lstStyle/>
@@ -11328,7 +11328,7 @@
           <a:noFill/>
         </p:spPr>
         <p:txBody>
-          <a:bodyPr wrap="square" lIns="45720" rIns="45720" tIns="18288" bIns="18288" anchor="t">
+          <a:bodyPr wrap="square" lIns="45720" rIns="45720" tIns="18288" bIns="18288" anchor="ctr">
             <a:spAutoFit/>
           </a:bodyPr>
           <a:lstStyle/>
@@ -11439,7 +11439,7 @@
           <a:noFill/>
         </p:spPr>
         <p:txBody>
-          <a:bodyPr wrap="square" lIns="45720" rIns="45720" tIns="18288" bIns="18288" anchor="t">
+          <a:bodyPr wrap="square" lIns="45720" rIns="45720" tIns="18288" bIns="18288" anchor="ctr">
             <a:spAutoFit/>
           </a:bodyPr>
           <a:lstStyle/>
@@ -11524,7 +11524,7 @@
           <a:noFill/>
         </p:spPr>
         <p:txBody>
-          <a:bodyPr wrap="square" lIns="45720" rIns="45720" tIns="18288" bIns="18288" anchor="t">
+          <a:bodyPr wrap="square" lIns="45720" rIns="45720" tIns="18288" bIns="18288" anchor="ctr">
             <a:spAutoFit/>
           </a:bodyPr>
           <a:lstStyle/>
@@ -11701,7 +11701,7 @@
           <a:noFill/>
         </p:spPr>
         <p:txBody>
-          <a:bodyPr wrap="square" lIns="45720" rIns="45720" tIns="18288" bIns="18288" anchor="t">
+          <a:bodyPr wrap="square" lIns="45720" rIns="45720" tIns="18288" bIns="18288" anchor="ctr">
             <a:spAutoFit/>
           </a:bodyPr>
           <a:lstStyle/>
@@ -11742,7 +11742,7 @@
           <a:noFill/>
         </p:spPr>
         <p:txBody>
-          <a:bodyPr wrap="square" lIns="45720" rIns="45720" tIns="18288" bIns="18288" anchor="t">
+          <a:bodyPr wrap="square" lIns="45720" rIns="45720" tIns="18288" bIns="18288" anchor="ctr">
             <a:spAutoFit/>
           </a:bodyPr>
           <a:lstStyle/>
@@ -11783,7 +11783,7 @@
           <a:noFill/>
         </p:spPr>
         <p:txBody>
-          <a:bodyPr wrap="square" lIns="45720" rIns="45720" tIns="18288" bIns="18288" anchor="t">
+          <a:bodyPr wrap="square" lIns="45720" rIns="45720" tIns="18288" bIns="18288" anchor="ctr">
             <a:spAutoFit/>
           </a:bodyPr>
           <a:lstStyle/>
@@ -11868,7 +11868,7 @@
           <a:noFill/>
         </p:spPr>
         <p:txBody>
-          <a:bodyPr wrap="square" lIns="45720" rIns="45720" tIns="18288" bIns="18288" anchor="t">
+          <a:bodyPr wrap="square" lIns="45720" rIns="45720" tIns="18288" bIns="18288" anchor="ctr">
             <a:spAutoFit/>
           </a:bodyPr>
           <a:lstStyle/>
@@ -11909,7 +11909,7 @@
           <a:noFill/>
         </p:spPr>
         <p:txBody>
-          <a:bodyPr wrap="square" lIns="45720" rIns="45720" tIns="18288" bIns="18288" anchor="t">
+          <a:bodyPr wrap="square" lIns="45720" rIns="45720" tIns="18288" bIns="18288" anchor="ctr">
             <a:spAutoFit/>
           </a:bodyPr>
           <a:lstStyle/>
@@ -11998,7 +11998,7 @@
           <a:noFill/>
         </p:spPr>
         <p:txBody>
-          <a:bodyPr wrap="square" lIns="45720" rIns="45720" tIns="18288" bIns="18288" anchor="t">
+          <a:bodyPr wrap="square" lIns="45720" rIns="45720" tIns="18288" bIns="18288" anchor="ctr">
             <a:spAutoFit/>
           </a:bodyPr>
           <a:lstStyle/>
@@ -12175,7 +12175,7 @@
           <a:noFill/>
         </p:spPr>
         <p:txBody>
-          <a:bodyPr wrap="square" lIns="45720" rIns="45720" tIns="18288" bIns="18288" anchor="t">
+          <a:bodyPr wrap="square" lIns="45720" rIns="45720" tIns="18288" bIns="18288" anchor="ctr">
             <a:spAutoFit/>
           </a:bodyPr>
           <a:lstStyle/>
@@ -12216,7 +12216,7 @@
           <a:noFill/>
         </p:spPr>
         <p:txBody>
-          <a:bodyPr wrap="square" lIns="45720" rIns="45720" tIns="18288" bIns="18288" anchor="t">
+          <a:bodyPr wrap="square" lIns="45720" rIns="45720" tIns="18288" bIns="18288" anchor="ctr">
             <a:spAutoFit/>
           </a:bodyPr>
           <a:lstStyle/>
@@ -12257,7 +12257,7 @@
           <a:noFill/>
         </p:spPr>
         <p:txBody>
-          <a:bodyPr wrap="square" lIns="45720" rIns="45720" tIns="18288" bIns="18288" anchor="t">
+          <a:bodyPr wrap="square" lIns="45720" rIns="45720" tIns="18288" bIns="18288" anchor="ctr">
             <a:spAutoFit/>
           </a:bodyPr>
           <a:lstStyle/>
@@ -12342,7 +12342,7 @@
           <a:noFill/>
         </p:spPr>
         <p:txBody>
-          <a:bodyPr wrap="square" lIns="45720" rIns="45720" tIns="18288" bIns="18288" anchor="t">
+          <a:bodyPr wrap="square" lIns="45720" rIns="45720" tIns="18288" bIns="18288" anchor="ctr">
             <a:spAutoFit/>
           </a:bodyPr>
           <a:lstStyle/>
@@ -12383,7 +12383,7 @@
           <a:noFill/>
         </p:spPr>
         <p:txBody>
-          <a:bodyPr wrap="square" lIns="45720" rIns="45720" tIns="18288" bIns="18288" anchor="t">
+          <a:bodyPr wrap="square" lIns="45720" rIns="45720" tIns="18288" bIns="18288" anchor="ctr">
             <a:spAutoFit/>
           </a:bodyPr>
           <a:lstStyle/>
@@ -12472,7 +12472,7 @@
           <a:noFill/>
         </p:spPr>
         <p:txBody>
-          <a:bodyPr wrap="square" lIns="45720" rIns="45720" tIns="18288" bIns="18288" anchor="t">
+          <a:bodyPr wrap="square" lIns="45720" rIns="45720" tIns="18288" bIns="18288" anchor="ctr">
             <a:spAutoFit/>
           </a:bodyPr>
           <a:lstStyle/>
@@ -12649,7 +12649,7 @@
           <a:noFill/>
         </p:spPr>
         <p:txBody>
-          <a:bodyPr wrap="square" lIns="45720" rIns="45720" tIns="18288" bIns="18288" anchor="t">
+          <a:bodyPr wrap="square" lIns="45720" rIns="45720" tIns="18288" bIns="18288" anchor="ctr">
             <a:spAutoFit/>
           </a:bodyPr>
           <a:lstStyle/>
@@ -12690,7 +12690,7 @@
           <a:noFill/>
         </p:spPr>
         <p:txBody>
-          <a:bodyPr wrap="square" lIns="45720" rIns="45720" tIns="18288" bIns="18288" anchor="t">
+          <a:bodyPr wrap="square" lIns="45720" rIns="45720" tIns="18288" bIns="18288" anchor="ctr">
             <a:spAutoFit/>
           </a:bodyPr>
           <a:lstStyle/>
@@ -12731,7 +12731,7 @@
           <a:noFill/>
         </p:spPr>
         <p:txBody>
-          <a:bodyPr wrap="square" lIns="45720" rIns="45720" tIns="18288" bIns="18288" anchor="t">
+          <a:bodyPr wrap="square" lIns="45720" rIns="45720" tIns="18288" bIns="18288" anchor="ctr">
             <a:spAutoFit/>
           </a:bodyPr>
           <a:lstStyle/>
@@ -12816,7 +12816,7 @@
           <a:noFill/>
         </p:spPr>
         <p:txBody>
-          <a:bodyPr wrap="square" lIns="45720" rIns="45720" tIns="18288" bIns="18288" anchor="t">
+          <a:bodyPr wrap="square" lIns="45720" rIns="45720" tIns="18288" bIns="18288" anchor="ctr">
             <a:spAutoFit/>
           </a:bodyPr>
           <a:lstStyle/>
@@ -12857,7 +12857,7 @@
           <a:noFill/>
         </p:spPr>
         <p:txBody>
-          <a:bodyPr wrap="square" lIns="45720" rIns="45720" tIns="18288" bIns="18288" anchor="t">
+          <a:bodyPr wrap="square" lIns="45720" rIns="45720" tIns="18288" bIns="18288" anchor="ctr">
             <a:spAutoFit/>
           </a:bodyPr>
           <a:lstStyle/>
@@ -12946,7 +12946,7 @@
           <a:noFill/>
         </p:spPr>
         <p:txBody>
-          <a:bodyPr wrap="square" lIns="45720" rIns="45720" tIns="18288" bIns="18288" anchor="t">
+          <a:bodyPr wrap="square" lIns="45720" rIns="45720" tIns="18288" bIns="18288" anchor="ctr">
             <a:spAutoFit/>
           </a:bodyPr>
           <a:lstStyle/>
@@ -13123,7 +13123,7 @@
           <a:noFill/>
         </p:spPr>
         <p:txBody>
-          <a:bodyPr wrap="square" lIns="45720" rIns="45720" tIns="18288" bIns="18288" anchor="t">
+          <a:bodyPr wrap="square" lIns="45720" rIns="45720" tIns="18288" bIns="18288" anchor="ctr">
             <a:spAutoFit/>
           </a:bodyPr>
           <a:lstStyle/>
@@ -13164,7 +13164,7 @@
           <a:noFill/>
         </p:spPr>
         <p:txBody>
-          <a:bodyPr wrap="square" lIns="45720" rIns="45720" tIns="18288" bIns="18288" anchor="t">
+          <a:bodyPr wrap="square" lIns="45720" rIns="45720" tIns="18288" bIns="18288" anchor="ctr">
             <a:spAutoFit/>
           </a:bodyPr>
           <a:lstStyle/>
@@ -13205,7 +13205,7 @@
           <a:noFill/>
         </p:spPr>
         <p:txBody>
-          <a:bodyPr wrap="square" lIns="45720" rIns="45720" tIns="18288" bIns="18288" anchor="t">
+          <a:bodyPr wrap="square" lIns="45720" rIns="45720" tIns="18288" bIns="18288" anchor="ctr">
             <a:spAutoFit/>
           </a:bodyPr>
           <a:lstStyle/>
@@ -13290,7 +13290,7 @@
           <a:noFill/>
         </p:spPr>
         <p:txBody>
-          <a:bodyPr wrap="square" lIns="45720" rIns="45720" tIns="18288" bIns="18288" anchor="t">
+          <a:bodyPr wrap="square" lIns="45720" rIns="45720" tIns="18288" bIns="18288" anchor="ctr">
             <a:spAutoFit/>
           </a:bodyPr>
           <a:lstStyle/>
@@ -13331,7 +13331,7 @@
           <a:noFill/>
         </p:spPr>
         <p:txBody>
-          <a:bodyPr wrap="square" lIns="45720" rIns="45720" tIns="18288" bIns="18288" anchor="t">
+          <a:bodyPr wrap="square" lIns="45720" rIns="45720" tIns="18288" bIns="18288" anchor="ctr">
             <a:spAutoFit/>
           </a:bodyPr>
           <a:lstStyle/>
@@ -13420,7 +13420,7 @@
           <a:noFill/>
         </p:spPr>
         <p:txBody>
-          <a:bodyPr wrap="square" lIns="45720" rIns="45720" tIns="18288" bIns="18288" anchor="t">
+          <a:bodyPr wrap="square" lIns="45720" rIns="45720" tIns="18288" bIns="18288" anchor="ctr">
             <a:spAutoFit/>
           </a:bodyPr>
           <a:lstStyle/>
@@ -13618,7 +13618,7 @@
           <a:noFill/>
         </p:spPr>
         <p:txBody>
-          <a:bodyPr wrap="square" lIns="45720" rIns="45720" tIns="18288" bIns="18288" anchor="t">
+          <a:bodyPr wrap="square" lIns="45720" rIns="45720" tIns="18288" bIns="18288" anchor="ctr">
             <a:spAutoFit/>
           </a:bodyPr>
           <a:lstStyle/>
@@ -13659,7 +13659,7 @@
           <a:noFill/>
         </p:spPr>
         <p:txBody>
-          <a:bodyPr wrap="square" lIns="45720" rIns="45720" tIns="18288" bIns="18288" anchor="t">
+          <a:bodyPr wrap="square" lIns="45720" rIns="45720" tIns="18288" bIns="18288" anchor="ctr">
             <a:spAutoFit/>
           </a:bodyPr>
           <a:lstStyle/>
@@ -13744,7 +13744,7 @@
           <a:noFill/>
         </p:spPr>
         <p:txBody>
-          <a:bodyPr wrap="square" lIns="45720" rIns="45720" tIns="18288" bIns="18288" anchor="t">
+          <a:bodyPr wrap="square" lIns="45720" rIns="45720" tIns="18288" bIns="18288" anchor="ctr">
             <a:spAutoFit/>
           </a:bodyPr>
           <a:lstStyle/>
@@ -13877,7 +13877,7 @@
           <a:noFill/>
         </p:spPr>
         <p:txBody>
-          <a:bodyPr wrap="square" lIns="45720" rIns="45720" tIns="18288" bIns="18288" anchor="t">
+          <a:bodyPr wrap="square" lIns="45720" rIns="45720" tIns="18288" bIns="18288" anchor="ctr">
             <a:spAutoFit/>
           </a:bodyPr>
           <a:lstStyle/>
@@ -13918,7 +13918,7 @@
           <a:noFill/>
         </p:spPr>
         <p:txBody>
-          <a:bodyPr wrap="square" lIns="45720" rIns="45720" tIns="18288" bIns="18288" anchor="t">
+          <a:bodyPr wrap="square" lIns="45720" rIns="45720" tIns="18288" bIns="18288" anchor="ctr">
             <a:spAutoFit/>
           </a:bodyPr>
           <a:lstStyle/>
@@ -14007,7 +14007,7 @@
           <a:noFill/>
         </p:spPr>
         <p:txBody>
-          <a:bodyPr wrap="square" lIns="45720" rIns="45720" tIns="18288" bIns="18288" anchor="t">
+          <a:bodyPr wrap="square" lIns="45720" rIns="45720" tIns="18288" bIns="18288" anchor="ctr">
             <a:spAutoFit/>
           </a:bodyPr>
           <a:lstStyle/>
@@ -14048,7 +14048,7 @@
           <a:noFill/>
         </p:spPr>
         <p:txBody>
-          <a:bodyPr wrap="square" lIns="45720" rIns="45720" tIns="18288" bIns="18288" anchor="t">
+          <a:bodyPr wrap="square" lIns="45720" rIns="45720" tIns="18288" bIns="18288" anchor="ctr">
             <a:spAutoFit/>
           </a:bodyPr>
           <a:lstStyle/>
@@ -14089,7 +14089,7 @@
           <a:noFill/>
         </p:spPr>
         <p:txBody>
-          <a:bodyPr wrap="square" lIns="45720" rIns="45720" tIns="18288" bIns="18288" anchor="t">
+          <a:bodyPr wrap="square" lIns="45720" rIns="45720" tIns="18288" bIns="18288" anchor="ctr">
             <a:spAutoFit/>
           </a:bodyPr>
           <a:lstStyle/>
@@ -14222,7 +14222,7 @@
           <a:noFill/>
         </p:spPr>
         <p:txBody>
-          <a:bodyPr wrap="square" lIns="45720" rIns="45720" tIns="18288" bIns="18288" anchor="t">
+          <a:bodyPr wrap="square" lIns="45720" rIns="45720" tIns="18288" bIns="18288" anchor="ctr">
             <a:spAutoFit/>
           </a:bodyPr>
           <a:lstStyle/>
@@ -14263,7 +14263,7 @@
           <a:noFill/>
         </p:spPr>
         <p:txBody>
-          <a:bodyPr wrap="square" lIns="45720" rIns="45720" tIns="18288" bIns="18288" anchor="t">
+          <a:bodyPr wrap="square" lIns="45720" rIns="45720" tIns="18288" bIns="18288" anchor="ctr">
             <a:spAutoFit/>
           </a:bodyPr>
           <a:lstStyle/>
@@ -14352,7 +14352,7 @@
           <a:noFill/>
         </p:spPr>
         <p:txBody>
-          <a:bodyPr wrap="square" lIns="45720" rIns="45720" tIns="18288" bIns="18288" anchor="t">
+          <a:bodyPr wrap="square" lIns="45720" rIns="45720" tIns="18288" bIns="18288" anchor="ctr">
             <a:spAutoFit/>
           </a:bodyPr>
           <a:lstStyle/>
@@ -14393,7 +14393,7 @@
           <a:noFill/>
         </p:spPr>
         <p:txBody>
-          <a:bodyPr wrap="square" lIns="45720" rIns="45720" tIns="18288" bIns="18288" anchor="t">
+          <a:bodyPr wrap="square" lIns="45720" rIns="45720" tIns="18288" bIns="18288" anchor="ctr">
             <a:spAutoFit/>
           </a:bodyPr>
           <a:lstStyle/>
@@ -14434,7 +14434,7 @@
           <a:noFill/>
         </p:spPr>
         <p:txBody>
-          <a:bodyPr wrap="square" lIns="45720" rIns="45720" tIns="18288" bIns="18288" anchor="t">
+          <a:bodyPr wrap="square" lIns="45720" rIns="45720" tIns="18288" bIns="18288" anchor="ctr">
             <a:spAutoFit/>
           </a:bodyPr>
           <a:lstStyle/>
@@ -14567,7 +14567,7 @@
           <a:noFill/>
         </p:spPr>
         <p:txBody>
-          <a:bodyPr wrap="square" lIns="45720" rIns="45720" tIns="18288" bIns="18288" anchor="t">
+          <a:bodyPr wrap="square" lIns="45720" rIns="45720" tIns="18288" bIns="18288" anchor="ctr">
             <a:spAutoFit/>
           </a:bodyPr>
           <a:lstStyle/>
@@ -14608,7 +14608,7 @@
           <a:noFill/>
         </p:spPr>
         <p:txBody>
-          <a:bodyPr wrap="square" lIns="45720" rIns="45720" tIns="18288" bIns="18288" anchor="t">
+          <a:bodyPr wrap="square" lIns="45720" rIns="45720" tIns="18288" bIns="18288" anchor="ctr">
             <a:spAutoFit/>
           </a:bodyPr>
           <a:lstStyle/>
@@ -14697,7 +14697,7 @@
           <a:noFill/>
         </p:spPr>
         <p:txBody>
-          <a:bodyPr wrap="square" lIns="45720" rIns="45720" tIns="18288" bIns="18288" anchor="t">
+          <a:bodyPr wrap="square" lIns="45720" rIns="45720" tIns="18288" bIns="18288" anchor="ctr">
             <a:spAutoFit/>
           </a:bodyPr>
           <a:lstStyle/>
@@ -14738,7 +14738,7 @@
           <a:noFill/>
         </p:spPr>
         <p:txBody>
-          <a:bodyPr wrap="square" lIns="45720" rIns="45720" tIns="18288" bIns="18288" anchor="t">
+          <a:bodyPr wrap="square" lIns="45720" rIns="45720" tIns="18288" bIns="18288" anchor="ctr">
             <a:spAutoFit/>
           </a:bodyPr>
           <a:lstStyle/>
@@ -14779,7 +14779,7 @@
           <a:noFill/>
         </p:spPr>
         <p:txBody>
-          <a:bodyPr wrap="square" lIns="45720" rIns="45720" tIns="18288" bIns="18288" anchor="t">
+          <a:bodyPr wrap="square" lIns="45720" rIns="45720" tIns="18288" bIns="18288" anchor="ctr">
             <a:spAutoFit/>
           </a:bodyPr>
           <a:lstStyle/>
@@ -14912,7 +14912,7 @@
           <a:noFill/>
         </p:spPr>
         <p:txBody>
-          <a:bodyPr wrap="square" lIns="45720" rIns="45720" tIns="18288" bIns="18288" anchor="t">
+          <a:bodyPr wrap="square" lIns="45720" rIns="45720" tIns="18288" bIns="18288" anchor="ctr">
             <a:spAutoFit/>
           </a:bodyPr>
           <a:lstStyle/>
@@ -14953,7 +14953,7 @@
           <a:noFill/>
         </p:spPr>
         <p:txBody>
-          <a:bodyPr wrap="square" lIns="45720" rIns="45720" tIns="18288" bIns="18288" anchor="t">
+          <a:bodyPr wrap="square" lIns="45720" rIns="45720" tIns="18288" bIns="18288" anchor="ctr">
             <a:spAutoFit/>
           </a:bodyPr>
           <a:lstStyle/>
@@ -15042,7 +15042,7 @@
           <a:noFill/>
         </p:spPr>
         <p:txBody>
-          <a:bodyPr wrap="square" lIns="45720" rIns="45720" tIns="18288" bIns="18288" anchor="t">
+          <a:bodyPr wrap="square" lIns="45720" rIns="45720" tIns="18288" bIns="18288" anchor="ctr">
             <a:spAutoFit/>
           </a:bodyPr>
           <a:lstStyle/>
@@ -15083,7 +15083,7 @@
           <a:noFill/>
         </p:spPr>
         <p:txBody>
-          <a:bodyPr wrap="square" lIns="45720" rIns="45720" tIns="18288" bIns="18288" anchor="t">
+          <a:bodyPr wrap="square" lIns="45720" rIns="45720" tIns="18288" bIns="18288" anchor="ctr">
             <a:spAutoFit/>
           </a:bodyPr>
           <a:lstStyle/>
@@ -15124,7 +15124,7 @@
           <a:noFill/>
         </p:spPr>
         <p:txBody>
-          <a:bodyPr wrap="square" lIns="45720" rIns="45720" tIns="18288" bIns="18288" anchor="t">
+          <a:bodyPr wrap="square" lIns="45720" rIns="45720" tIns="18288" bIns="18288" anchor="ctr">
             <a:spAutoFit/>
           </a:bodyPr>
           <a:lstStyle/>
@@ -15322,7 +15322,7 @@
           <a:noFill/>
         </p:spPr>
         <p:txBody>
-          <a:bodyPr wrap="square" lIns="45720" rIns="45720" tIns="18288" bIns="18288" anchor="t">
+          <a:bodyPr wrap="square" lIns="45720" rIns="45720" tIns="18288" bIns="18288" anchor="ctr">
             <a:spAutoFit/>
           </a:bodyPr>
           <a:lstStyle/>
@@ -15363,7 +15363,7 @@
           <a:noFill/>
         </p:spPr>
         <p:txBody>
-          <a:bodyPr wrap="square" lIns="45720" rIns="45720" tIns="18288" bIns="18288" anchor="t">
+          <a:bodyPr wrap="square" lIns="45720" rIns="45720" tIns="18288" bIns="18288" anchor="ctr">
             <a:spAutoFit/>
           </a:bodyPr>
           <a:lstStyle/>
@@ -15404,7 +15404,7 @@
           <a:noFill/>
         </p:spPr>
         <p:txBody>
-          <a:bodyPr wrap="square" lIns="45720" rIns="45720" tIns="18288" bIns="18288" anchor="t">
+          <a:bodyPr wrap="square" lIns="45720" rIns="45720" tIns="18288" bIns="18288" anchor="ctr">
             <a:spAutoFit/>
           </a:bodyPr>
           <a:lstStyle/>
@@ -15445,7 +15445,7 @@
           <a:noFill/>
         </p:spPr>
         <p:txBody>
-          <a:bodyPr wrap="square" lIns="45720" rIns="45720" tIns="18288" bIns="18288" anchor="t">
+          <a:bodyPr wrap="square" lIns="45720" rIns="45720" tIns="18288" bIns="18288" anchor="ctr">
             <a:spAutoFit/>
           </a:bodyPr>
           <a:lstStyle/>
@@ -15556,7 +15556,7 @@
           <a:noFill/>
         </p:spPr>
         <p:txBody>
-          <a:bodyPr wrap="square" lIns="45720" rIns="45720" tIns="18288" bIns="18288" anchor="t">
+          <a:bodyPr wrap="square" lIns="45720" rIns="45720" tIns="18288" bIns="18288" anchor="ctr">
             <a:spAutoFit/>
           </a:bodyPr>
           <a:lstStyle/>
@@ -15641,7 +15641,7 @@
           <a:noFill/>
         </p:spPr>
         <p:txBody>
-          <a:bodyPr wrap="square" lIns="45720" rIns="45720" tIns="18288" bIns="18288" anchor="t">
+          <a:bodyPr wrap="square" lIns="45720" rIns="45720" tIns="18288" bIns="18288" anchor="ctr">
             <a:spAutoFit/>
           </a:bodyPr>
           <a:lstStyle/>
@@ -15728,7 +15728,7 @@
           <a:noFill/>
         </p:spPr>
         <p:txBody>
-          <a:bodyPr wrap="square" lIns="45720" rIns="45720" tIns="18288" bIns="18288" anchor="t">
+          <a:bodyPr wrap="square" lIns="45720" rIns="45720" tIns="18288" bIns="18288" anchor="ctr">
             <a:spAutoFit/>
           </a:bodyPr>
           <a:lstStyle/>
@@ -15769,7 +15769,7 @@
           <a:noFill/>
         </p:spPr>
         <p:txBody>
-          <a:bodyPr wrap="square" lIns="45720" rIns="45720" tIns="18288" bIns="18288" anchor="t">
+          <a:bodyPr wrap="square" lIns="45720" rIns="45720" tIns="18288" bIns="18288" anchor="ctr">
             <a:spAutoFit/>
           </a:bodyPr>
           <a:lstStyle/>
@@ -15810,7 +15810,7 @@
           <a:noFill/>
         </p:spPr>
         <p:txBody>
-          <a:bodyPr wrap="square" lIns="45720" rIns="45720" tIns="18288" bIns="18288" anchor="t">
+          <a:bodyPr wrap="square" lIns="45720" rIns="45720" tIns="18288" bIns="18288" anchor="ctr">
             <a:spAutoFit/>
           </a:bodyPr>
           <a:lstStyle/>
@@ -15897,7 +15897,7 @@
           <a:noFill/>
         </p:spPr>
         <p:txBody>
-          <a:bodyPr wrap="square" lIns="45720" rIns="45720" tIns="18288" bIns="18288" anchor="t">
+          <a:bodyPr wrap="square" lIns="45720" rIns="45720" tIns="18288" bIns="18288" anchor="ctr">
             <a:spAutoFit/>
           </a:bodyPr>
           <a:lstStyle/>
@@ -15938,7 +15938,7 @@
           <a:noFill/>
         </p:spPr>
         <p:txBody>
-          <a:bodyPr wrap="square" lIns="45720" rIns="45720" tIns="18288" bIns="18288" anchor="t">
+          <a:bodyPr wrap="square" lIns="45720" rIns="45720" tIns="18288" bIns="18288" anchor="ctr">
             <a:spAutoFit/>
           </a:bodyPr>
           <a:lstStyle/>
@@ -15979,7 +15979,7 @@
           <a:noFill/>
         </p:spPr>
         <p:txBody>
-          <a:bodyPr wrap="square" lIns="45720" rIns="45720" tIns="18288" bIns="18288" anchor="t">
+          <a:bodyPr wrap="square" lIns="45720" rIns="45720" tIns="18288" bIns="18288" anchor="ctr">
             <a:spAutoFit/>
           </a:bodyPr>
           <a:lstStyle/>
@@ -16066,7 +16066,7 @@
           <a:noFill/>
         </p:spPr>
         <p:txBody>
-          <a:bodyPr wrap="square" lIns="45720" rIns="45720" tIns="18288" bIns="18288" anchor="t">
+          <a:bodyPr wrap="square" lIns="45720" rIns="45720" tIns="18288" bIns="18288" anchor="ctr">
             <a:spAutoFit/>
           </a:bodyPr>
           <a:lstStyle/>
@@ -16107,7 +16107,7 @@
           <a:noFill/>
         </p:spPr>
         <p:txBody>
-          <a:bodyPr wrap="square" lIns="45720" rIns="45720" tIns="18288" bIns="18288" anchor="t">
+          <a:bodyPr wrap="square" lIns="45720" rIns="45720" tIns="18288" bIns="18288" anchor="ctr">
             <a:spAutoFit/>
           </a:bodyPr>
           <a:lstStyle/>
@@ -16148,7 +16148,7 @@
           <a:noFill/>
         </p:spPr>
         <p:txBody>
-          <a:bodyPr wrap="square" lIns="45720" rIns="45720" tIns="18288" bIns="18288" anchor="t">
+          <a:bodyPr wrap="square" lIns="45720" rIns="45720" tIns="18288" bIns="18288" anchor="ctr">
             <a:spAutoFit/>
           </a:bodyPr>
           <a:lstStyle/>
@@ -16235,7 +16235,7 @@
           <a:noFill/>
         </p:spPr>
         <p:txBody>
-          <a:bodyPr wrap="square" lIns="45720" rIns="45720" tIns="18288" bIns="18288" anchor="t">
+          <a:bodyPr wrap="square" lIns="45720" rIns="45720" tIns="18288" bIns="18288" anchor="ctr">
             <a:spAutoFit/>
           </a:bodyPr>
           <a:lstStyle/>
@@ -16276,7 +16276,7 @@
           <a:noFill/>
         </p:spPr>
         <p:txBody>
-          <a:bodyPr wrap="square" lIns="45720" rIns="45720" tIns="18288" bIns="18288" anchor="t">
+          <a:bodyPr wrap="square" lIns="45720" rIns="45720" tIns="18288" bIns="18288" anchor="ctr">
             <a:spAutoFit/>
           </a:bodyPr>
           <a:lstStyle/>
@@ -16317,7 +16317,7 @@
           <a:noFill/>
         </p:spPr>
         <p:txBody>
-          <a:bodyPr wrap="square" lIns="45720" rIns="45720" tIns="18288" bIns="18288" anchor="t">
+          <a:bodyPr wrap="square" lIns="45720" rIns="45720" tIns="18288" bIns="18288" anchor="ctr">
             <a:spAutoFit/>
           </a:bodyPr>
           <a:lstStyle/>
@@ -16404,7 +16404,7 @@
           <a:noFill/>
         </p:spPr>
         <p:txBody>
-          <a:bodyPr wrap="square" lIns="45720" rIns="45720" tIns="18288" bIns="18288" anchor="t">
+          <a:bodyPr wrap="square" lIns="45720" rIns="45720" tIns="18288" bIns="18288" anchor="ctr">
             <a:spAutoFit/>
           </a:bodyPr>
           <a:lstStyle/>
@@ -16445,7 +16445,7 @@
           <a:noFill/>
         </p:spPr>
         <p:txBody>
-          <a:bodyPr wrap="square" lIns="45720" rIns="45720" tIns="18288" bIns="18288" anchor="t">
+          <a:bodyPr wrap="square" lIns="45720" rIns="45720" tIns="18288" bIns="18288" anchor="ctr">
             <a:spAutoFit/>
           </a:bodyPr>
           <a:lstStyle/>
@@ -16486,7 +16486,7 @@
           <a:noFill/>
         </p:spPr>
         <p:txBody>
-          <a:bodyPr wrap="square" lIns="45720" rIns="45720" tIns="18288" bIns="18288" anchor="t">
+          <a:bodyPr wrap="square" lIns="45720" rIns="45720" tIns="18288" bIns="18288" anchor="ctr">
             <a:spAutoFit/>
           </a:bodyPr>
           <a:lstStyle/>
@@ -16597,7 +16597,7 @@
           <a:noFill/>
         </p:spPr>
         <p:txBody>
-          <a:bodyPr wrap="square" lIns="45720" rIns="45720" tIns="18288" bIns="18288" anchor="t">
+          <a:bodyPr wrap="square" lIns="45720" rIns="45720" tIns="18288" bIns="18288" anchor="ctr">
             <a:spAutoFit/>
           </a:bodyPr>
           <a:lstStyle/>
@@ -16682,7 +16682,7 @@
           <a:noFill/>
         </p:spPr>
         <p:txBody>
-          <a:bodyPr wrap="square" lIns="45720" rIns="45720" tIns="18288" bIns="18288" anchor="t">
+          <a:bodyPr wrap="square" lIns="45720" rIns="45720" tIns="18288" bIns="18288" anchor="ctr">
             <a:spAutoFit/>
           </a:bodyPr>
           <a:lstStyle/>
@@ -16723,7 +16723,7 @@
           <a:noFill/>
         </p:spPr>
         <p:txBody>
-          <a:bodyPr wrap="square" lIns="45720" rIns="45720" tIns="18288" bIns="18288" anchor="t">
+          <a:bodyPr wrap="square" lIns="45720" rIns="45720" tIns="18288" bIns="18288" anchor="ctr">
             <a:spAutoFit/>
           </a:bodyPr>
           <a:lstStyle/>
@@ -16764,7 +16764,7 @@
           <a:noFill/>
         </p:spPr>
         <p:txBody>
-          <a:bodyPr wrap="square" lIns="45720" rIns="45720" tIns="18288" bIns="18288" anchor="t">
+          <a:bodyPr wrap="square" lIns="45720" rIns="45720" tIns="18288" bIns="18288" anchor="ctr">
             <a:spAutoFit/>
           </a:bodyPr>
           <a:lstStyle/>
@@ -16853,7 +16853,7 @@
           <a:noFill/>
         </p:spPr>
         <p:txBody>
-          <a:bodyPr wrap="square" lIns="45720" rIns="45720" tIns="18288" bIns="18288" anchor="t">
+          <a:bodyPr wrap="square" lIns="45720" rIns="45720" tIns="18288" bIns="18288" anchor="ctr">
             <a:spAutoFit/>
           </a:bodyPr>
           <a:lstStyle/>
@@ -16894,7 +16894,7 @@
           <a:noFill/>
         </p:spPr>
         <p:txBody>
-          <a:bodyPr wrap="square" lIns="45720" rIns="45720" tIns="18288" bIns="18288" anchor="t">
+          <a:bodyPr wrap="square" lIns="45720" rIns="45720" tIns="18288" bIns="18288" anchor="ctr">
             <a:spAutoFit/>
           </a:bodyPr>
           <a:lstStyle/>
@@ -16935,7 +16935,7 @@
           <a:noFill/>
         </p:spPr>
         <p:txBody>
-          <a:bodyPr wrap="square" lIns="45720" rIns="45720" tIns="18288" bIns="18288" anchor="t">
+          <a:bodyPr wrap="square" lIns="45720" rIns="45720" tIns="18288" bIns="18288" anchor="ctr">
             <a:spAutoFit/>
           </a:bodyPr>
           <a:lstStyle/>
@@ -17024,7 +17024,7 @@
           <a:noFill/>
         </p:spPr>
         <p:txBody>
-          <a:bodyPr wrap="square" lIns="45720" rIns="45720" tIns="18288" bIns="18288" anchor="t">
+          <a:bodyPr wrap="square" lIns="45720" rIns="45720" tIns="18288" bIns="18288" anchor="ctr">
             <a:spAutoFit/>
           </a:bodyPr>
           <a:lstStyle/>
@@ -17065,7 +17065,7 @@
           <a:noFill/>
         </p:spPr>
         <p:txBody>
-          <a:bodyPr wrap="square" lIns="45720" rIns="45720" tIns="18288" bIns="18288" anchor="t">
+          <a:bodyPr wrap="square" lIns="45720" rIns="45720" tIns="18288" bIns="18288" anchor="ctr">
             <a:spAutoFit/>
           </a:bodyPr>
           <a:lstStyle/>
@@ -17106,7 +17106,7 @@
           <a:noFill/>
         </p:spPr>
         <p:txBody>
-          <a:bodyPr wrap="square" lIns="45720" rIns="45720" tIns="18288" bIns="18288" anchor="t">
+          <a:bodyPr wrap="square" lIns="45720" rIns="45720" tIns="18288" bIns="18288" anchor="ctr">
             <a:spAutoFit/>
           </a:bodyPr>
           <a:lstStyle/>
@@ -17195,7 +17195,7 @@
           <a:noFill/>
         </p:spPr>
         <p:txBody>
-          <a:bodyPr wrap="square" lIns="45720" rIns="45720" tIns="18288" bIns="18288" anchor="t">
+          <a:bodyPr wrap="square" lIns="45720" rIns="45720" tIns="18288" bIns="18288" anchor="ctr">
             <a:spAutoFit/>
           </a:bodyPr>
           <a:lstStyle/>
@@ -17236,7 +17236,7 @@
           <a:noFill/>
         </p:spPr>
         <p:txBody>
-          <a:bodyPr wrap="square" lIns="45720" rIns="45720" tIns="18288" bIns="18288" anchor="t">
+          <a:bodyPr wrap="square" lIns="45720" rIns="45720" tIns="18288" bIns="18288" anchor="ctr">
             <a:spAutoFit/>
           </a:bodyPr>
           <a:lstStyle/>
@@ -17277,7 +17277,7 @@
           <a:noFill/>
         </p:spPr>
         <p:txBody>
-          <a:bodyPr wrap="square" lIns="45720" rIns="45720" tIns="18288" bIns="18288" anchor="t">
+          <a:bodyPr wrap="square" lIns="45720" rIns="45720" tIns="18288" bIns="18288" anchor="ctr">
             <a:spAutoFit/>
           </a:bodyPr>
           <a:lstStyle/>
@@ -17318,7 +17318,7 @@
           <a:noFill/>
         </p:spPr>
         <p:txBody>
-          <a:bodyPr wrap="square" lIns="45720" rIns="45720" tIns="18288" bIns="18288" anchor="t">
+          <a:bodyPr wrap="square" lIns="45720" rIns="45720" tIns="18288" bIns="18288" anchor="ctr">
             <a:spAutoFit/>
           </a:bodyPr>
           <a:lstStyle/>
@@ -17407,7 +17407,7 @@
           <a:noFill/>
         </p:spPr>
         <p:txBody>
-          <a:bodyPr wrap="square" lIns="45720" rIns="45720" tIns="18288" bIns="18288" anchor="t">
+          <a:bodyPr wrap="square" lIns="45720" rIns="45720" tIns="18288" bIns="18288" anchor="ctr">
             <a:spAutoFit/>
           </a:bodyPr>
           <a:lstStyle/>
@@ -17647,7 +17647,7 @@
           <a:noFill/>
         </p:spPr>
         <p:txBody>
-          <a:bodyPr wrap="square" lIns="45720" rIns="45720" tIns="18288" bIns="18288" anchor="t">
+          <a:bodyPr wrap="square" lIns="45720" rIns="45720" tIns="18288" bIns="18288" anchor="ctr">
             <a:spAutoFit/>
           </a:bodyPr>
           <a:lstStyle/>
@@ -17688,7 +17688,7 @@
           <a:noFill/>
         </p:spPr>
         <p:txBody>
-          <a:bodyPr wrap="square" lIns="45720" rIns="45720" tIns="18288" bIns="18288" anchor="t">
+          <a:bodyPr wrap="square" lIns="45720" rIns="45720" tIns="18288" bIns="18288" anchor="ctr">
             <a:spAutoFit/>
           </a:bodyPr>
           <a:lstStyle/>
@@ -17773,7 +17773,7 @@
           <a:noFill/>
         </p:spPr>
         <p:txBody>
-          <a:bodyPr wrap="square" lIns="45720" rIns="45720" tIns="18288" bIns="18288" anchor="t">
+          <a:bodyPr wrap="square" lIns="45720" rIns="45720" tIns="18288" bIns="18288" anchor="ctr">
             <a:spAutoFit/>
           </a:bodyPr>
           <a:lstStyle/>
@@ -17906,7 +17906,7 @@
           <a:noFill/>
         </p:spPr>
         <p:txBody>
-          <a:bodyPr wrap="square" lIns="45720" rIns="45720" tIns="18288" bIns="18288" anchor="t">
+          <a:bodyPr wrap="square" lIns="45720" rIns="45720" tIns="18288" bIns="18288" anchor="ctr">
             <a:spAutoFit/>
           </a:bodyPr>
           <a:lstStyle/>
@@ -17947,7 +17947,7 @@
           <a:noFill/>
         </p:spPr>
         <p:txBody>
-          <a:bodyPr wrap="square" lIns="45720" rIns="45720" tIns="18288" bIns="18288" anchor="t">
+          <a:bodyPr wrap="square" lIns="45720" rIns="45720" tIns="18288" bIns="18288" anchor="ctr">
             <a:spAutoFit/>
           </a:bodyPr>
           <a:lstStyle/>
@@ -17988,7 +17988,7 @@
           <a:noFill/>
         </p:spPr>
         <p:txBody>
-          <a:bodyPr wrap="square" lIns="45720" rIns="45720" tIns="18288" bIns="18288" anchor="t">
+          <a:bodyPr wrap="square" lIns="45720" rIns="45720" tIns="18288" bIns="18288" anchor="ctr">
             <a:spAutoFit/>
           </a:bodyPr>
           <a:lstStyle/>
@@ -18077,7 +18077,7 @@
           <a:noFill/>
         </p:spPr>
         <p:txBody>
-          <a:bodyPr wrap="square" lIns="45720" rIns="45720" tIns="18288" bIns="18288" anchor="t">
+          <a:bodyPr wrap="square" lIns="45720" rIns="45720" tIns="18288" bIns="18288" anchor="ctr">
             <a:spAutoFit/>
           </a:bodyPr>
           <a:lstStyle/>
@@ -18118,7 +18118,7 @@
           <a:noFill/>
         </p:spPr>
         <p:txBody>
-          <a:bodyPr wrap="square" lIns="45720" rIns="45720" tIns="18288" bIns="18288" anchor="t">
+          <a:bodyPr wrap="square" lIns="45720" rIns="45720" tIns="18288" bIns="18288" anchor="ctr">
             <a:spAutoFit/>
           </a:bodyPr>
           <a:lstStyle/>
@@ -18251,7 +18251,7 @@
           <a:noFill/>
         </p:spPr>
         <p:txBody>
-          <a:bodyPr wrap="square" lIns="45720" rIns="45720" tIns="18288" bIns="18288" anchor="t">
+          <a:bodyPr wrap="square" lIns="45720" rIns="45720" tIns="18288" bIns="18288" anchor="ctr">
             <a:spAutoFit/>
           </a:bodyPr>
           <a:lstStyle/>
@@ -18292,7 +18292,7 @@
           <a:noFill/>
         </p:spPr>
         <p:txBody>
-          <a:bodyPr wrap="square" lIns="45720" rIns="45720" tIns="18288" bIns="18288" anchor="t">
+          <a:bodyPr wrap="square" lIns="45720" rIns="45720" tIns="18288" bIns="18288" anchor="ctr">
             <a:spAutoFit/>
           </a:bodyPr>
           <a:lstStyle/>
@@ -18333,7 +18333,7 @@
           <a:noFill/>
         </p:spPr>
         <p:txBody>
-          <a:bodyPr wrap="square" lIns="45720" rIns="45720" tIns="18288" bIns="18288" anchor="t">
+          <a:bodyPr wrap="square" lIns="45720" rIns="45720" tIns="18288" bIns="18288" anchor="ctr">
             <a:spAutoFit/>
           </a:bodyPr>
           <a:lstStyle/>
@@ -18422,7 +18422,7 @@
           <a:noFill/>
         </p:spPr>
         <p:txBody>
-          <a:bodyPr wrap="square" lIns="45720" rIns="45720" tIns="18288" bIns="18288" anchor="t">
+          <a:bodyPr wrap="square" lIns="45720" rIns="45720" tIns="18288" bIns="18288" anchor="ctr">
             <a:spAutoFit/>
           </a:bodyPr>
           <a:lstStyle/>
@@ -18463,7 +18463,7 @@
           <a:noFill/>
         </p:spPr>
         <p:txBody>
-          <a:bodyPr wrap="square" lIns="45720" rIns="45720" tIns="18288" bIns="18288" anchor="t">
+          <a:bodyPr wrap="square" lIns="45720" rIns="45720" tIns="18288" bIns="18288" anchor="ctr">
             <a:spAutoFit/>
           </a:bodyPr>
           <a:lstStyle/>
@@ -18661,7 +18661,7 @@
           <a:noFill/>
         </p:spPr>
         <p:txBody>
-          <a:bodyPr wrap="square" lIns="45720" rIns="45720" tIns="18288" bIns="18288" anchor="t">
+          <a:bodyPr wrap="square" lIns="45720" rIns="45720" tIns="18288" bIns="18288" anchor="ctr">
             <a:spAutoFit/>
           </a:bodyPr>
           <a:lstStyle/>
@@ -18702,7 +18702,7 @@
           <a:noFill/>
         </p:spPr>
         <p:txBody>
-          <a:bodyPr wrap="square" lIns="45720" rIns="45720" tIns="18288" bIns="18288" anchor="t">
+          <a:bodyPr wrap="square" lIns="45720" rIns="45720" tIns="18288" bIns="18288" anchor="ctr">
             <a:spAutoFit/>
           </a:bodyPr>
           <a:lstStyle/>
@@ -18787,7 +18787,7 @@
           <a:noFill/>
         </p:spPr>
         <p:txBody>
-          <a:bodyPr wrap="square" lIns="45720" rIns="45720" tIns="18288" bIns="18288" anchor="t">
+          <a:bodyPr wrap="square" lIns="45720" rIns="45720" tIns="18288" bIns="18288" anchor="ctr">
             <a:spAutoFit/>
           </a:bodyPr>
           <a:lstStyle/>
@@ -18920,7 +18920,7 @@
           <a:noFill/>
         </p:spPr>
         <p:txBody>
-          <a:bodyPr wrap="square" lIns="45720" rIns="45720" tIns="18288" bIns="18288" anchor="t">
+          <a:bodyPr wrap="square" lIns="45720" rIns="45720" tIns="18288" bIns="18288" anchor="ctr">
             <a:spAutoFit/>
           </a:bodyPr>
           <a:lstStyle/>
@@ -18961,7 +18961,7 @@
           <a:noFill/>
         </p:spPr>
         <p:txBody>
-          <a:bodyPr wrap="square" lIns="45720" rIns="45720" tIns="18288" bIns="18288" anchor="t">
+          <a:bodyPr wrap="square" lIns="45720" rIns="45720" tIns="18288" bIns="18288" anchor="ctr">
             <a:spAutoFit/>
           </a:bodyPr>
           <a:lstStyle/>
@@ -19002,7 +19002,7 @@
           <a:noFill/>
         </p:spPr>
         <p:txBody>
-          <a:bodyPr wrap="square" lIns="45720" rIns="45720" tIns="18288" bIns="18288" anchor="t">
+          <a:bodyPr wrap="square" lIns="45720" rIns="45720" tIns="18288" bIns="18288" anchor="ctr">
             <a:spAutoFit/>
           </a:bodyPr>
           <a:lstStyle/>
@@ -19043,7 +19043,7 @@
           <a:noFill/>
         </p:spPr>
         <p:txBody>
-          <a:bodyPr wrap="square" lIns="45720" rIns="45720" tIns="18288" bIns="18288" anchor="t">
+          <a:bodyPr wrap="square" lIns="45720" rIns="45720" tIns="18288" bIns="18288" anchor="ctr">
             <a:spAutoFit/>
           </a:bodyPr>
           <a:lstStyle/>
@@ -19176,7 +19176,7 @@
           <a:noFill/>
         </p:spPr>
         <p:txBody>
-          <a:bodyPr wrap="square" lIns="45720" rIns="45720" tIns="18288" bIns="18288" anchor="t">
+          <a:bodyPr wrap="square" lIns="45720" rIns="45720" tIns="18288" bIns="18288" anchor="ctr">
             <a:spAutoFit/>
           </a:bodyPr>
           <a:lstStyle/>
@@ -19217,7 +19217,7 @@
           <a:noFill/>
         </p:spPr>
         <p:txBody>
-          <a:bodyPr wrap="square" lIns="45720" rIns="45720" tIns="18288" bIns="18288" anchor="t">
+          <a:bodyPr wrap="square" lIns="45720" rIns="45720" tIns="18288" bIns="18288" anchor="ctr">
             <a:spAutoFit/>
           </a:bodyPr>
           <a:lstStyle/>
@@ -19258,7 +19258,7 @@
           <a:noFill/>
         </p:spPr>
         <p:txBody>
-          <a:bodyPr wrap="square" lIns="45720" rIns="45720" tIns="18288" bIns="18288" anchor="t">
+          <a:bodyPr wrap="square" lIns="45720" rIns="45720" tIns="18288" bIns="18288" anchor="ctr">
             <a:spAutoFit/>
           </a:bodyPr>
           <a:lstStyle/>
@@ -19299,7 +19299,7 @@
           <a:noFill/>
         </p:spPr>
         <p:txBody>
-          <a:bodyPr wrap="square" lIns="45720" rIns="45720" tIns="18288" bIns="18288" anchor="t">
+          <a:bodyPr wrap="square" lIns="45720" rIns="45720" tIns="18288" bIns="18288" anchor="ctr">
             <a:spAutoFit/>
           </a:bodyPr>
           <a:lstStyle/>
@@ -19432,7 +19432,7 @@
           <a:noFill/>
         </p:spPr>
         <p:txBody>
-          <a:bodyPr wrap="square" lIns="45720" rIns="45720" tIns="18288" bIns="18288" anchor="t">
+          <a:bodyPr wrap="square" lIns="45720" rIns="45720" tIns="18288" bIns="18288" anchor="ctr">
             <a:spAutoFit/>
           </a:bodyPr>
           <a:lstStyle/>
@@ -19473,7 +19473,7 @@
           <a:noFill/>
         </p:spPr>
         <p:txBody>
-          <a:bodyPr wrap="square" lIns="45720" rIns="45720" tIns="18288" bIns="18288" anchor="t">
+          <a:bodyPr wrap="square" lIns="45720" rIns="45720" tIns="18288" bIns="18288" anchor="ctr">
             <a:spAutoFit/>
           </a:bodyPr>
           <a:lstStyle/>
@@ -19514,7 +19514,7 @@
           <a:noFill/>
         </p:spPr>
         <p:txBody>
-          <a:bodyPr wrap="square" lIns="45720" rIns="45720" tIns="18288" bIns="18288" anchor="t">
+          <a:bodyPr wrap="square" lIns="45720" rIns="45720" tIns="18288" bIns="18288" anchor="ctr">
             <a:spAutoFit/>
           </a:bodyPr>
           <a:lstStyle/>
@@ -19555,7 +19555,7 @@
           <a:noFill/>
         </p:spPr>
         <p:txBody>
-          <a:bodyPr wrap="square" lIns="45720" rIns="45720" tIns="18288" bIns="18288" anchor="t">
+          <a:bodyPr wrap="square" lIns="45720" rIns="45720" tIns="18288" bIns="18288" anchor="ctr">
             <a:spAutoFit/>
           </a:bodyPr>
           <a:lstStyle/>
@@ -19596,7 +19596,7 @@
           <a:noFill/>
         </p:spPr>
         <p:txBody>
-          <a:bodyPr wrap="square" lIns="45720" rIns="45720" tIns="18288" bIns="18288" anchor="t">
+          <a:bodyPr wrap="square" lIns="45720" rIns="45720" tIns="18288" bIns="18288" anchor="ctr">
             <a:spAutoFit/>
           </a:bodyPr>
           <a:lstStyle/>
@@ -19661,7 +19661,7 @@
           <a:noFill/>
         </p:spPr>
         <p:txBody>
-          <a:bodyPr wrap="square" lIns="45720" rIns="45720" tIns="18288" bIns="18288" anchor="t">
+          <a:bodyPr wrap="square" lIns="45720" rIns="45720" tIns="18288" bIns="18288" anchor="ctr">
             <a:spAutoFit/>
           </a:bodyPr>
           <a:lstStyle/>
@@ -19859,7 +19859,7 @@
           <a:noFill/>
         </p:spPr>
         <p:txBody>
-          <a:bodyPr wrap="square" lIns="45720" rIns="45720" tIns="18288" bIns="18288" anchor="t">
+          <a:bodyPr wrap="square" lIns="45720" rIns="45720" tIns="18288" bIns="18288" anchor="ctr">
             <a:spAutoFit/>
           </a:bodyPr>
           <a:lstStyle/>
@@ -19900,7 +19900,7 @@
           <a:noFill/>
         </p:spPr>
         <p:txBody>
-          <a:bodyPr wrap="square" lIns="45720" rIns="45720" tIns="18288" bIns="18288" anchor="t">
+          <a:bodyPr wrap="square" lIns="45720" rIns="45720" tIns="18288" bIns="18288" anchor="ctr">
             <a:spAutoFit/>
           </a:bodyPr>
           <a:lstStyle/>
@@ -19985,7 +19985,7 @@
           <a:noFill/>
         </p:spPr>
         <p:txBody>
-          <a:bodyPr wrap="square" lIns="45720" rIns="45720" tIns="18288" bIns="18288" anchor="t">
+          <a:bodyPr wrap="square" lIns="45720" rIns="45720" tIns="18288" bIns="18288" anchor="ctr">
             <a:spAutoFit/>
           </a:bodyPr>
           <a:lstStyle/>
@@ -20118,7 +20118,7 @@
           <a:noFill/>
         </p:spPr>
         <p:txBody>
-          <a:bodyPr wrap="square" lIns="45720" rIns="45720" tIns="18288" bIns="18288" anchor="t">
+          <a:bodyPr wrap="square" lIns="45720" rIns="45720" tIns="18288" bIns="18288" anchor="ctr">
             <a:spAutoFit/>
           </a:bodyPr>
           <a:lstStyle/>
@@ -20159,7 +20159,7 @@
           <a:noFill/>
         </p:spPr>
         <p:txBody>
-          <a:bodyPr wrap="square" lIns="45720" rIns="45720" tIns="18288" bIns="18288" anchor="t">
+          <a:bodyPr wrap="square" lIns="45720" rIns="45720" tIns="18288" bIns="18288" anchor="ctr">
             <a:spAutoFit/>
           </a:bodyPr>
           <a:lstStyle/>
@@ -20200,7 +20200,7 @@
           <a:noFill/>
         </p:spPr>
         <p:txBody>
-          <a:bodyPr wrap="square" lIns="45720" rIns="45720" tIns="18288" bIns="18288" anchor="t">
+          <a:bodyPr wrap="square" lIns="45720" rIns="45720" tIns="18288" bIns="18288" anchor="ctr">
             <a:spAutoFit/>
           </a:bodyPr>
           <a:lstStyle/>
@@ -20241,7 +20241,7 @@
           <a:noFill/>
         </p:spPr>
         <p:txBody>
-          <a:bodyPr wrap="square" lIns="45720" rIns="45720" tIns="18288" bIns="18288" anchor="t">
+          <a:bodyPr wrap="square" lIns="45720" rIns="45720" tIns="18288" bIns="18288" anchor="ctr">
             <a:spAutoFit/>
           </a:bodyPr>
           <a:lstStyle/>
@@ -20282,7 +20282,7 @@
           <a:noFill/>
         </p:spPr>
         <p:txBody>
-          <a:bodyPr wrap="square" lIns="45720" rIns="45720" tIns="18288" bIns="18288" anchor="t">
+          <a:bodyPr wrap="square" lIns="45720" rIns="45720" tIns="18288" bIns="18288" anchor="ctr">
             <a:spAutoFit/>
           </a:bodyPr>
           <a:lstStyle/>
@@ -20323,7 +20323,7 @@
           <a:noFill/>
         </p:spPr>
         <p:txBody>
-          <a:bodyPr wrap="square" lIns="45720" rIns="45720" tIns="18288" bIns="18288" anchor="t">
+          <a:bodyPr wrap="square" lIns="45720" rIns="45720" tIns="18288" bIns="18288" anchor="ctr">
             <a:spAutoFit/>
           </a:bodyPr>
           <a:lstStyle/>
@@ -20456,7 +20456,7 @@
           <a:noFill/>
         </p:spPr>
         <p:txBody>
-          <a:bodyPr wrap="square" lIns="45720" rIns="45720" tIns="18288" bIns="18288" anchor="t">
+          <a:bodyPr wrap="square" lIns="45720" rIns="45720" tIns="18288" bIns="18288" anchor="ctr">
             <a:spAutoFit/>
           </a:bodyPr>
           <a:lstStyle/>
@@ -20497,7 +20497,7 @@
           <a:noFill/>
         </p:spPr>
         <p:txBody>
-          <a:bodyPr wrap="square" lIns="45720" rIns="45720" tIns="18288" bIns="18288" anchor="t">
+          <a:bodyPr wrap="square" lIns="45720" rIns="45720" tIns="18288" bIns="18288" anchor="ctr">
             <a:spAutoFit/>
           </a:bodyPr>
           <a:lstStyle/>
@@ -20538,7 +20538,7 @@
           <a:noFill/>
         </p:spPr>
         <p:txBody>
-          <a:bodyPr wrap="square" lIns="45720" rIns="45720" tIns="18288" bIns="18288" anchor="t">
+          <a:bodyPr wrap="square" lIns="45720" rIns="45720" tIns="18288" bIns="18288" anchor="ctr">
             <a:spAutoFit/>
           </a:bodyPr>
           <a:lstStyle/>
@@ -20579,7 +20579,7 @@
           <a:noFill/>
         </p:spPr>
         <p:txBody>
-          <a:bodyPr wrap="square" lIns="45720" rIns="45720" tIns="18288" bIns="18288" anchor="t">
+          <a:bodyPr wrap="square" lIns="45720" rIns="45720" tIns="18288" bIns="18288" anchor="ctr">
             <a:spAutoFit/>
           </a:bodyPr>
           <a:lstStyle/>
@@ -20620,7 +20620,7 @@
           <a:noFill/>
         </p:spPr>
         <p:txBody>
-          <a:bodyPr wrap="square" lIns="45720" rIns="45720" tIns="18288" bIns="18288" anchor="t">
+          <a:bodyPr wrap="square" lIns="45720" rIns="45720" tIns="18288" bIns="18288" anchor="ctr">
             <a:spAutoFit/>
           </a:bodyPr>
           <a:lstStyle/>
@@ -20661,7 +20661,7 @@
           <a:noFill/>
         </p:spPr>
         <p:txBody>
-          <a:bodyPr wrap="square" lIns="45720" rIns="45720" tIns="18288" bIns="18288" anchor="t">
+          <a:bodyPr wrap="square" lIns="45720" rIns="45720" tIns="18288" bIns="18288" anchor="ctr">
             <a:spAutoFit/>
           </a:bodyPr>
           <a:lstStyle/>
@@ -20789,7 +20789,7 @@
           <a:noFill/>
         </p:spPr>
         <p:txBody>
-          <a:bodyPr wrap="square" lIns="45720" rIns="45720" tIns="18288" bIns="18288" anchor="t">
+          <a:bodyPr wrap="square" lIns="45720" rIns="45720" tIns="18288" bIns="18288" anchor="ctr">
             <a:spAutoFit/>
           </a:bodyPr>
           <a:lstStyle/>
@@ -20874,7 +20874,7 @@
           <a:noFill/>
         </p:spPr>
         <p:txBody>
-          <a:bodyPr wrap="square" lIns="45720" rIns="45720" tIns="18288" bIns="18288" anchor="t">
+          <a:bodyPr wrap="square" lIns="45720" rIns="45720" tIns="18288" bIns="18288" anchor="ctr">
             <a:spAutoFit/>
           </a:bodyPr>
           <a:lstStyle/>
@@ -20959,7 +20959,7 @@
           <a:noFill/>
         </p:spPr>
         <p:txBody>
-          <a:bodyPr wrap="square" lIns="45720" rIns="45720" tIns="18288" bIns="18288" anchor="t">
+          <a:bodyPr wrap="square" lIns="45720" rIns="45720" tIns="18288" bIns="18288" anchor="ctr">
             <a:spAutoFit/>
           </a:bodyPr>
           <a:lstStyle/>
@@ -21044,7 +21044,7 @@
           <a:noFill/>
         </p:spPr>
         <p:txBody>
-          <a:bodyPr wrap="square" lIns="45720" rIns="45720" tIns="18288" bIns="18288" anchor="t">
+          <a:bodyPr wrap="square" lIns="45720" rIns="45720" tIns="18288" bIns="18288" anchor="ctr">
             <a:spAutoFit/>
           </a:bodyPr>
           <a:lstStyle/>
@@ -21109,7 +21109,7 @@
           <a:noFill/>
         </p:spPr>
         <p:txBody>
-          <a:bodyPr wrap="square" lIns="45720" rIns="45720" tIns="18288" bIns="18288" anchor="t">
+          <a:bodyPr wrap="square" lIns="45720" rIns="45720" tIns="18288" bIns="18288" anchor="ctr">
             <a:spAutoFit/>
           </a:bodyPr>
           <a:lstStyle/>
@@ -21220,7 +21220,7 @@
           <a:noFill/>
         </p:spPr>
         <p:txBody>
-          <a:bodyPr wrap="square" lIns="45720" rIns="45720" tIns="18288" bIns="18288" anchor="t">
+          <a:bodyPr wrap="square" lIns="45720" rIns="45720" tIns="18288" bIns="18288" anchor="ctr">
             <a:spAutoFit/>
           </a:bodyPr>
           <a:lstStyle/>
@@ -21261,7 +21261,7 @@
           <a:noFill/>
         </p:spPr>
         <p:txBody>
-          <a:bodyPr wrap="square" lIns="45720" rIns="45720" tIns="18288" bIns="18288" anchor="t">
+          <a:bodyPr wrap="square" lIns="45720" rIns="45720" tIns="18288" bIns="18288" anchor="ctr">
             <a:spAutoFit/>
           </a:bodyPr>
           <a:lstStyle/>
@@ -21346,7 +21346,7 @@
           <a:noFill/>
         </p:spPr>
         <p:txBody>
-          <a:bodyPr wrap="square" lIns="45720" rIns="45720" tIns="18288" bIns="18288" anchor="t">
+          <a:bodyPr wrap="square" lIns="45720" rIns="45720" tIns="18288" bIns="18288" anchor="ctr">
             <a:spAutoFit/>
           </a:bodyPr>
           <a:lstStyle/>
@@ -21387,7 +21387,7 @@
           <a:noFill/>
         </p:spPr>
         <p:txBody>
-          <a:bodyPr wrap="square" lIns="45720" rIns="45720" tIns="18288" bIns="18288" anchor="t">
+          <a:bodyPr wrap="square" lIns="45720" rIns="45720" tIns="18288" bIns="18288" anchor="ctr">
             <a:spAutoFit/>
           </a:bodyPr>
           <a:lstStyle/>
@@ -21428,7 +21428,7 @@
           <a:noFill/>
         </p:spPr>
         <p:txBody>
-          <a:bodyPr wrap="square" lIns="45720" rIns="45720" tIns="18288" bIns="18288" anchor="t">
+          <a:bodyPr wrap="square" lIns="45720" rIns="45720" tIns="18288" bIns="18288" anchor="ctr">
             <a:spAutoFit/>
           </a:bodyPr>
           <a:lstStyle/>
@@ -21469,7 +21469,7 @@
           <a:noFill/>
         </p:spPr>
         <p:txBody>
-          <a:bodyPr wrap="square" lIns="45720" rIns="45720" tIns="18288" bIns="18288" anchor="t">
+          <a:bodyPr wrap="square" lIns="45720" rIns="45720" tIns="18288" bIns="18288" anchor="ctr">
             <a:spAutoFit/>
           </a:bodyPr>
           <a:lstStyle/>
@@ -21510,7 +21510,7 @@
           <a:noFill/>
         </p:spPr>
         <p:txBody>
-          <a:bodyPr wrap="square" lIns="45720" rIns="45720" tIns="18288" bIns="18288" anchor="t">
+          <a:bodyPr wrap="square" lIns="45720" rIns="45720" tIns="18288" bIns="18288" anchor="ctr">
             <a:spAutoFit/>
           </a:bodyPr>
           <a:lstStyle/>
@@ -21551,7 +21551,7 @@
           <a:noFill/>
         </p:spPr>
         <p:txBody>
-          <a:bodyPr wrap="square" lIns="45720" rIns="45720" tIns="18288" bIns="18288" anchor="t">
+          <a:bodyPr wrap="square" lIns="45720" rIns="45720" tIns="18288" bIns="18288" anchor="ctr">
             <a:spAutoFit/>
           </a:bodyPr>
           <a:lstStyle/>
@@ -21592,7 +21592,7 @@
           <a:noFill/>
         </p:spPr>
         <p:txBody>
-          <a:bodyPr wrap="square" lIns="45720" rIns="45720" tIns="18288" bIns="18288" anchor="t">
+          <a:bodyPr wrap="square" lIns="45720" rIns="45720" tIns="18288" bIns="18288" anchor="ctr">
             <a:spAutoFit/>
           </a:bodyPr>
           <a:lstStyle/>
@@ -21633,7 +21633,7 @@
           <a:noFill/>
         </p:spPr>
         <p:txBody>
-          <a:bodyPr wrap="square" lIns="45720" rIns="45720" tIns="18288" bIns="18288" anchor="t">
+          <a:bodyPr wrap="square" lIns="45720" rIns="45720" tIns="18288" bIns="18288" anchor="ctr">
             <a:spAutoFit/>
           </a:bodyPr>
           <a:lstStyle/>
@@ -21674,7 +21674,7 @@
           <a:noFill/>
         </p:spPr>
         <p:txBody>
-          <a:bodyPr wrap="square" lIns="45720" rIns="45720" tIns="18288" bIns="18288" anchor="t">
+          <a:bodyPr wrap="square" lIns="45720" rIns="45720" tIns="18288" bIns="18288" anchor="ctr">
             <a:spAutoFit/>
           </a:bodyPr>
           <a:lstStyle/>
@@ -21715,7 +21715,7 @@
           <a:noFill/>
         </p:spPr>
         <p:txBody>
-          <a:bodyPr wrap="square" lIns="45720" rIns="45720" tIns="18288" bIns="18288" anchor="t">
+          <a:bodyPr wrap="square" lIns="45720" rIns="45720" tIns="18288" bIns="18288" anchor="ctr">
             <a:spAutoFit/>
           </a:bodyPr>
           <a:lstStyle/>
@@ -21756,7 +21756,7 @@
           <a:noFill/>
         </p:spPr>
         <p:txBody>
-          <a:bodyPr wrap="square" lIns="45720" rIns="45720" tIns="18288" bIns="18288" anchor="t">
+          <a:bodyPr wrap="square" lIns="45720" rIns="45720" tIns="18288" bIns="18288" anchor="ctr">
             <a:spAutoFit/>
           </a:bodyPr>
           <a:lstStyle/>
@@ -21845,7 +21845,7 @@
           <a:noFill/>
         </p:spPr>
         <p:txBody>
-          <a:bodyPr wrap="square" lIns="45720" rIns="45720" tIns="18288" bIns="18288" anchor="t">
+          <a:bodyPr wrap="square" lIns="45720" rIns="45720" tIns="18288" bIns="18288" anchor="ctr">
             <a:spAutoFit/>
           </a:bodyPr>
           <a:lstStyle/>
@@ -21928,7 +21928,7 @@
           <a:noFill/>
         </p:spPr>
         <p:txBody>
-          <a:bodyPr wrap="square" lIns="45720" rIns="45720" tIns="18288" bIns="18288" anchor="t">
+          <a:bodyPr wrap="square" lIns="45720" rIns="45720" tIns="18288" bIns="18288" anchor="ctr">
             <a:spAutoFit/>
           </a:bodyPr>
           <a:lstStyle/>
@@ -21993,7 +21993,7 @@
           <a:noFill/>
         </p:spPr>
         <p:txBody>
-          <a:bodyPr wrap="square" lIns="45720" rIns="45720" tIns="18288" bIns="18288" anchor="t">
+          <a:bodyPr wrap="square" lIns="45720" rIns="45720" tIns="18288" bIns="18288" anchor="ctr">
             <a:spAutoFit/>
           </a:bodyPr>
           <a:lstStyle/>
@@ -22191,7 +22191,7 @@
           <a:noFill/>
         </p:spPr>
         <p:txBody>
-          <a:bodyPr wrap="square" lIns="45720" rIns="45720" tIns="18288" bIns="18288" anchor="t">
+          <a:bodyPr wrap="square" lIns="45720" rIns="45720" tIns="18288" bIns="18288" anchor="ctr">
             <a:spAutoFit/>
           </a:bodyPr>
           <a:lstStyle/>
@@ -22232,7 +22232,7 @@
           <a:noFill/>
         </p:spPr>
         <p:txBody>
-          <a:bodyPr wrap="square" lIns="45720" rIns="45720" tIns="18288" bIns="18288" anchor="t">
+          <a:bodyPr wrap="square" lIns="45720" rIns="45720" tIns="18288" bIns="18288" anchor="ctr">
             <a:spAutoFit/>
           </a:bodyPr>
           <a:lstStyle/>
@@ -22317,7 +22317,7 @@
           <a:noFill/>
         </p:spPr>
         <p:txBody>
-          <a:bodyPr wrap="square" lIns="45720" rIns="45720" tIns="18288" bIns="18288" anchor="t">
+          <a:bodyPr wrap="square" lIns="45720" rIns="45720" tIns="18288" bIns="18288" anchor="ctr">
             <a:spAutoFit/>
           </a:bodyPr>
           <a:lstStyle/>
@@ -23392,7 +23392,7 @@
           <a:noFill/>
         </p:spPr>
         <p:txBody>
-          <a:bodyPr wrap="square" lIns="45720" rIns="45720" tIns="18288" bIns="18288" anchor="t">
+          <a:bodyPr wrap="square" lIns="45720" rIns="45720" tIns="18288" bIns="18288" anchor="ctr">
             <a:spAutoFit/>
           </a:bodyPr>
           <a:lstStyle/>
@@ -23433,7 +23433,7 @@
           <a:noFill/>
         </p:spPr>
         <p:txBody>
-          <a:bodyPr wrap="square" lIns="45720" rIns="45720" tIns="18288" bIns="18288" anchor="t">
+          <a:bodyPr wrap="square" lIns="45720" rIns="45720" tIns="18288" bIns="18288" anchor="ctr">
             <a:spAutoFit/>
           </a:bodyPr>
           <a:lstStyle/>
@@ -23522,7 +23522,7 @@
           <a:noFill/>
         </p:spPr>
         <p:txBody>
-          <a:bodyPr wrap="square" lIns="45720" rIns="45720" tIns="18288" bIns="18288" anchor="t">
+          <a:bodyPr wrap="square" lIns="45720" rIns="45720" tIns="18288" bIns="18288" anchor="ctr">
             <a:spAutoFit/>
           </a:bodyPr>
           <a:lstStyle/>
@@ -23675,7 +23675,7 @@
           <a:noFill/>
         </p:spPr>
         <p:txBody>
-          <a:bodyPr wrap="square" lIns="45720" rIns="45720" tIns="18288" bIns="18288" anchor="t">
+          <a:bodyPr wrap="square" lIns="45720" rIns="45720" tIns="18288" bIns="18288" anchor="ctr">
             <a:spAutoFit/>
           </a:bodyPr>
           <a:lstStyle/>
@@ -23716,7 +23716,7 @@
           <a:noFill/>
         </p:spPr>
         <p:txBody>
-          <a:bodyPr wrap="square" lIns="45720" rIns="45720" tIns="18288" bIns="18288" anchor="t">
+          <a:bodyPr wrap="square" lIns="45720" rIns="45720" tIns="18288" bIns="18288" anchor="ctr">
             <a:spAutoFit/>
           </a:bodyPr>
           <a:lstStyle/>
@@ -23801,7 +23801,7 @@
           <a:noFill/>
         </p:spPr>
         <p:txBody>
-          <a:bodyPr wrap="square" lIns="45720" rIns="45720" tIns="18288" bIns="18288" anchor="t">
+          <a:bodyPr wrap="square" lIns="45720" rIns="45720" tIns="18288" bIns="18288" anchor="ctr">
             <a:spAutoFit/>
           </a:bodyPr>
           <a:lstStyle/>
@@ -24434,7 +24434,7 @@
           <a:noFill/>
         </p:spPr>
         <p:txBody>
-          <a:bodyPr wrap="square" lIns="45720" rIns="45720" tIns="18288" bIns="18288" anchor="t">
+          <a:bodyPr wrap="square" lIns="45720" rIns="45720" tIns="18288" bIns="18288" anchor="ctr">
             <a:spAutoFit/>
           </a:bodyPr>
           <a:lstStyle/>
@@ -24499,7 +24499,7 @@
           <a:noFill/>
         </p:spPr>
         <p:txBody>
-          <a:bodyPr wrap="square" lIns="45720" rIns="45720" tIns="18288" bIns="18288" anchor="t">
+          <a:bodyPr wrap="square" lIns="45720" rIns="45720" tIns="18288" bIns="18288" anchor="ctr">
             <a:spAutoFit/>
           </a:bodyPr>
           <a:lstStyle/>
@@ -24588,7 +24588,7 @@
           <a:noFill/>
         </p:spPr>
         <p:txBody>
-          <a:bodyPr wrap="square" lIns="45720" rIns="45720" tIns="18288" bIns="18288" anchor="t">
+          <a:bodyPr wrap="square" lIns="45720" rIns="45720" tIns="18288" bIns="18288" anchor="ctr">
             <a:spAutoFit/>
           </a:bodyPr>
           <a:lstStyle/>

--- a/submission/_drafts/속도는벡터_중간발표.pptx
+++ b/submission/_drafts/속도는벡터_중간발표.pptx
@@ -3208,7 +3208,7 @@
         </p:nvSpPr>
         <p:spPr>
           <a:xfrm>
-            <a:off x="10058400" y="713232"/>
+            <a:off x="10058400" y="621792"/>
             <a:ext cx="1828800" cy="320040"/>
           </a:xfrm>
           <a:prstGeom prst="rect">
@@ -13493,16 +13493,178 @@
               </a:lnSpc>
             </a:pPr>
             <a:r>
-              <a:rPr sz="1000" b="0">
-                <a:solidFill>
-                  <a:srgbClr val="0F172A"/>
-                </a:solidFill>
-                <a:latin typeface="Apple SD Gothic Neo"/>
-                <a:ea typeface="Apple SD Gothic Neo"/>
-                <a:cs typeface="Apple SD Gothic Neo"/>
-              </a:rPr>
-              <a:t>전체 일정 관리 · 자문 회신 정리 · 발표·보고서 총괄</a:t>
-            </a:r>
+              <a:rPr sz="1000" b="0" dirty="0" err="1">
+                <a:solidFill>
+                  <a:srgbClr val="0F172A"/>
+                </a:solidFill>
+                <a:latin typeface="Apple SD Gothic Neo"/>
+                <a:ea typeface="Apple SD Gothic Neo"/>
+                <a:cs typeface="Apple SD Gothic Neo"/>
+              </a:rPr>
+              <a:t>전체</a:t>
+            </a:r>
+            <a:r>
+              <a:rPr sz="1000" b="0" dirty="0">
+                <a:solidFill>
+                  <a:srgbClr val="0F172A"/>
+                </a:solidFill>
+                <a:latin typeface="Apple SD Gothic Neo"/>
+                <a:ea typeface="Apple SD Gothic Neo"/>
+                <a:cs typeface="Apple SD Gothic Neo"/>
+              </a:rPr>
+              <a:t> </a:t>
+            </a:r>
+            <a:r>
+              <a:rPr sz="1000" b="0" dirty="0" err="1">
+                <a:solidFill>
+                  <a:srgbClr val="0F172A"/>
+                </a:solidFill>
+                <a:latin typeface="Apple SD Gothic Neo"/>
+                <a:ea typeface="Apple SD Gothic Neo"/>
+                <a:cs typeface="Apple SD Gothic Neo"/>
+              </a:rPr>
+              <a:t>일정</a:t>
+            </a:r>
+            <a:r>
+              <a:rPr sz="1000" b="0" dirty="0">
+                <a:solidFill>
+                  <a:srgbClr val="0F172A"/>
+                </a:solidFill>
+                <a:latin typeface="Apple SD Gothic Neo"/>
+                <a:ea typeface="Apple SD Gothic Neo"/>
+                <a:cs typeface="Apple SD Gothic Neo"/>
+              </a:rPr>
+              <a:t> </a:t>
+            </a:r>
+            <a:r>
+              <a:rPr sz="1000" b="0" dirty="0" err="1">
+                <a:solidFill>
+                  <a:srgbClr val="0F172A"/>
+                </a:solidFill>
+                <a:latin typeface="Apple SD Gothic Neo"/>
+                <a:ea typeface="Apple SD Gothic Neo"/>
+                <a:cs typeface="Apple SD Gothic Neo"/>
+              </a:rPr>
+              <a:t>관리</a:t>
+            </a:r>
+            <a:r>
+              <a:rPr sz="1000" b="0" dirty="0">
+                <a:solidFill>
+                  <a:srgbClr val="0F172A"/>
+                </a:solidFill>
+                <a:latin typeface="Apple SD Gothic Neo"/>
+                <a:ea typeface="Apple SD Gothic Neo"/>
+                <a:cs typeface="Apple SD Gothic Neo"/>
+              </a:rPr>
+              <a:t> · </a:t>
+            </a:r>
+            <a:r>
+              <a:rPr sz="1000" b="0" dirty="0" err="1">
+                <a:solidFill>
+                  <a:srgbClr val="0F172A"/>
+                </a:solidFill>
+                <a:latin typeface="Apple SD Gothic Neo"/>
+                <a:ea typeface="Apple SD Gothic Neo"/>
+                <a:cs typeface="Apple SD Gothic Neo"/>
+              </a:rPr>
+              <a:t>자문</a:t>
+            </a:r>
+            <a:r>
+              <a:rPr sz="1000" b="0" dirty="0">
+                <a:solidFill>
+                  <a:srgbClr val="0F172A"/>
+                </a:solidFill>
+                <a:latin typeface="Apple SD Gothic Neo"/>
+                <a:ea typeface="Apple SD Gothic Neo"/>
+                <a:cs typeface="Apple SD Gothic Neo"/>
+              </a:rPr>
+              <a:t> </a:t>
+            </a:r>
+            <a:r>
+              <a:rPr sz="1000" b="0" dirty="0" err="1">
+                <a:solidFill>
+                  <a:srgbClr val="0F172A"/>
+                </a:solidFill>
+                <a:latin typeface="Apple SD Gothic Neo"/>
+                <a:ea typeface="Apple SD Gothic Neo"/>
+                <a:cs typeface="Apple SD Gothic Neo"/>
+              </a:rPr>
+              <a:t>회신</a:t>
+            </a:r>
+            <a:r>
+              <a:rPr sz="1000" b="0" dirty="0">
+                <a:solidFill>
+                  <a:srgbClr val="0F172A"/>
+                </a:solidFill>
+                <a:latin typeface="Apple SD Gothic Neo"/>
+                <a:ea typeface="Apple SD Gothic Neo"/>
+                <a:cs typeface="Apple SD Gothic Neo"/>
+              </a:rPr>
+              <a:t> </a:t>
+            </a:r>
+            <a:r>
+              <a:rPr sz="1000" b="0" dirty="0" err="1">
+                <a:solidFill>
+                  <a:srgbClr val="0F172A"/>
+                </a:solidFill>
+                <a:latin typeface="Apple SD Gothic Neo"/>
+                <a:ea typeface="Apple SD Gothic Neo"/>
+                <a:cs typeface="Apple SD Gothic Neo"/>
+              </a:rPr>
+              <a:t>정리</a:t>
+            </a:r>
+            <a:r>
+              <a:rPr sz="1000" b="0" dirty="0">
+                <a:solidFill>
+                  <a:srgbClr val="0F172A"/>
+                </a:solidFill>
+                <a:latin typeface="Apple SD Gothic Neo"/>
+                <a:ea typeface="Apple SD Gothic Neo"/>
+                <a:cs typeface="Apple SD Gothic Neo"/>
+              </a:rPr>
+              <a:t> · </a:t>
+            </a:r>
+            <a:r>
+              <a:rPr sz="1000" b="0" dirty="0" err="1">
+                <a:solidFill>
+                  <a:srgbClr val="0F172A"/>
+                </a:solidFill>
+                <a:latin typeface="Apple SD Gothic Neo"/>
+                <a:ea typeface="Apple SD Gothic Neo"/>
+                <a:cs typeface="Apple SD Gothic Neo"/>
+              </a:rPr>
+              <a:t>발표·보고서</a:t>
+            </a:r>
+            <a:r>
+              <a:rPr sz="1000" b="0" dirty="0">
+                <a:solidFill>
+                  <a:srgbClr val="0F172A"/>
+                </a:solidFill>
+                <a:latin typeface="Apple SD Gothic Neo"/>
+                <a:ea typeface="Apple SD Gothic Neo"/>
+                <a:cs typeface="Apple SD Gothic Neo"/>
+              </a:rPr>
+              <a:t> </a:t>
+            </a:r>
+            <a:r>
+              <a:rPr sz="1000" b="0" dirty="0" err="1">
+                <a:solidFill>
+                  <a:srgbClr val="0F172A"/>
+                </a:solidFill>
+                <a:latin typeface="Apple SD Gothic Neo"/>
+                <a:ea typeface="Apple SD Gothic Neo"/>
+                <a:cs typeface="Apple SD Gothic Neo"/>
+              </a:rPr>
+              <a:t>총괄</a:t>
+            </a:r>
+            <a:endParaRPr sz="1000" b="0" dirty="0">
+              <a:solidFill>
+                <a:srgbClr val="0F172A"/>
+              </a:solidFill>
+              <a:latin typeface="Apple SD Gothic Neo"/>
+              <a:ea typeface="Apple SD Gothic Neo"/>
+              <a:cs typeface="Apple SD Gothic Neo"/>
+            </a:endParaRPr>
           </a:p>
         </p:txBody>
       </p:sp>
@@ -15661,7 +15823,7 @@
               </a:lnSpc>
             </a:pPr>
             <a:r>
-              <a:rPr sz="2200" b="1">
+              <a:rPr sz="2200" b="1" dirty="0">
                 <a:solidFill>
                   <a:srgbClr val="2563EB"/>
                 </a:solidFill>
@@ -16009,7 +16171,7 @@
               </a:lnSpc>
             </a:pPr>
             <a:r>
-              <a:rPr sz="2200" b="1">
+              <a:rPr sz="2200" b="1" dirty="0">
                 <a:solidFill>
                   <a:srgbClr val="2563EB"/>
                 </a:solidFill>
@@ -16357,7 +16519,7 @@
               </a:lnSpc>
             </a:pPr>
             <a:r>
-              <a:rPr sz="2200" b="1">
+              <a:rPr sz="2200" b="1" dirty="0">
                 <a:solidFill>
                   <a:srgbClr val="2563EB"/>
                 </a:solidFill>
@@ -18952,7 +19114,7 @@
         </p:nvSpPr>
         <p:spPr>
           <a:xfrm>
-            <a:off x="777240" y="2423160"/>
+            <a:off x="777240" y="2377440"/>
             <a:ext cx="1828800" cy="365760"/>
           </a:xfrm>
           <a:prstGeom prst="rect">
@@ -18972,7 +19134,7 @@
               </a:lnSpc>
             </a:pPr>
             <a:r>
-              <a:rPr sz="1500" b="1">
+              <a:rPr sz="1500" b="1" dirty="0" err="1">
                 <a:solidFill>
                   <a:srgbClr val="2563EB"/>
                 </a:solidFill>
@@ -18982,6 +19144,14 @@
               </a:rPr>
               <a:t>pgvector</a:t>
             </a:r>
+            <a:endParaRPr sz="1500" b="1" dirty="0">
+              <a:solidFill>
+                <a:srgbClr val="2563EB"/>
+              </a:solidFill>
+              <a:latin typeface="Apple SD Gothic Neo"/>
+              <a:ea typeface="Apple SD Gothic Neo"/>
+              <a:cs typeface="Apple SD Gothic Neo"/>
+            </a:endParaRPr>
           </a:p>
         </p:txBody>
       </p:sp>
@@ -18993,7 +19163,7 @@
         </p:nvSpPr>
         <p:spPr>
           <a:xfrm>
-            <a:off x="2468880" y="2377440"/>
+            <a:off x="2468880" y="2462062"/>
             <a:ext cx="1280160" cy="502920"/>
           </a:xfrm>
           <a:prstGeom prst="rect">
@@ -19013,7 +19183,7 @@
               </a:lnSpc>
             </a:pPr>
             <a:r>
-              <a:rPr sz="2400" b="1">
+              <a:rPr sz="2400" b="1" dirty="0">
                 <a:solidFill>
                   <a:srgbClr val="0F172A"/>
                 </a:solidFill>
@@ -19034,7 +19204,7 @@
         </p:nvSpPr>
         <p:spPr>
           <a:xfrm>
-            <a:off x="777240" y="2788920"/>
+            <a:off x="777240" y="2743200"/>
             <a:ext cx="4572000" cy="274320"/>
           </a:xfrm>
           <a:prstGeom prst="rect">
@@ -19124,7 +19294,7 @@
         </p:nvSpPr>
         <p:spPr>
           <a:xfrm>
-            <a:off x="777240" y="3291840"/>
+            <a:off x="777240" y="3246120"/>
             <a:ext cx="1828800" cy="365760"/>
           </a:xfrm>
           <a:prstGeom prst="rect">
@@ -19165,7 +19335,7 @@
         </p:nvSpPr>
         <p:spPr>
           <a:xfrm>
-            <a:off x="2468880" y="3246120"/>
+            <a:off x="2468880" y="3338763"/>
             <a:ext cx="1280160" cy="502920"/>
           </a:xfrm>
           <a:prstGeom prst="rect">
@@ -19185,7 +19355,7 @@
               </a:lnSpc>
             </a:pPr>
             <a:r>
-              <a:rPr sz="2400" b="1">
+              <a:rPr sz="2400" b="1" dirty="0">
                 <a:solidFill>
                   <a:srgbClr val="0F172A"/>
                 </a:solidFill>
@@ -19206,7 +19376,7 @@
         </p:nvSpPr>
         <p:spPr>
           <a:xfrm>
-            <a:off x="777240" y="3657600"/>
+            <a:off x="777240" y="3611880"/>
             <a:ext cx="4572000" cy="274320"/>
           </a:xfrm>
           <a:prstGeom prst="rect">
@@ -19296,7 +19466,7 @@
         </p:nvSpPr>
         <p:spPr>
           <a:xfrm>
-            <a:off x="777240" y="4160519"/>
+            <a:off x="777240" y="4114799"/>
             <a:ext cx="1828800" cy="365760"/>
           </a:xfrm>
           <a:prstGeom prst="rect">
@@ -19337,7 +19507,7 @@
         </p:nvSpPr>
         <p:spPr>
           <a:xfrm>
-            <a:off x="2468880" y="4114799"/>
+            <a:off x="2468880" y="4199421"/>
             <a:ext cx="1280160" cy="502920"/>
           </a:xfrm>
           <a:prstGeom prst="rect">
@@ -19357,7 +19527,7 @@
               </a:lnSpc>
             </a:pPr>
             <a:r>
-              <a:rPr sz="2400" b="1">
+              <a:rPr sz="2400" b="1" dirty="0">
                 <a:solidFill>
                   <a:srgbClr val="0F172A"/>
                 </a:solidFill>
@@ -19378,7 +19548,7 @@
         </p:nvSpPr>
         <p:spPr>
           <a:xfrm>
-            <a:off x="777240" y="4526279"/>
+            <a:off x="777240" y="4480559"/>
             <a:ext cx="4572000" cy="274320"/>
           </a:xfrm>
           <a:prstGeom prst="rect">
@@ -19509,7 +19679,7 @@
         </p:nvSpPr>
         <p:spPr>
           <a:xfrm>
-            <a:off x="6126480" y="2468880"/>
+            <a:off x="6156960" y="2730500"/>
             <a:ext cx="5486400" cy="365760"/>
           </a:xfrm>
           <a:prstGeom prst="rect">
@@ -22018,7 +22188,7 @@
         </p:nvSpPr>
         <p:spPr>
           <a:xfrm>
-            <a:off x="1051560" y="1508760"/>
+            <a:off x="1028700" y="1453896"/>
             <a:ext cx="4572000" cy="320040"/>
           </a:xfrm>
           <a:prstGeom prst="rect">
@@ -22059,7 +22229,7 @@
         </p:nvSpPr>
         <p:spPr>
           <a:xfrm>
-            <a:off x="1051560" y="1801368"/>
+            <a:off x="1028700" y="1746504"/>
             <a:ext cx="4572000" cy="292608"/>
           </a:xfrm>
           <a:prstGeom prst="rect">
@@ -22100,7 +22270,7 @@
         </p:nvSpPr>
         <p:spPr>
           <a:xfrm>
-            <a:off x="1051560" y="2075688"/>
+            <a:off x="1028700" y="2020824"/>
             <a:ext cx="4572000" cy="502920"/>
           </a:xfrm>
           <a:prstGeom prst="rect">
@@ -22276,7 +22446,7 @@
         </p:nvSpPr>
         <p:spPr>
           <a:xfrm>
-            <a:off x="1051560" y="2788920"/>
+            <a:off x="1028700" y="2734056"/>
             <a:ext cx="4572000" cy="320040"/>
           </a:xfrm>
           <a:prstGeom prst="rect">
@@ -22317,7 +22487,7 @@
         </p:nvSpPr>
         <p:spPr>
           <a:xfrm>
-            <a:off x="1051560" y="3081528"/>
+            <a:off x="1028700" y="3026664"/>
             <a:ext cx="4572000" cy="292608"/>
           </a:xfrm>
           <a:prstGeom prst="rect">
@@ -22358,7 +22528,7 @@
         </p:nvSpPr>
         <p:spPr>
           <a:xfrm>
-            <a:off x="1051560" y="3355848"/>
+            <a:off x="1028700" y="3300984"/>
             <a:ext cx="4572000" cy="502920"/>
           </a:xfrm>
           <a:prstGeom prst="rect">
@@ -22534,7 +22704,7 @@
         </p:nvSpPr>
         <p:spPr>
           <a:xfrm>
-            <a:off x="1051560" y="4069079"/>
+            <a:off x="1028700" y="4014215"/>
             <a:ext cx="4572000" cy="320040"/>
           </a:xfrm>
           <a:prstGeom prst="rect">
@@ -22554,7 +22724,7 @@
               </a:lnSpc>
             </a:pPr>
             <a:r>
-              <a:rPr sz="1200" b="1">
+              <a:rPr sz="1200" b="1" dirty="0">
                 <a:solidFill>
                   <a:srgbClr val="2563EB"/>
                 </a:solidFill>
@@ -22562,7 +22732,73 @@
                 <a:ea typeface="Apple SD Gothic Neo"/>
                 <a:cs typeface="Apple SD Gothic Neo"/>
               </a:rPr>
-              <a:t>Skew 지표 8 종 전수 negative</a:t>
+              <a:t>Skew </a:t>
+            </a:r>
+            <a:r>
+              <a:rPr sz="1200" b="1" dirty="0" err="1">
+                <a:solidFill>
+                  <a:srgbClr val="2563EB"/>
+                </a:solidFill>
+                <a:latin typeface="Apple SD Gothic Neo"/>
+                <a:ea typeface="Apple SD Gothic Neo"/>
+                <a:cs typeface="Apple SD Gothic Neo"/>
+              </a:rPr>
+              <a:t>지표</a:t>
+            </a:r>
+            <a:r>
+              <a:rPr sz="1200" b="1" dirty="0">
+                <a:solidFill>
+                  <a:srgbClr val="2563EB"/>
+                </a:solidFill>
+                <a:latin typeface="Apple SD Gothic Neo"/>
+                <a:ea typeface="Apple SD Gothic Neo"/>
+                <a:cs typeface="Apple SD Gothic Neo"/>
+              </a:rPr>
+              <a:t> 8 </a:t>
+            </a:r>
+            <a:r>
+              <a:rPr sz="1200" b="1" dirty="0" err="1">
+                <a:solidFill>
+                  <a:srgbClr val="2563EB"/>
+                </a:solidFill>
+                <a:latin typeface="Apple SD Gothic Neo"/>
+                <a:ea typeface="Apple SD Gothic Neo"/>
+                <a:cs typeface="Apple SD Gothic Neo"/>
+              </a:rPr>
+              <a:t>종</a:t>
+            </a:r>
+            <a:r>
+              <a:rPr sz="1200" b="1" dirty="0">
+                <a:solidFill>
+                  <a:srgbClr val="2563EB"/>
+                </a:solidFill>
+                <a:latin typeface="Apple SD Gothic Neo"/>
+                <a:ea typeface="Apple SD Gothic Neo"/>
+                <a:cs typeface="Apple SD Gothic Neo"/>
+              </a:rPr>
+              <a:t> </a:t>
+            </a:r>
+            <a:r>
+              <a:rPr sz="1200" b="1" dirty="0" err="1">
+                <a:solidFill>
+                  <a:srgbClr val="2563EB"/>
+                </a:solidFill>
+                <a:latin typeface="Apple SD Gothic Neo"/>
+                <a:ea typeface="Apple SD Gothic Neo"/>
+                <a:cs typeface="Apple SD Gothic Neo"/>
+              </a:rPr>
+              <a:t>전수</a:t>
+            </a:r>
+            <a:r>
+              <a:rPr sz="1200" b="1" dirty="0">
+                <a:solidFill>
+                  <a:srgbClr val="2563EB"/>
+                </a:solidFill>
+                <a:latin typeface="Apple SD Gothic Neo"/>
+                <a:ea typeface="Apple SD Gothic Neo"/>
+                <a:cs typeface="Apple SD Gothic Neo"/>
+              </a:rPr>
+              <a:t> negative</a:t>
             </a:r>
           </a:p>
         </p:txBody>
@@ -22575,7 +22811,7 @@
         </p:nvSpPr>
         <p:spPr>
           <a:xfrm>
-            <a:off x="1051560" y="4361687"/>
+            <a:off x="1028700" y="4306823"/>
             <a:ext cx="4572000" cy="292608"/>
           </a:xfrm>
           <a:prstGeom prst="rect">
@@ -22616,7 +22852,7 @@
         </p:nvSpPr>
         <p:spPr>
           <a:xfrm>
-            <a:off x="1051560" y="4636007"/>
+            <a:off x="1028700" y="4581143"/>
             <a:ext cx="4572000" cy="502920"/>
           </a:xfrm>
           <a:prstGeom prst="rect">
@@ -25628,7 +25864,7 @@
               </a:spcAft>
             </a:pPr>
             <a:r>
-              <a:rPr sz="1100" b="1">
+              <a:rPr sz="1100" b="1" dirty="0" err="1">
                 <a:solidFill>
                   <a:srgbClr val="2563EB"/>
                 </a:solidFill>
@@ -25636,7 +25872,40 @@
                 <a:ea typeface="Apple SD Gothic Neo"/>
                 <a:cs typeface="Apple SD Gothic Neo"/>
               </a:rPr>
-              <a:t>주요 발견 (Phase 1 + Phase 5)</a:t>
+              <a:t>주요</a:t>
+            </a:r>
+            <a:r>
+              <a:rPr sz="1100" b="1" dirty="0">
+                <a:solidFill>
+                  <a:srgbClr val="2563EB"/>
+                </a:solidFill>
+                <a:latin typeface="Apple SD Gothic Neo"/>
+                <a:ea typeface="Apple SD Gothic Neo"/>
+                <a:cs typeface="Apple SD Gothic Neo"/>
+              </a:rPr>
+              <a:t> </a:t>
+            </a:r>
+            <a:r>
+              <a:rPr sz="1100" b="1" dirty="0" err="1">
+                <a:solidFill>
+                  <a:srgbClr val="2563EB"/>
+                </a:solidFill>
+                <a:latin typeface="Apple SD Gothic Neo"/>
+                <a:ea typeface="Apple SD Gothic Neo"/>
+                <a:cs typeface="Apple SD Gothic Neo"/>
+              </a:rPr>
+              <a:t>발견</a:t>
+            </a:r>
+            <a:r>
+              <a:rPr sz="1100" b="1" dirty="0">
+                <a:solidFill>
+                  <a:srgbClr val="2563EB"/>
+                </a:solidFill>
+                <a:latin typeface="Apple SD Gothic Neo"/>
+                <a:ea typeface="Apple SD Gothic Neo"/>
+                <a:cs typeface="Apple SD Gothic Neo"/>
+              </a:rPr>
+              <a:t> (Phase 1 + Phase 5)</a:t>
             </a:r>
           </a:p>
         </p:txBody>
@@ -25698,8 +25967,8 @@
         </p:nvSpPr>
         <p:spPr>
           <a:xfrm>
-            <a:off x="685800" y="3657600"/>
-            <a:ext cx="4800600" cy="365760"/>
+            <a:off x="685800" y="3683846"/>
+            <a:ext cx="4892040" cy="770467"/>
           </a:xfrm>
           <a:prstGeom prst="rect">
             <a:avLst/>
@@ -26337,7 +26606,7 @@
               </a:lnSpc>
             </a:pPr>
             <a:r>
-              <a:rPr sz="1100" b="1">
+              <a:rPr sz="1100" b="1" dirty="0">
                 <a:solidFill>
                   <a:srgbClr val="FFFFFF"/>
                 </a:solidFill>
@@ -26345,8 +26614,269 @@
                 <a:ea typeface="Apple SD Gothic Neo"/>
                 <a:cs typeface="Apple SD Gothic Neo"/>
               </a:rPr>
-              <a:t>→  고차원 벡터에서 query-side feature 로 layer 를 사전 정의하는 것은 불가능 — 본 연구의 Motivation 첫 줄</a:t>
-            </a:r>
+              <a:t>→  </a:t>
+            </a:r>
+            <a:r>
+              <a:rPr sz="1100" b="1" dirty="0" err="1">
+                <a:solidFill>
+                  <a:srgbClr val="FFFFFF"/>
+                </a:solidFill>
+                <a:latin typeface="Apple SD Gothic Neo"/>
+                <a:ea typeface="Apple SD Gothic Neo"/>
+                <a:cs typeface="Apple SD Gothic Neo"/>
+              </a:rPr>
+              <a:t>고차원</a:t>
+            </a:r>
+            <a:r>
+              <a:rPr sz="1100" b="1" dirty="0">
+                <a:solidFill>
+                  <a:srgbClr val="FFFFFF"/>
+                </a:solidFill>
+                <a:latin typeface="Apple SD Gothic Neo"/>
+                <a:ea typeface="Apple SD Gothic Neo"/>
+                <a:cs typeface="Apple SD Gothic Neo"/>
+              </a:rPr>
+              <a:t> </a:t>
+            </a:r>
+            <a:r>
+              <a:rPr sz="1100" b="1" dirty="0" err="1">
+                <a:solidFill>
+                  <a:srgbClr val="FFFFFF"/>
+                </a:solidFill>
+                <a:latin typeface="Apple SD Gothic Neo"/>
+                <a:ea typeface="Apple SD Gothic Neo"/>
+                <a:cs typeface="Apple SD Gothic Neo"/>
+              </a:rPr>
+              <a:t>벡터에서</a:t>
+            </a:r>
+            <a:r>
+              <a:rPr sz="1100" b="1" dirty="0">
+                <a:solidFill>
+                  <a:srgbClr val="FFFFFF"/>
+                </a:solidFill>
+                <a:latin typeface="Apple SD Gothic Neo"/>
+                <a:ea typeface="Apple SD Gothic Neo"/>
+                <a:cs typeface="Apple SD Gothic Neo"/>
+              </a:rPr>
+              <a:t> query-side feature </a:t>
+            </a:r>
+            <a:r>
+              <a:rPr sz="1100" b="1" dirty="0" err="1">
+                <a:solidFill>
+                  <a:srgbClr val="FFFFFF"/>
+                </a:solidFill>
+                <a:latin typeface="Apple SD Gothic Neo"/>
+                <a:ea typeface="Apple SD Gothic Neo"/>
+                <a:cs typeface="Apple SD Gothic Neo"/>
+              </a:rPr>
+              <a:t>로</a:t>
+            </a:r>
+            <a:r>
+              <a:rPr sz="1100" b="1" dirty="0">
+                <a:solidFill>
+                  <a:srgbClr val="FFFFFF"/>
+                </a:solidFill>
+                <a:latin typeface="Apple SD Gothic Neo"/>
+                <a:ea typeface="Apple SD Gothic Neo"/>
+                <a:cs typeface="Apple SD Gothic Neo"/>
+              </a:rPr>
+              <a:t> layer </a:t>
+            </a:r>
+            <a:r>
+              <a:rPr sz="1100" b="1" dirty="0" err="1">
+                <a:solidFill>
+                  <a:srgbClr val="FFFFFF"/>
+                </a:solidFill>
+                <a:latin typeface="Apple SD Gothic Neo"/>
+                <a:ea typeface="Apple SD Gothic Neo"/>
+                <a:cs typeface="Apple SD Gothic Neo"/>
+              </a:rPr>
+              <a:t>를</a:t>
+            </a:r>
+            <a:r>
+              <a:rPr sz="1100" b="1" dirty="0">
+                <a:solidFill>
+                  <a:srgbClr val="FFFFFF"/>
+                </a:solidFill>
+                <a:latin typeface="Apple SD Gothic Neo"/>
+                <a:ea typeface="Apple SD Gothic Neo"/>
+                <a:cs typeface="Apple SD Gothic Neo"/>
+              </a:rPr>
+              <a:t> </a:t>
+            </a:r>
+            <a:r>
+              <a:rPr sz="1100" b="1" dirty="0" err="1">
+                <a:solidFill>
+                  <a:srgbClr val="FFFFFF"/>
+                </a:solidFill>
+                <a:latin typeface="Apple SD Gothic Neo"/>
+                <a:ea typeface="Apple SD Gothic Neo"/>
+                <a:cs typeface="Apple SD Gothic Neo"/>
+              </a:rPr>
+              <a:t>사전</a:t>
+            </a:r>
+            <a:r>
+              <a:rPr sz="1100" b="1" dirty="0">
+                <a:solidFill>
+                  <a:srgbClr val="FFFFFF"/>
+                </a:solidFill>
+                <a:latin typeface="Apple SD Gothic Neo"/>
+                <a:ea typeface="Apple SD Gothic Neo"/>
+                <a:cs typeface="Apple SD Gothic Neo"/>
+              </a:rPr>
+              <a:t> </a:t>
+            </a:r>
+            <a:r>
+              <a:rPr sz="1100" b="1" dirty="0" err="1">
+                <a:solidFill>
+                  <a:srgbClr val="FFFFFF"/>
+                </a:solidFill>
+                <a:latin typeface="Apple SD Gothic Neo"/>
+                <a:ea typeface="Apple SD Gothic Neo"/>
+                <a:cs typeface="Apple SD Gothic Neo"/>
+              </a:rPr>
+              <a:t>정의하는</a:t>
+            </a:r>
+            <a:r>
+              <a:rPr sz="1100" b="1" dirty="0">
+                <a:solidFill>
+                  <a:srgbClr val="FFFFFF"/>
+                </a:solidFill>
+                <a:latin typeface="Apple SD Gothic Neo"/>
+                <a:ea typeface="Apple SD Gothic Neo"/>
+                <a:cs typeface="Apple SD Gothic Neo"/>
+              </a:rPr>
+              <a:t> </a:t>
+            </a:r>
+            <a:r>
+              <a:rPr sz="1100" b="1" dirty="0" err="1">
+                <a:solidFill>
+                  <a:srgbClr val="FFFFFF"/>
+                </a:solidFill>
+                <a:latin typeface="Apple SD Gothic Neo"/>
+                <a:ea typeface="Apple SD Gothic Neo"/>
+                <a:cs typeface="Apple SD Gothic Neo"/>
+              </a:rPr>
+              <a:t>것은</a:t>
+            </a:r>
+            <a:r>
+              <a:rPr sz="1100" b="1" dirty="0">
+                <a:solidFill>
+                  <a:srgbClr val="FFFFFF"/>
+                </a:solidFill>
+                <a:latin typeface="Apple SD Gothic Neo"/>
+                <a:ea typeface="Apple SD Gothic Neo"/>
+                <a:cs typeface="Apple SD Gothic Neo"/>
+              </a:rPr>
+              <a:t> </a:t>
+            </a:r>
+            <a:r>
+              <a:rPr sz="1100" b="1" dirty="0" err="1">
+                <a:solidFill>
+                  <a:srgbClr val="FFFFFF"/>
+                </a:solidFill>
+                <a:latin typeface="Apple SD Gothic Neo"/>
+                <a:ea typeface="Apple SD Gothic Neo"/>
+                <a:cs typeface="Apple SD Gothic Neo"/>
+              </a:rPr>
+              <a:t>불가능</a:t>
+            </a:r>
+            <a:r>
+              <a:rPr sz="1100" b="1" dirty="0">
+                <a:solidFill>
+                  <a:srgbClr val="FFFFFF"/>
+                </a:solidFill>
+                <a:latin typeface="Apple SD Gothic Neo"/>
+                <a:ea typeface="Apple SD Gothic Neo"/>
+                <a:cs typeface="Apple SD Gothic Neo"/>
+              </a:rPr>
+              <a:t> — </a:t>
+            </a:r>
+            <a:r>
+              <a:rPr sz="1100" b="1" dirty="0" err="1">
+                <a:solidFill>
+                  <a:srgbClr val="FFFFFF"/>
+                </a:solidFill>
+                <a:latin typeface="Apple SD Gothic Neo"/>
+                <a:ea typeface="Apple SD Gothic Neo"/>
+                <a:cs typeface="Apple SD Gothic Neo"/>
+              </a:rPr>
+              <a:t>본</a:t>
+            </a:r>
+            <a:r>
+              <a:rPr sz="1100" b="1" dirty="0">
+                <a:solidFill>
+                  <a:srgbClr val="FFFFFF"/>
+                </a:solidFill>
+                <a:latin typeface="Apple SD Gothic Neo"/>
+                <a:ea typeface="Apple SD Gothic Neo"/>
+                <a:cs typeface="Apple SD Gothic Neo"/>
+              </a:rPr>
+              <a:t> </a:t>
+            </a:r>
+            <a:r>
+              <a:rPr sz="1100" b="1" dirty="0" err="1">
+                <a:solidFill>
+                  <a:srgbClr val="FFFFFF"/>
+                </a:solidFill>
+                <a:latin typeface="Apple SD Gothic Neo"/>
+                <a:ea typeface="Apple SD Gothic Neo"/>
+                <a:cs typeface="Apple SD Gothic Neo"/>
+              </a:rPr>
+              <a:t>연구의</a:t>
+            </a:r>
+            <a:r>
+              <a:rPr sz="1100" b="1" dirty="0">
+                <a:solidFill>
+                  <a:srgbClr val="FFFFFF"/>
+                </a:solidFill>
+                <a:latin typeface="Apple SD Gothic Neo"/>
+                <a:ea typeface="Apple SD Gothic Neo"/>
+                <a:cs typeface="Apple SD Gothic Neo"/>
+              </a:rPr>
+              <a:t> Motivation </a:t>
+            </a:r>
+            <a:r>
+              <a:rPr sz="1100" b="1" dirty="0" err="1">
+                <a:solidFill>
+                  <a:srgbClr val="FFFFFF"/>
+                </a:solidFill>
+                <a:latin typeface="Apple SD Gothic Neo"/>
+                <a:ea typeface="Apple SD Gothic Neo"/>
+                <a:cs typeface="Apple SD Gothic Neo"/>
+              </a:rPr>
+              <a:t>첫</a:t>
+            </a:r>
+            <a:r>
+              <a:rPr sz="1100" b="1" dirty="0">
+                <a:solidFill>
+                  <a:srgbClr val="FFFFFF"/>
+                </a:solidFill>
+                <a:latin typeface="Apple SD Gothic Neo"/>
+                <a:ea typeface="Apple SD Gothic Neo"/>
+                <a:cs typeface="Apple SD Gothic Neo"/>
+              </a:rPr>
+              <a:t> </a:t>
+            </a:r>
+            <a:r>
+              <a:rPr sz="1100" b="1" dirty="0" err="1">
+                <a:solidFill>
+                  <a:srgbClr val="FFFFFF"/>
+                </a:solidFill>
+                <a:latin typeface="Apple SD Gothic Neo"/>
+                <a:ea typeface="Apple SD Gothic Neo"/>
+                <a:cs typeface="Apple SD Gothic Neo"/>
+              </a:rPr>
+              <a:t>줄</a:t>
+            </a:r>
+            <a:endParaRPr sz="1100" b="1" dirty="0">
+              <a:solidFill>
+                <a:srgbClr val="FFFFFF"/>
+              </a:solidFill>
+              <a:latin typeface="Apple SD Gothic Neo"/>
+              <a:ea typeface="Apple SD Gothic Neo"/>
+              <a:cs typeface="Apple SD Gothic Neo"/>
+            </a:endParaRPr>
           </a:p>
         </p:txBody>
       </p:sp>
@@ -27852,7 +28382,7 @@
         </p:nvSpPr>
         <p:spPr>
           <a:xfrm>
-            <a:off x="713232" y="4526280"/>
+            <a:off x="662940" y="4736752"/>
             <a:ext cx="6080760" cy="365760"/>
           </a:xfrm>
           <a:prstGeom prst="rect">
@@ -29552,7 +30082,7 @@
         </p:nvSpPr>
         <p:spPr>
           <a:xfrm>
-            <a:off x="777240" y="4663440"/>
+            <a:off x="731520" y="4869180"/>
             <a:ext cx="10515600" cy="411480"/>
           </a:xfrm>
           <a:prstGeom prst="rect">
